--- a/ppt/ETRI_2차년도_수행항목_매핑.pptx
+++ b/ppt/ETRI_2차년도_수행항목_매핑.pptx
@@ -3302,7 +3302,7 @@
                 <a:latin typeface="맑은 고딕"/>
                 <a:ea typeface="맑은 고딕"/>
               </a:rPr>
-              <a:t>저장소: logperch (branch: logperch) - 소스 포함 완전체 산출물</a:t>
+              <a:t>저장소: logperch - 소스 포함 완전체 산출물</a:t>
             </a:r>
           </a:p>
         </p:txBody>
@@ -12316,7 +12316,7 @@
                 <a:latin typeface="맑은 고딕"/>
                 <a:ea typeface="맑은 고딕"/>
               </a:rPr>
-              <a:t>수행항목 3. 대규모(1,000기) 디바이스 인증 AAA ★핵심 ★</a:t>
+              <a:t>수행항목 3. 대규모(1,000기) 디바이스 인증 AAA ★핵심</a:t>
             </a:r>
           </a:p>
         </p:txBody>

--- a/ppt/ETRI_2차년도_수행항목_매핑.pptx
+++ b/ppt/ETRI_2차년도_수행항목_매핑.pptx
@@ -6589,7 +6589,7 @@
               </a:spcAft>
             </a:pPr>
             <a:r>
-              <a:rPr sz="1250" b="0" i="0">
+              <a:rPr sz="1100" b="0" i="0">
                 <a:solidFill>
                   <a:srgbClr val="404040"/>
                 </a:solidFill>
@@ -6606,7 +6606,7 @@
               </a:spcAft>
             </a:pPr>
             <a:r>
-              <a:rPr sz="1250" b="0" i="0">
+              <a:rPr sz="1100" b="0" i="0">
                 <a:solidFill>
                   <a:srgbClr val="404040"/>
                 </a:solidFill>
@@ -6623,7 +6623,7 @@
               </a:spcAft>
             </a:pPr>
             <a:r>
-              <a:rPr sz="1250" b="0" i="0">
+              <a:rPr sz="1100" b="0" i="0">
                 <a:solidFill>
                   <a:srgbClr val="404040"/>
                 </a:solidFill>
@@ -6640,7 +6640,7 @@
               </a:spcAft>
             </a:pPr>
             <a:r>
-              <a:rPr sz="1250" b="0" i="0">
+              <a:rPr sz="1100" b="0" i="0">
                 <a:solidFill>
                   <a:srgbClr val="404040"/>
                 </a:solidFill>
@@ -6657,7 +6657,7 @@
               </a:spcAft>
             </a:pPr>
             <a:r>
-              <a:rPr sz="1250" b="0" i="0">
+              <a:rPr sz="1100" b="0" i="0">
                 <a:solidFill>
                   <a:srgbClr val="404040"/>
                 </a:solidFill>
@@ -6674,7 +6674,7 @@
               </a:spcAft>
             </a:pPr>
             <a:r>
-              <a:rPr sz="1250" b="0" i="0">
+              <a:rPr sz="1100" b="0" i="0">
                 <a:solidFill>
                   <a:srgbClr val="404040"/>
                 </a:solidFill>
@@ -6691,7 +6691,7 @@
               </a:spcAft>
             </a:pPr>
             <a:r>
-              <a:rPr sz="1250" b="0" i="0">
+              <a:rPr sz="1100" b="0" i="0">
                 <a:solidFill>
                   <a:srgbClr val="404040"/>
                 </a:solidFill>
@@ -6699,6 +6699,57 @@
                 <a:ea typeface="맑은 고딕"/>
               </a:rPr>
               <a:t>• RabbitMQ 등 비동기 채널 채택 여부, EdgeMesh 도입 검토</a:t>
+            </a:r>
+          </a:p>
+          <a:p>
+            <a:pPr>
+              <a:spcAft>
+                <a:spcPts val="300"/>
+              </a:spcAft>
+            </a:pPr>
+            <a:r>
+              <a:rPr sz="1100" b="0" i="0">
+                <a:solidFill>
+                  <a:srgbClr val="404040"/>
+                </a:solidFill>
+                <a:latin typeface="맑은 고딕"/>
+                <a:ea typeface="맑은 고딕"/>
+              </a:rPr>
+              <a:t>• auth/token 키 소지 증명(서명 nonce 챌린지) - 현재는 인증서 제시만 검증</a:t>
+            </a:r>
+          </a:p>
+          <a:p>
+            <a:pPr>
+              <a:spcAft>
+                <a:spcPts val="300"/>
+              </a:spcAft>
+            </a:pPr>
+            <a:r>
+              <a:rPr sz="1100" b="0" i="0">
+                <a:solidFill>
+                  <a:srgbClr val="404040"/>
+                </a:solidFill>
+                <a:latin typeface="맑은 고딕"/>
+                <a:ea typeface="맑은 고딕"/>
+              </a:rPr>
+              <a:t>• RBAC default-deny 전환 - 미등재 엔드포인트의 암묵적 허용 제거</a:t>
+            </a:r>
+          </a:p>
+          <a:p>
+            <a:pPr>
+              <a:spcAft>
+                <a:spcPts val="300"/>
+              </a:spcAft>
+            </a:pPr>
+            <a:r>
+              <a:rPr sz="1100" b="0" i="0">
+                <a:solidFill>
+                  <a:srgbClr val="404040"/>
+                </a:solidFill>
+                <a:latin typeface="맑은 고딕"/>
+                <a:ea typeface="맑은 고딕"/>
+              </a:rPr>
+              <a:t>• JWS freshness(재전송 방지) - 텔레메트리 서명에 타임스탬프/nonce 검증 추가</a:t>
             </a:r>
           </a:p>
         </p:txBody>

--- a/ppt/ETRI_2차년도_수행항목_매핑.pptx
+++ b/ppt/ETRI_2차년도_수행항목_매핑.pptx
@@ -19,6 +19,10 @@
     <p:sldId id="267" r:id="rId18"/>
     <p:sldId id="268" r:id="rId19"/>
     <p:sldId id="269" r:id="rId20"/>
+    <p:sldId id="270" r:id="rId21"/>
+    <p:sldId id="271" r:id="rId22"/>
+    <p:sldId id="272" r:id="rId23"/>
+    <p:sldId id="273" r:id="rId24"/>
   </p:sldIdLst>
   <p:sldSz cx="12191695" cy="6858000" type="screen4x3"/>
   <p:notesSz cx="6858000" cy="9144000"/>
@@ -6421,7 +6425,7 @@
                 <a:latin typeface="맑은 고딕"/>
                 <a:ea typeface="맑은 고딕"/>
               </a:rPr>
-              <a:t>향후 계획</a:t>
+              <a:t>기능-화면 매핑 총괄</a:t>
             </a:r>
           </a:p>
           <a:p>
@@ -6433,7 +6437,7 @@
                 <a:latin typeface="맑은 고딕"/>
                 <a:ea typeface="맑은 고딕"/>
               </a:rPr>
-              <a:t>3차년도 이관 항목 및 ETRI 협의 항목</a:t>
+              <a:t>모든 캡처는 실제 실행 화면 - ppt/capture_screens.py 로 재생성 가능</a:t>
             </a:r>
           </a:p>
         </p:txBody>
@@ -6446,8 +6450,1323 @@
         </p:nvSpPr>
         <p:spPr>
           <a:xfrm>
-            <a:off x="457200" y="1051560"/>
-            <a:ext cx="5486400" cy="329184"/>
+            <a:off x="457200" y="1097280"/>
+            <a:ext cx="3200400" cy="841248"/>
+          </a:xfrm>
+          <a:prstGeom prst="rect">
+            <a:avLst/>
+          </a:prstGeom>
+          <a:solidFill>
+            <a:srgbClr val="2E5490"/>
+          </a:solidFill>
+          <a:ln>
+            <a:noFill/>
+          </a:ln>
+          <a:effectLst/>
+        </p:spPr>
+        <p:style>
+          <a:lnRef idx="1">
+            <a:schemeClr val="accent1"/>
+          </a:lnRef>
+          <a:fillRef idx="3">
+            <a:schemeClr val="accent1"/>
+          </a:fillRef>
+          <a:effectRef idx="2">
+            <a:schemeClr val="accent1"/>
+          </a:effectRef>
+          <a:fontRef idx="minor">
+            <a:schemeClr val="lt1"/>
+          </a:fontRef>
+        </p:style>
+        <p:txBody>
+          <a:bodyPr rtlCol="0" anchor="ctr"/>
+          <a:lstStyle/>
+          <a:p>
+            <a:pPr algn="ctr"/>
+          </a:p>
+        </p:txBody>
+      </p:sp>
+      <p:sp>
+        <p:nvSpPr>
+          <p:cNvPr id="5" name="TextBox 4"/>
+          <p:cNvSpPr txBox="1"/>
+          <p:nvPr/>
+        </p:nvSpPr>
+        <p:spPr>
+          <a:xfrm>
+            <a:off x="566928" y="1097280"/>
+            <a:ext cx="2980944" cy="841248"/>
+          </a:xfrm>
+          <a:prstGeom prst="rect">
+            <a:avLst/>
+          </a:prstGeom>
+          <a:noFill/>
+        </p:spPr>
+        <p:txBody>
+          <a:bodyPr wrap="square" anchor="ctr">
+            <a:spAutoFit/>
+          </a:bodyPr>
+          <a:lstStyle/>
+          <a:p>
+            <a:r>
+              <a:rPr sz="1250" b="1" i="0">
+                <a:solidFill>
+                  <a:srgbClr val="FFFFFF"/>
+                </a:solidFill>
+                <a:latin typeface="맑은 고딕"/>
+                <a:ea typeface="맑은 고딕"/>
+              </a:rPr>
+              <a:t>항목 ⑦·④  보안 전·후 비교 시연</a:t>
+            </a:r>
+          </a:p>
+        </p:txBody>
+      </p:sp>
+      <p:sp>
+        <p:nvSpPr>
+          <p:cNvPr id="6" name="Rectangle 5"/>
+          <p:cNvSpPr/>
+          <p:nvPr/>
+        </p:nvSpPr>
+        <p:spPr>
+          <a:xfrm>
+            <a:off x="3730752" y="1097280"/>
+            <a:ext cx="6537960" cy="841248"/>
+          </a:xfrm>
+          <a:prstGeom prst="rect">
+            <a:avLst/>
+          </a:prstGeom>
+          <a:noFill/>
+          <a:ln w="9525">
+            <a:solidFill>
+              <a:srgbClr val="A6A6A6"/>
+            </a:solidFill>
+          </a:ln>
+          <a:effectLst/>
+        </p:spPr>
+        <p:style>
+          <a:lnRef idx="1">
+            <a:schemeClr val="accent1"/>
+          </a:lnRef>
+          <a:fillRef idx="3">
+            <a:schemeClr val="accent1"/>
+          </a:fillRef>
+          <a:effectRef idx="2">
+            <a:schemeClr val="accent1"/>
+          </a:effectRef>
+          <a:fontRef idx="minor">
+            <a:schemeClr val="lt1"/>
+          </a:fontRef>
+        </p:style>
+        <p:txBody>
+          <a:bodyPr rtlCol="0" anchor="ctr"/>
+          <a:lstStyle/>
+          <a:p>
+            <a:pPr algn="ctr"/>
+          </a:p>
+        </p:txBody>
+      </p:sp>
+      <p:sp>
+        <p:nvSpPr>
+          <p:cNvPr id="7" name="TextBox 6"/>
+          <p:cNvSpPr txBox="1"/>
+          <p:nvPr/>
+        </p:nvSpPr>
+        <p:spPr>
+          <a:xfrm>
+            <a:off x="3840480" y="1097280"/>
+            <a:ext cx="6309360" cy="841248"/>
+          </a:xfrm>
+          <a:prstGeom prst="rect">
+            <a:avLst/>
+          </a:prstGeom>
+          <a:noFill/>
+        </p:spPr>
+        <p:txBody>
+          <a:bodyPr wrap="square" anchor="ctr">
+            <a:spAutoFit/>
+          </a:bodyPr>
+          <a:lstStyle/>
+          <a:p>
+            <a:r>
+              <a:rPr sz="1200" b="0" i="0">
+                <a:solidFill>
+                  <a:srgbClr val="404040"/>
+                </a:solidFill>
+                <a:latin typeface="맑은 고딕"/>
+                <a:ea typeface="맑은 고딕"/>
+              </a:rPr>
+              <a:t>demo/run_demo.py 실행 콘솔 - INSECURE 모드 수용(200) vs 보안 모드 거부(401) + 감사로그 tail</a:t>
+            </a:r>
+          </a:p>
+        </p:txBody>
+      </p:sp>
+      <p:sp>
+        <p:nvSpPr>
+          <p:cNvPr id="8" name="Rectangle 7"/>
+          <p:cNvSpPr/>
+          <p:nvPr/>
+        </p:nvSpPr>
+        <p:spPr>
+          <a:xfrm>
+            <a:off x="10341864" y="1097280"/>
+            <a:ext cx="1389888" cy="841248"/>
+          </a:xfrm>
+          <a:prstGeom prst="rect">
+            <a:avLst/>
+          </a:prstGeom>
+          <a:solidFill>
+            <a:srgbClr val="D9D9D9"/>
+          </a:solidFill>
+          <a:ln>
+            <a:noFill/>
+          </a:ln>
+          <a:effectLst/>
+        </p:spPr>
+        <p:style>
+          <a:lnRef idx="1">
+            <a:schemeClr val="accent1"/>
+          </a:lnRef>
+          <a:fillRef idx="3">
+            <a:schemeClr val="accent1"/>
+          </a:fillRef>
+          <a:effectRef idx="2">
+            <a:schemeClr val="accent1"/>
+          </a:effectRef>
+          <a:fontRef idx="minor">
+            <a:schemeClr val="lt1"/>
+          </a:fontRef>
+        </p:style>
+        <p:txBody>
+          <a:bodyPr rtlCol="0" anchor="ctr"/>
+          <a:lstStyle/>
+          <a:p>
+            <a:pPr algn="ctr"/>
+          </a:p>
+        </p:txBody>
+      </p:sp>
+      <p:sp>
+        <p:nvSpPr>
+          <p:cNvPr id="9" name="TextBox 8"/>
+          <p:cNvSpPr txBox="1"/>
+          <p:nvPr/>
+        </p:nvSpPr>
+        <p:spPr>
+          <a:xfrm>
+            <a:off x="10341864" y="1097280"/>
+            <a:ext cx="1389888" cy="841248"/>
+          </a:xfrm>
+          <a:prstGeom prst="rect">
+            <a:avLst/>
+          </a:prstGeom>
+          <a:noFill/>
+        </p:spPr>
+        <p:txBody>
+          <a:bodyPr wrap="none" anchor="ctr">
+            <a:spAutoFit/>
+          </a:bodyPr>
+          <a:lstStyle/>
+          <a:p>
+            <a:pPr algn="ctr"/>
+            <a:r>
+              <a:rPr sz="1200" b="1" i="0">
+                <a:solidFill>
+                  <a:srgbClr val="1F3864"/>
+                </a:solidFill>
+                <a:latin typeface="맑은 고딕"/>
+                <a:ea typeface="맑은 고딕"/>
+              </a:rPr>
+              <a:t>슬라이드 15</a:t>
+            </a:r>
+          </a:p>
+        </p:txBody>
+      </p:sp>
+      <p:sp>
+        <p:nvSpPr>
+          <p:cNvPr id="10" name="Rectangle 9"/>
+          <p:cNvSpPr/>
+          <p:nvPr/>
+        </p:nvSpPr>
+        <p:spPr>
+          <a:xfrm>
+            <a:off x="457200" y="2029968"/>
+            <a:ext cx="3200400" cy="841248"/>
+          </a:xfrm>
+          <a:prstGeom prst="rect">
+            <a:avLst/>
+          </a:prstGeom>
+          <a:solidFill>
+            <a:srgbClr val="2E5490"/>
+          </a:solidFill>
+          <a:ln>
+            <a:noFill/>
+          </a:ln>
+          <a:effectLst/>
+        </p:spPr>
+        <p:style>
+          <a:lnRef idx="1">
+            <a:schemeClr val="accent1"/>
+          </a:lnRef>
+          <a:fillRef idx="3">
+            <a:schemeClr val="accent1"/>
+          </a:fillRef>
+          <a:effectRef idx="2">
+            <a:schemeClr val="accent1"/>
+          </a:effectRef>
+          <a:fontRef idx="minor">
+            <a:schemeClr val="lt1"/>
+          </a:fontRef>
+        </p:style>
+        <p:txBody>
+          <a:bodyPr rtlCol="0" anchor="ctr"/>
+          <a:lstStyle/>
+          <a:p>
+            <a:pPr algn="ctr"/>
+          </a:p>
+        </p:txBody>
+      </p:sp>
+      <p:sp>
+        <p:nvSpPr>
+          <p:cNvPr id="11" name="TextBox 10"/>
+          <p:cNvSpPr txBox="1"/>
+          <p:nvPr/>
+        </p:nvSpPr>
+        <p:spPr>
+          <a:xfrm>
+            <a:off x="566928" y="2029968"/>
+            <a:ext cx="2980944" cy="841248"/>
+          </a:xfrm>
+          <a:prstGeom prst="rect">
+            <a:avLst/>
+          </a:prstGeom>
+          <a:noFill/>
+        </p:spPr>
+        <p:txBody>
+          <a:bodyPr wrap="square" anchor="ctr">
+            <a:spAutoFit/>
+          </a:bodyPr>
+          <a:lstStyle/>
+          <a:p>
+            <a:r>
+              <a:rPr sz="1250" b="1" i="0">
+                <a:solidFill>
+                  <a:srgbClr val="FFFFFF"/>
+                </a:solidFill>
+                <a:latin typeface="맑은 고딕"/>
+                <a:ea typeface="맑은 고딕"/>
+              </a:rPr>
+              <a:t>항목 ③  디바이스 등록·인가 관리 (AAA)</a:t>
+            </a:r>
+          </a:p>
+        </p:txBody>
+      </p:sp>
+      <p:sp>
+        <p:nvSpPr>
+          <p:cNvPr id="12" name="Rectangle 11"/>
+          <p:cNvSpPr/>
+          <p:nvPr/>
+        </p:nvSpPr>
+        <p:spPr>
+          <a:xfrm>
+            <a:off x="3730752" y="2029968"/>
+            <a:ext cx="6537960" cy="841248"/>
+          </a:xfrm>
+          <a:prstGeom prst="rect">
+            <a:avLst/>
+          </a:prstGeom>
+          <a:noFill/>
+          <a:ln w="9525">
+            <a:solidFill>
+              <a:srgbClr val="A6A6A6"/>
+            </a:solidFill>
+          </a:ln>
+          <a:effectLst/>
+        </p:spPr>
+        <p:style>
+          <a:lnRef idx="1">
+            <a:schemeClr val="accent1"/>
+          </a:lnRef>
+          <a:fillRef idx="3">
+            <a:schemeClr val="accent1"/>
+          </a:fillRef>
+          <a:effectRef idx="2">
+            <a:schemeClr val="accent1"/>
+          </a:effectRef>
+          <a:fontRef idx="minor">
+            <a:schemeClr val="lt1"/>
+          </a:fontRef>
+        </p:style>
+        <p:txBody>
+          <a:bodyPr rtlCol="0" anchor="ctr"/>
+          <a:lstStyle/>
+          <a:p>
+            <a:pPr algn="ctr"/>
+          </a:p>
+        </p:txBody>
+      </p:sp>
+      <p:sp>
+        <p:nvSpPr>
+          <p:cNvPr id="13" name="TextBox 12"/>
+          <p:cNvSpPr txBox="1"/>
+          <p:nvPr/>
+        </p:nvSpPr>
+        <p:spPr>
+          <a:xfrm>
+            <a:off x="3840480" y="2029968"/>
+            <a:ext cx="6309360" cy="841248"/>
+          </a:xfrm>
+          <a:prstGeom prst="rect">
+            <a:avLst/>
+          </a:prstGeom>
+          <a:noFill/>
+        </p:spPr>
+        <p:txBody>
+          <a:bodyPr wrap="square" anchor="ctr">
+            <a:spAutoFit/>
+          </a:bodyPr>
+          <a:lstStyle/>
+          <a:p>
+            <a:r>
+              <a:rPr sz="1200" b="0" i="0">
+                <a:solidFill>
+                  <a:srgbClr val="404040"/>
+                </a:solidFill>
+                <a:latin typeface="맑은 고딕"/>
+                <a:ea typeface="맑은 고딕"/>
+              </a:rPr>
+              <a:t>GET /api/v1/devices 관리 API 응답 - 등록 상태(approved/revoked)·인증서 시리얼·last_seen</a:t>
+            </a:r>
+          </a:p>
+        </p:txBody>
+      </p:sp>
+      <p:sp>
+        <p:nvSpPr>
+          <p:cNvPr id="14" name="Rectangle 13"/>
+          <p:cNvSpPr/>
+          <p:nvPr/>
+        </p:nvSpPr>
+        <p:spPr>
+          <a:xfrm>
+            <a:off x="10341864" y="2029968"/>
+            <a:ext cx="1389888" cy="841248"/>
+          </a:xfrm>
+          <a:prstGeom prst="rect">
+            <a:avLst/>
+          </a:prstGeom>
+          <a:solidFill>
+            <a:srgbClr val="D9D9D9"/>
+          </a:solidFill>
+          <a:ln>
+            <a:noFill/>
+          </a:ln>
+          <a:effectLst/>
+        </p:spPr>
+        <p:style>
+          <a:lnRef idx="1">
+            <a:schemeClr val="accent1"/>
+          </a:lnRef>
+          <a:fillRef idx="3">
+            <a:schemeClr val="accent1"/>
+          </a:fillRef>
+          <a:effectRef idx="2">
+            <a:schemeClr val="accent1"/>
+          </a:effectRef>
+          <a:fontRef idx="minor">
+            <a:schemeClr val="lt1"/>
+          </a:fontRef>
+        </p:style>
+        <p:txBody>
+          <a:bodyPr rtlCol="0" anchor="ctr"/>
+          <a:lstStyle/>
+          <a:p>
+            <a:pPr algn="ctr"/>
+          </a:p>
+        </p:txBody>
+      </p:sp>
+      <p:sp>
+        <p:nvSpPr>
+          <p:cNvPr id="15" name="TextBox 14"/>
+          <p:cNvSpPr txBox="1"/>
+          <p:nvPr/>
+        </p:nvSpPr>
+        <p:spPr>
+          <a:xfrm>
+            <a:off x="10341864" y="2029968"/>
+            <a:ext cx="1389888" cy="841248"/>
+          </a:xfrm>
+          <a:prstGeom prst="rect">
+            <a:avLst/>
+          </a:prstGeom>
+          <a:noFill/>
+        </p:spPr>
+        <p:txBody>
+          <a:bodyPr wrap="none" anchor="ctr">
+            <a:spAutoFit/>
+          </a:bodyPr>
+          <a:lstStyle/>
+          <a:p>
+            <a:pPr algn="ctr"/>
+            <a:r>
+              <a:rPr sz="1200" b="1" i="0">
+                <a:solidFill>
+                  <a:srgbClr val="1F3864"/>
+                </a:solidFill>
+                <a:latin typeface="맑은 고딕"/>
+                <a:ea typeface="맑은 고딕"/>
+              </a:rPr>
+              <a:t>슬라이드 16</a:t>
+            </a:r>
+          </a:p>
+        </p:txBody>
+      </p:sp>
+      <p:sp>
+        <p:nvSpPr>
+          <p:cNvPr id="16" name="Rectangle 15"/>
+          <p:cNvSpPr/>
+          <p:nvPr/>
+        </p:nvSpPr>
+        <p:spPr>
+          <a:xfrm>
+            <a:off x="457200" y="2962656"/>
+            <a:ext cx="3200400" cy="841248"/>
+          </a:xfrm>
+          <a:prstGeom prst="rect">
+            <a:avLst/>
+          </a:prstGeom>
+          <a:solidFill>
+            <a:srgbClr val="2E5490"/>
+          </a:solidFill>
+          <a:ln>
+            <a:noFill/>
+          </a:ln>
+          <a:effectLst/>
+        </p:spPr>
+        <p:style>
+          <a:lnRef idx="1">
+            <a:schemeClr val="accent1"/>
+          </a:lnRef>
+          <a:fillRef idx="3">
+            <a:schemeClr val="accent1"/>
+          </a:fillRef>
+          <a:effectRef idx="2">
+            <a:schemeClr val="accent1"/>
+          </a:effectRef>
+          <a:fontRef idx="minor">
+            <a:schemeClr val="lt1"/>
+          </a:fontRef>
+        </p:style>
+        <p:txBody>
+          <a:bodyPr rtlCol="0" anchor="ctr"/>
+          <a:lstStyle/>
+          <a:p>
+            <a:pPr algn="ctr"/>
+          </a:p>
+        </p:txBody>
+      </p:sp>
+      <p:sp>
+        <p:nvSpPr>
+          <p:cNvPr id="17" name="TextBox 16"/>
+          <p:cNvSpPr txBox="1"/>
+          <p:nvPr/>
+        </p:nvSpPr>
+        <p:spPr>
+          <a:xfrm>
+            <a:off x="566928" y="2962656"/>
+            <a:ext cx="2980944" cy="841248"/>
+          </a:xfrm>
+          <a:prstGeom prst="rect">
+            <a:avLst/>
+          </a:prstGeom>
+          <a:noFill/>
+        </p:spPr>
+        <p:txBody>
+          <a:bodyPr wrap="square" anchor="ctr">
+            <a:spAutoFit/>
+          </a:bodyPr>
+          <a:lstStyle/>
+          <a:p>
+            <a:r>
+              <a:rPr sz="1250" b="1" i="0">
+                <a:solidFill>
+                  <a:srgbClr val="FFFFFF"/>
+                </a:solidFill>
+                <a:latin typeface="맑은 고딕"/>
+                <a:ea typeface="맑은 고딕"/>
+              </a:rPr>
+              <a:t>항목 ③  Accounting 감사로그</a:t>
+            </a:r>
+          </a:p>
+        </p:txBody>
+      </p:sp>
+      <p:sp>
+        <p:nvSpPr>
+          <p:cNvPr id="18" name="Rectangle 17"/>
+          <p:cNvSpPr/>
+          <p:nvPr/>
+        </p:nvSpPr>
+        <p:spPr>
+          <a:xfrm>
+            <a:off x="3730752" y="2962656"/>
+            <a:ext cx="6537960" cy="841248"/>
+          </a:xfrm>
+          <a:prstGeom prst="rect">
+            <a:avLst/>
+          </a:prstGeom>
+          <a:noFill/>
+          <a:ln w="9525">
+            <a:solidFill>
+              <a:srgbClr val="A6A6A6"/>
+            </a:solidFill>
+          </a:ln>
+          <a:effectLst/>
+        </p:spPr>
+        <p:style>
+          <a:lnRef idx="1">
+            <a:schemeClr val="accent1"/>
+          </a:lnRef>
+          <a:fillRef idx="3">
+            <a:schemeClr val="accent1"/>
+          </a:fillRef>
+          <a:effectRef idx="2">
+            <a:schemeClr val="accent1"/>
+          </a:effectRef>
+          <a:fontRef idx="minor">
+            <a:schemeClr val="lt1"/>
+          </a:fontRef>
+        </p:style>
+        <p:txBody>
+          <a:bodyPr rtlCol="0" anchor="ctr"/>
+          <a:lstStyle/>
+          <a:p>
+            <a:pPr algn="ctr"/>
+          </a:p>
+        </p:txBody>
+      </p:sp>
+      <p:sp>
+        <p:nvSpPr>
+          <p:cNvPr id="19" name="TextBox 18"/>
+          <p:cNvSpPr txBox="1"/>
+          <p:nvPr/>
+        </p:nvSpPr>
+        <p:spPr>
+          <a:xfrm>
+            <a:off x="3840480" y="2962656"/>
+            <a:ext cx="6309360" cy="841248"/>
+          </a:xfrm>
+          <a:prstGeom prst="rect">
+            <a:avLst/>
+          </a:prstGeom>
+          <a:noFill/>
+        </p:spPr>
+        <p:txBody>
+          <a:bodyPr wrap="square" anchor="ctr">
+            <a:spAutoFit/>
+          </a:bodyPr>
+          <a:lstStyle/>
+          <a:p>
+            <a:r>
+              <a:rPr sz="1200" b="0" i="0">
+                <a:solidFill>
+                  <a:srgbClr val="404040"/>
+                </a:solidFill>
+                <a:latin typeface="맑은 고딕"/>
+                <a:ea typeface="맑은 고딕"/>
+              </a:rPr>
+              <a:t>GET /api/v1/audit - 등록/인증 성공/위조 JWS 거부/폐기 후 인증 실패 실기록</a:t>
+            </a:r>
+          </a:p>
+        </p:txBody>
+      </p:sp>
+      <p:sp>
+        <p:nvSpPr>
+          <p:cNvPr id="20" name="Rectangle 19"/>
+          <p:cNvSpPr/>
+          <p:nvPr/>
+        </p:nvSpPr>
+        <p:spPr>
+          <a:xfrm>
+            <a:off x="10341864" y="2962656"/>
+            <a:ext cx="1389888" cy="841248"/>
+          </a:xfrm>
+          <a:prstGeom prst="rect">
+            <a:avLst/>
+          </a:prstGeom>
+          <a:solidFill>
+            <a:srgbClr val="D9D9D9"/>
+          </a:solidFill>
+          <a:ln>
+            <a:noFill/>
+          </a:ln>
+          <a:effectLst/>
+        </p:spPr>
+        <p:style>
+          <a:lnRef idx="1">
+            <a:schemeClr val="accent1"/>
+          </a:lnRef>
+          <a:fillRef idx="3">
+            <a:schemeClr val="accent1"/>
+          </a:fillRef>
+          <a:effectRef idx="2">
+            <a:schemeClr val="accent1"/>
+          </a:effectRef>
+          <a:fontRef idx="minor">
+            <a:schemeClr val="lt1"/>
+          </a:fontRef>
+        </p:style>
+        <p:txBody>
+          <a:bodyPr rtlCol="0" anchor="ctr"/>
+          <a:lstStyle/>
+          <a:p>
+            <a:pPr algn="ctr"/>
+          </a:p>
+        </p:txBody>
+      </p:sp>
+      <p:sp>
+        <p:nvSpPr>
+          <p:cNvPr id="21" name="TextBox 20"/>
+          <p:cNvSpPr txBox="1"/>
+          <p:nvPr/>
+        </p:nvSpPr>
+        <p:spPr>
+          <a:xfrm>
+            <a:off x="10341864" y="2962656"/>
+            <a:ext cx="1389888" cy="841248"/>
+          </a:xfrm>
+          <a:prstGeom prst="rect">
+            <a:avLst/>
+          </a:prstGeom>
+          <a:noFill/>
+        </p:spPr>
+        <p:txBody>
+          <a:bodyPr wrap="none" anchor="ctr">
+            <a:spAutoFit/>
+          </a:bodyPr>
+          <a:lstStyle/>
+          <a:p>
+            <a:pPr algn="ctr"/>
+            <a:r>
+              <a:rPr sz="1200" b="1" i="0">
+                <a:solidFill>
+                  <a:srgbClr val="1F3864"/>
+                </a:solidFill>
+                <a:latin typeface="맑은 고딕"/>
+                <a:ea typeface="맑은 고딕"/>
+              </a:rPr>
+              <a:t>슬라이드 16</a:t>
+            </a:r>
+          </a:p>
+        </p:txBody>
+      </p:sp>
+      <p:sp>
+        <p:nvSpPr>
+          <p:cNvPr id="22" name="Rectangle 21"/>
+          <p:cNvSpPr/>
+          <p:nvPr/>
+        </p:nvSpPr>
+        <p:spPr>
+          <a:xfrm>
+            <a:off x="457200" y="3895344"/>
+            <a:ext cx="3200400" cy="841248"/>
+          </a:xfrm>
+          <a:prstGeom prst="rect">
+            <a:avLst/>
+          </a:prstGeom>
+          <a:solidFill>
+            <a:srgbClr val="2E5490"/>
+          </a:solidFill>
+          <a:ln>
+            <a:noFill/>
+          </a:ln>
+          <a:effectLst/>
+        </p:spPr>
+        <p:style>
+          <a:lnRef idx="1">
+            <a:schemeClr val="accent1"/>
+          </a:lnRef>
+          <a:fillRef idx="3">
+            <a:schemeClr val="accent1"/>
+          </a:fillRef>
+          <a:effectRef idx="2">
+            <a:schemeClr val="accent1"/>
+          </a:effectRef>
+          <a:fontRef idx="minor">
+            <a:schemeClr val="lt1"/>
+          </a:fontRef>
+        </p:style>
+        <p:txBody>
+          <a:bodyPr rtlCol="0" anchor="ctr"/>
+          <a:lstStyle/>
+          <a:p>
+            <a:pPr algn="ctr"/>
+          </a:p>
+        </p:txBody>
+      </p:sp>
+      <p:sp>
+        <p:nvSpPr>
+          <p:cNvPr id="23" name="TextBox 22"/>
+          <p:cNvSpPr txBox="1"/>
+          <p:nvPr/>
+        </p:nvSpPr>
+        <p:spPr>
+          <a:xfrm>
+            <a:off x="566928" y="3895344"/>
+            <a:ext cx="2980944" cy="841248"/>
+          </a:xfrm>
+          <a:prstGeom prst="rect">
+            <a:avLst/>
+          </a:prstGeom>
+          <a:noFill/>
+        </p:spPr>
+        <p:txBody>
+          <a:bodyPr wrap="square" anchor="ctr">
+            <a:spAutoFit/>
+          </a:bodyPr>
+          <a:lstStyle/>
+          <a:p>
+            <a:r>
+              <a:rPr sz="1250" b="1" i="0">
+                <a:solidFill>
+                  <a:srgbClr val="FFFFFF"/>
+                </a:solidFill>
+                <a:latin typeface="맑은 고딕"/>
+                <a:ea typeface="맑은 고딕"/>
+              </a:rPr>
+              <a:t>항목 ⑥  연동 인터페이스 (R&amp;R)</a:t>
+            </a:r>
+          </a:p>
+        </p:txBody>
+      </p:sp>
+      <p:sp>
+        <p:nvSpPr>
+          <p:cNvPr id="24" name="Rectangle 23"/>
+          <p:cNvSpPr/>
+          <p:nvPr/>
+        </p:nvSpPr>
+        <p:spPr>
+          <a:xfrm>
+            <a:off x="3730752" y="3895344"/>
+            <a:ext cx="6537960" cy="841248"/>
+          </a:xfrm>
+          <a:prstGeom prst="rect">
+            <a:avLst/>
+          </a:prstGeom>
+          <a:noFill/>
+          <a:ln w="9525">
+            <a:solidFill>
+              <a:srgbClr val="A6A6A6"/>
+            </a:solidFill>
+          </a:ln>
+          <a:effectLst/>
+        </p:spPr>
+        <p:style>
+          <a:lnRef idx="1">
+            <a:schemeClr val="accent1"/>
+          </a:lnRef>
+          <a:fillRef idx="3">
+            <a:schemeClr val="accent1"/>
+          </a:fillRef>
+          <a:effectRef idx="2">
+            <a:schemeClr val="accent1"/>
+          </a:effectRef>
+          <a:fontRef idx="minor">
+            <a:schemeClr val="lt1"/>
+          </a:fontRef>
+        </p:style>
+        <p:txBody>
+          <a:bodyPr rtlCol="0" anchor="ctr"/>
+          <a:lstStyle/>
+          <a:p>
+            <a:pPr algn="ctr"/>
+          </a:p>
+        </p:txBody>
+      </p:sp>
+      <p:sp>
+        <p:nvSpPr>
+          <p:cNvPr id="25" name="TextBox 24"/>
+          <p:cNvSpPr txBox="1"/>
+          <p:nvPr/>
+        </p:nvSpPr>
+        <p:spPr>
+          <a:xfrm>
+            <a:off x="3840480" y="3895344"/>
+            <a:ext cx="6309360" cy="841248"/>
+          </a:xfrm>
+          <a:prstGeom prst="rect">
+            <a:avLst/>
+          </a:prstGeom>
+          <a:noFill/>
+        </p:spPr>
+        <p:txBody>
+          <a:bodyPr wrap="square" anchor="ctr">
+            <a:spAutoFit/>
+          </a:bodyPr>
+          <a:lstStyle/>
+          <a:p>
+            <a:r>
+              <a:rPr sz="1200" b="0" i="0">
+                <a:solidFill>
+                  <a:srgbClr val="404040"/>
+                </a:solidFill>
+                <a:latin typeface="맑은 고딕"/>
+                <a:ea typeface="맑은 고딕"/>
+              </a:rPr>
+              <a:t>Swagger UI(/docs) - Manager 전체 API 계약 (docs/04 인터페이스 명세와 1:1)</a:t>
+            </a:r>
+          </a:p>
+        </p:txBody>
+      </p:sp>
+      <p:sp>
+        <p:nvSpPr>
+          <p:cNvPr id="26" name="Rectangle 25"/>
+          <p:cNvSpPr/>
+          <p:nvPr/>
+        </p:nvSpPr>
+        <p:spPr>
+          <a:xfrm>
+            <a:off x="10341864" y="3895344"/>
+            <a:ext cx="1389888" cy="841248"/>
+          </a:xfrm>
+          <a:prstGeom prst="rect">
+            <a:avLst/>
+          </a:prstGeom>
+          <a:solidFill>
+            <a:srgbClr val="D9D9D9"/>
+          </a:solidFill>
+          <a:ln>
+            <a:noFill/>
+          </a:ln>
+          <a:effectLst/>
+        </p:spPr>
+        <p:style>
+          <a:lnRef idx="1">
+            <a:schemeClr val="accent1"/>
+          </a:lnRef>
+          <a:fillRef idx="3">
+            <a:schemeClr val="accent1"/>
+          </a:fillRef>
+          <a:effectRef idx="2">
+            <a:schemeClr val="accent1"/>
+          </a:effectRef>
+          <a:fontRef idx="minor">
+            <a:schemeClr val="lt1"/>
+          </a:fontRef>
+        </p:style>
+        <p:txBody>
+          <a:bodyPr rtlCol="0" anchor="ctr"/>
+          <a:lstStyle/>
+          <a:p>
+            <a:pPr algn="ctr"/>
+          </a:p>
+        </p:txBody>
+      </p:sp>
+      <p:sp>
+        <p:nvSpPr>
+          <p:cNvPr id="27" name="TextBox 26"/>
+          <p:cNvSpPr txBox="1"/>
+          <p:nvPr/>
+        </p:nvSpPr>
+        <p:spPr>
+          <a:xfrm>
+            <a:off x="10341864" y="3895344"/>
+            <a:ext cx="1389888" cy="841248"/>
+          </a:xfrm>
+          <a:prstGeom prst="rect">
+            <a:avLst/>
+          </a:prstGeom>
+          <a:noFill/>
+        </p:spPr>
+        <p:txBody>
+          <a:bodyPr wrap="none" anchor="ctr">
+            <a:spAutoFit/>
+          </a:bodyPr>
+          <a:lstStyle/>
+          <a:p>
+            <a:pPr algn="ctr"/>
+            <a:r>
+              <a:rPr sz="1200" b="1" i="0">
+                <a:solidFill>
+                  <a:srgbClr val="1F3864"/>
+                </a:solidFill>
+                <a:latin typeface="맑은 고딕"/>
+                <a:ea typeface="맑은 고딕"/>
+              </a:rPr>
+              <a:t>슬라이드 17</a:t>
+            </a:r>
+          </a:p>
+        </p:txBody>
+      </p:sp>
+      <p:sp>
+        <p:nvSpPr>
+          <p:cNvPr id="28" name="Rectangle 27"/>
+          <p:cNvSpPr/>
+          <p:nvPr/>
+        </p:nvSpPr>
+        <p:spPr>
+          <a:xfrm>
+            <a:off x="457200" y="4828032"/>
+            <a:ext cx="3200400" cy="841248"/>
+          </a:xfrm>
+          <a:prstGeom prst="rect">
+            <a:avLst/>
+          </a:prstGeom>
+          <a:solidFill>
+            <a:srgbClr val="2E5490"/>
+          </a:solidFill>
+          <a:ln>
+            <a:noFill/>
+          </a:ln>
+          <a:effectLst/>
+        </p:spPr>
+        <p:style>
+          <a:lnRef idx="1">
+            <a:schemeClr val="accent1"/>
+          </a:lnRef>
+          <a:fillRef idx="3">
+            <a:schemeClr val="accent1"/>
+          </a:fillRef>
+          <a:effectRef idx="2">
+            <a:schemeClr val="accent1"/>
+          </a:effectRef>
+          <a:fontRef idx="minor">
+            <a:schemeClr val="lt1"/>
+          </a:fontRef>
+        </p:style>
+        <p:txBody>
+          <a:bodyPr rtlCol="0" anchor="ctr"/>
+          <a:lstStyle/>
+          <a:p>
+            <a:pPr algn="ctr"/>
+          </a:p>
+        </p:txBody>
+      </p:sp>
+      <p:sp>
+        <p:nvSpPr>
+          <p:cNvPr id="29" name="TextBox 28"/>
+          <p:cNvSpPr txBox="1"/>
+          <p:nvPr/>
+        </p:nvSpPr>
+        <p:spPr>
+          <a:xfrm>
+            <a:off x="566928" y="4828032"/>
+            <a:ext cx="2980944" cy="841248"/>
+          </a:xfrm>
+          <a:prstGeom prst="rect">
+            <a:avLst/>
+          </a:prstGeom>
+          <a:noFill/>
+        </p:spPr>
+        <p:txBody>
+          <a:bodyPr wrap="square" anchor="ctr">
+            <a:spAutoFit/>
+          </a:bodyPr>
+          <a:lstStyle/>
+          <a:p>
+            <a:r>
+              <a:rPr sz="1250" b="1" i="0">
+                <a:solidFill>
+                  <a:srgbClr val="FFFFFF"/>
+                </a:solidFill>
+                <a:latin typeface="맑은 고딕"/>
+                <a:ea typeface="맑은 고딕"/>
+              </a:rPr>
+              <a:t>항목 ①·③  대규모(1,000기) 인증 검증</a:t>
+            </a:r>
+          </a:p>
+        </p:txBody>
+      </p:sp>
+      <p:sp>
+        <p:nvSpPr>
+          <p:cNvPr id="30" name="Rectangle 29"/>
+          <p:cNvSpPr/>
+          <p:nvPr/>
+        </p:nvSpPr>
+        <p:spPr>
+          <a:xfrm>
+            <a:off x="3730752" y="4828032"/>
+            <a:ext cx="6537960" cy="841248"/>
+          </a:xfrm>
+          <a:prstGeom prst="rect">
+            <a:avLst/>
+          </a:prstGeom>
+          <a:noFill/>
+          <a:ln w="9525">
+            <a:solidFill>
+              <a:srgbClr val="A6A6A6"/>
+            </a:solidFill>
+          </a:ln>
+          <a:effectLst/>
+        </p:spPr>
+        <p:style>
+          <a:lnRef idx="1">
+            <a:schemeClr val="accent1"/>
+          </a:lnRef>
+          <a:fillRef idx="3">
+            <a:schemeClr val="accent1"/>
+          </a:fillRef>
+          <a:effectRef idx="2">
+            <a:schemeClr val="accent1"/>
+          </a:effectRef>
+          <a:fontRef idx="minor">
+            <a:schemeClr val="lt1"/>
+          </a:fontRef>
+        </p:style>
+        <p:txBody>
+          <a:bodyPr rtlCol="0" anchor="ctr"/>
+          <a:lstStyle/>
+          <a:p>
+            <a:pPr algn="ctr"/>
+          </a:p>
+        </p:txBody>
+      </p:sp>
+      <p:sp>
+        <p:nvSpPr>
+          <p:cNvPr id="31" name="TextBox 30"/>
+          <p:cNvSpPr txBox="1"/>
+          <p:nvPr/>
+        </p:nvSpPr>
+        <p:spPr>
+          <a:xfrm>
+            <a:off x="3840480" y="4828032"/>
+            <a:ext cx="6309360" cy="841248"/>
+          </a:xfrm>
+          <a:prstGeom prst="rect">
+            <a:avLst/>
+          </a:prstGeom>
+          <a:noFill/>
+        </p:spPr>
+        <p:txBody>
+          <a:bodyPr wrap="square" anchor="ctr">
+            <a:spAutoFit/>
+          </a:bodyPr>
+          <a:lstStyle/>
+          <a:p>
+            <a:r>
+              <a:rPr sz="1200" b="0" i="0">
+                <a:solidFill>
+                  <a:srgbClr val="404040"/>
+                </a:solidFill>
+                <a:latin typeface="맑은 고딕"/>
+                <a:ea typeface="맑은 고딕"/>
+              </a:rPr>
+              <a:t>가상 디바이스 일괄 등록·인증·전송 CLI(python -m eam.simulator.fleet) - 성능 차트는 슬라이드 12</a:t>
+            </a:r>
+          </a:p>
+        </p:txBody>
+      </p:sp>
+      <p:sp>
+        <p:nvSpPr>
+          <p:cNvPr id="32" name="Rectangle 31"/>
+          <p:cNvSpPr/>
+          <p:nvPr/>
+        </p:nvSpPr>
+        <p:spPr>
+          <a:xfrm>
+            <a:off x="10341864" y="4828032"/>
+            <a:ext cx="1389888" cy="841248"/>
+          </a:xfrm>
+          <a:prstGeom prst="rect">
+            <a:avLst/>
+          </a:prstGeom>
+          <a:solidFill>
+            <a:srgbClr val="D9D9D9"/>
+          </a:solidFill>
+          <a:ln>
+            <a:noFill/>
+          </a:ln>
+          <a:effectLst/>
+        </p:spPr>
+        <p:style>
+          <a:lnRef idx="1">
+            <a:schemeClr val="accent1"/>
+          </a:lnRef>
+          <a:fillRef idx="3">
+            <a:schemeClr val="accent1"/>
+          </a:fillRef>
+          <a:effectRef idx="2">
+            <a:schemeClr val="accent1"/>
+          </a:effectRef>
+          <a:fontRef idx="minor">
+            <a:schemeClr val="lt1"/>
+          </a:fontRef>
+        </p:style>
+        <p:txBody>
+          <a:bodyPr rtlCol="0" anchor="ctr"/>
+          <a:lstStyle/>
+          <a:p>
+            <a:pPr algn="ctr"/>
+          </a:p>
+        </p:txBody>
+      </p:sp>
+      <p:sp>
+        <p:nvSpPr>
+          <p:cNvPr id="33" name="TextBox 32"/>
+          <p:cNvSpPr txBox="1"/>
+          <p:nvPr/>
+        </p:nvSpPr>
+        <p:spPr>
+          <a:xfrm>
+            <a:off x="10341864" y="4828032"/>
+            <a:ext cx="1389888" cy="841248"/>
+          </a:xfrm>
+          <a:prstGeom prst="rect">
+            <a:avLst/>
+          </a:prstGeom>
+          <a:noFill/>
+        </p:spPr>
+        <p:txBody>
+          <a:bodyPr wrap="none" anchor="ctr">
+            <a:spAutoFit/>
+          </a:bodyPr>
+          <a:lstStyle/>
+          <a:p>
+            <a:pPr algn="ctr"/>
+            <a:r>
+              <a:rPr sz="1200" b="1" i="0">
+                <a:solidFill>
+                  <a:srgbClr val="1F3864"/>
+                </a:solidFill>
+                <a:latin typeface="맑은 고딕"/>
+                <a:ea typeface="맑은 고딕"/>
+              </a:rPr>
+              <a:t>슬라이드 17</a:t>
+            </a:r>
+          </a:p>
+        </p:txBody>
+      </p:sp>
+      <p:sp>
+        <p:nvSpPr>
+          <p:cNvPr id="34" name="TextBox 33"/>
+          <p:cNvSpPr txBox="1"/>
+          <p:nvPr/>
+        </p:nvSpPr>
+        <p:spPr>
+          <a:xfrm>
+            <a:off x="457200" y="5852160"/>
+            <a:ext cx="11274552" cy="548640"/>
+          </a:xfrm>
+          <a:prstGeom prst="rect">
+            <a:avLst/>
+          </a:prstGeom>
+          <a:noFill/>
+        </p:spPr>
+        <p:txBody>
+          <a:bodyPr wrap="square" anchor="t" lIns="0" rIns="0" tIns="0" bIns="0">
+            <a:spAutoFit/>
+          </a:bodyPr>
+          <a:lstStyle/>
+          <a:p>
+            <a:pPr algn="l"/>
+            <a:r>
+              <a:rPr sz="1100" b="0" i="0">
+                <a:solidFill>
+                  <a:srgbClr val="404040"/>
+                </a:solidFill>
+                <a:latin typeface="맑은 고딕"/>
+                <a:ea typeface="맑은 고딕"/>
+              </a:rPr>
+              <a:t>캡처 화면의 모든 데이터(디바이스·감사 이벤트·지연 수치)는 실제 시스템 실행 결과이며, docs/screens/ 에 원본 PNG로 저장되어 있다.</a:t>
+            </a:r>
+          </a:p>
+        </p:txBody>
+      </p:sp>
+      <p:sp>
+        <p:nvSpPr>
+          <p:cNvPr id="35" name="TextBox 34"/>
+          <p:cNvSpPr txBox="1"/>
+          <p:nvPr/>
+        </p:nvSpPr>
+        <p:spPr>
+          <a:xfrm>
+            <a:off x="457200" y="6547104"/>
+            <a:ext cx="7315200" cy="274320"/>
+          </a:xfrm>
+          <a:prstGeom prst="rect">
+            <a:avLst/>
+          </a:prstGeom>
+          <a:noFill/>
+        </p:spPr>
+        <p:txBody>
+          <a:bodyPr wrap="none" lIns="0" tIns="0">
+            <a:spAutoFit/>
+          </a:bodyPr>
+          <a:lstStyle/>
+          <a:p>
+            <a:r>
+              <a:rPr sz="900" b="0" i="0">
+                <a:solidFill>
+                  <a:srgbClr val="A6A6A6"/>
+                </a:solidFill>
+                <a:latin typeface="맑은 고딕"/>
+                <a:ea typeface="맑은 고딕"/>
+              </a:rPr>
+              <a:t>ETRI AI_EDGE 2차년도 - 상명대학교 보안 코어 모듈  |  2026-08-03</a:t>
+            </a:r>
+          </a:p>
+        </p:txBody>
+      </p:sp>
+      <p:sp>
+        <p:nvSpPr>
+          <p:cNvPr id="36" name="TextBox 35"/>
+          <p:cNvSpPr txBox="1"/>
+          <p:nvPr/>
+        </p:nvSpPr>
+        <p:spPr>
+          <a:xfrm>
+            <a:off x="11277295" y="6547104"/>
+            <a:ext cx="548640" cy="274320"/>
+          </a:xfrm>
+          <a:prstGeom prst="rect">
+            <a:avLst/>
+          </a:prstGeom>
+          <a:noFill/>
+        </p:spPr>
+        <p:txBody>
+          <a:bodyPr wrap="none" lIns="0" tIns="0">
+            <a:spAutoFit/>
+          </a:bodyPr>
+          <a:lstStyle/>
+          <a:p>
+            <a:pPr algn="r"/>
+            <a:r>
+              <a:rPr sz="900" b="0" i="0">
+                <a:solidFill>
+                  <a:srgbClr val="A6A6A6"/>
+                </a:solidFill>
+                <a:latin typeface="맑은 고딕"/>
+                <a:ea typeface="맑은 고딕"/>
+              </a:rPr>
+              <a:t>14</a:t>
+            </a:r>
+          </a:p>
+        </p:txBody>
+      </p:sp>
+    </p:spTree>
+  </p:cSld>
+  <p:clrMapOvr>
+    <a:masterClrMapping/>
+  </p:clrMapOvr>
+</p:sld>
+</file>
+
+<file path=ppt/slides/slide15.xml><?xml version="1.0" encoding="utf-8"?>
+<p:sld xmlns:a="http://schemas.openxmlformats.org/drawingml/2006/main" xmlns:p="http://schemas.openxmlformats.org/presentationml/2006/main" xmlns:r="http://schemas.openxmlformats.org/officeDocument/2006/relationships">
+  <p:cSld>
+    <p:spTree>
+      <p:nvGrpSpPr>
+        <p:cNvPr id="1" name=""/>
+        <p:cNvGrpSpPr/>
+        <p:nvPr/>
+      </p:nvGrpSpPr>
+      <p:grpSpPr/>
+      <p:sp>
+        <p:nvSpPr>
+          <p:cNvPr id="2" name="Rectangle 1"/>
+          <p:cNvSpPr/>
+          <p:nvPr/>
+        </p:nvSpPr>
+        <p:spPr>
+          <a:xfrm>
+            <a:off x="0" y="0"/>
+            <a:ext cx="12191695" cy="868680"/>
           </a:xfrm>
           <a:prstGeom prst="rect">
             <a:avLst/>
@@ -6484,80 +7803,143 @@
       </p:sp>
       <p:sp>
         <p:nvSpPr>
+          <p:cNvPr id="3" name="TextBox 2"/>
+          <p:cNvSpPr txBox="1"/>
+          <p:nvPr/>
+        </p:nvSpPr>
+        <p:spPr>
+          <a:xfrm>
+            <a:off x="457200" y="73152"/>
+            <a:ext cx="11277295" cy="731520"/>
+          </a:xfrm>
+          <a:prstGeom prst="rect">
+            <a:avLst/>
+          </a:prstGeom>
+          <a:noFill/>
+        </p:spPr>
+        <p:txBody>
+          <a:bodyPr wrap="none" anchor="ctr" lIns="0" tIns="0">
+            <a:spAutoFit/>
+          </a:bodyPr>
+          <a:lstStyle/>
+          <a:p>
+            <a:r>
+              <a:rPr sz="2600" b="1" i="0">
+                <a:solidFill>
+                  <a:srgbClr val="FFFFFF"/>
+                </a:solidFill>
+                <a:latin typeface="맑은 고딕"/>
+                <a:ea typeface="맑은 고딕"/>
+              </a:rPr>
+              <a:t>화면 1. 보안 적용 전·후 비교 시연 (수행항목 ⑦·④)</a:t>
+            </a:r>
+          </a:p>
+          <a:p>
+            <a:r>
+              <a:rPr sz="1300" b="0" i="0">
+                <a:solidFill>
+                  <a:srgbClr val="8EA9DB"/>
+                </a:solidFill>
+                <a:latin typeface="맑은 고딕"/>
+                <a:ea typeface="맑은 고딕"/>
+              </a:rPr>
+              <a:t>demo/run_demo.py --fast 실제 실행 출력</a:t>
+            </a:r>
+          </a:p>
+        </p:txBody>
+      </p:sp>
+      <p:pic>
+        <p:nvPicPr>
+          <p:cNvPr id="4" name="Picture 3" descr="screen_demo.png"/>
+          <p:cNvPicPr>
+            <a:picLocks noChangeAspect="1"/>
+          </p:cNvPicPr>
+          <p:nvPr/>
+        </p:nvPicPr>
+        <p:blipFill>
+          <a:blip r:embed="rId2"/>
+          <a:stretch>
+            <a:fillRect/>
+          </a:stretch>
+        </p:blipFill>
+        <p:spPr>
+          <a:xfrm>
+            <a:off x="2146043" y="1097280"/>
+            <a:ext cx="7896865" cy="4727448"/>
+          </a:xfrm>
+          <a:prstGeom prst="rect">
+            <a:avLst/>
+          </a:prstGeom>
+        </p:spPr>
+      </p:pic>
+      <p:sp>
+        <p:nvSpPr>
           <p:cNvPr id="5" name="TextBox 4"/>
           <p:cNvSpPr txBox="1"/>
           <p:nvPr/>
         </p:nvSpPr>
         <p:spPr>
           <a:xfrm>
-            <a:off x="457200" y="1051560"/>
-            <a:ext cx="5486400" cy="329184"/>
-          </a:xfrm>
-          <a:prstGeom prst="rect">
-            <a:avLst/>
-          </a:prstGeom>
-          <a:noFill/>
-        </p:spPr>
-        <p:txBody>
-          <a:bodyPr wrap="none" tIns="0" bIns="0" anchor="ctr">
+            <a:off x="457200" y="5879592"/>
+            <a:ext cx="11274552" cy="292608"/>
+          </a:xfrm>
+          <a:prstGeom prst="rect">
+            <a:avLst/>
+          </a:prstGeom>
+          <a:noFill/>
+        </p:spPr>
+        <p:txBody>
+          <a:bodyPr wrap="square" anchor="t" lIns="0" rIns="0" tIns="0" bIns="0">
             <a:spAutoFit/>
           </a:bodyPr>
           <a:lstStyle/>
           <a:p>
-            <a:r>
-              <a:rPr sz="1400" b="1" i="0">
-                <a:solidFill>
-                  <a:srgbClr val="FFFFFF"/>
-                </a:solidFill>
-                <a:latin typeface="맑은 고딕"/>
-                <a:ea typeface="맑은 고딕"/>
-              </a:rPr>
-              <a:t>3차년도 이관 / 확장 검토 항목</a:t>
-            </a:r>
-          </a:p>
-        </p:txBody>
-      </p:sp>
-      <p:sp>
-        <p:nvSpPr>
-          <p:cNvPr id="6" name="Rectangle 5"/>
-          <p:cNvSpPr/>
-          <p:nvPr/>
-        </p:nvSpPr>
-        <p:spPr>
-          <a:xfrm>
-            <a:off x="457200" y="1417320"/>
-            <a:ext cx="5486400" cy="4663440"/>
-          </a:xfrm>
-          <a:prstGeom prst="rect">
-            <a:avLst/>
-          </a:prstGeom>
-          <a:noFill/>
-          <a:ln w="9525">
-            <a:solidFill>
-              <a:srgbClr val="A6A6A6"/>
-            </a:solidFill>
-          </a:ln>
-          <a:effectLst/>
-        </p:spPr>
-        <p:style>
-          <a:lnRef idx="1">
-            <a:schemeClr val="accent1"/>
-          </a:lnRef>
-          <a:fillRef idx="3">
-            <a:schemeClr val="accent1"/>
-          </a:fillRef>
-          <a:effectRef idx="2">
-            <a:schemeClr val="accent1"/>
-          </a:effectRef>
-          <a:fontRef idx="minor">
-            <a:schemeClr val="lt1"/>
-          </a:fontRef>
-        </p:style>
-        <p:txBody>
-          <a:bodyPr rtlCol="0" anchor="ctr"/>
-          <a:lstStyle/>
-          <a:p>
             <a:pPr algn="ctr"/>
+            <a:r>
+              <a:rPr sz="1050" b="0" i="0">
+                <a:solidFill>
+                  <a:srgbClr val="404040"/>
+                </a:solidFill>
+                <a:latin typeface="맑은 고딕"/>
+                <a:ea typeface="맑은 고딕"/>
+              </a:rPr>
+              <a:t>BEFORE: 미인증 주입 HTTP 200 수용 -&gt; AFTER: 동일 요청 401 거부, 정식 등록·인증 디바이스만 성공, 하단은 감사로그 tail</a:t>
+            </a:r>
+          </a:p>
+        </p:txBody>
+      </p:sp>
+      <p:sp>
+        <p:nvSpPr>
+          <p:cNvPr id="6" name="TextBox 5"/>
+          <p:cNvSpPr txBox="1"/>
+          <p:nvPr/>
+        </p:nvSpPr>
+        <p:spPr>
+          <a:xfrm>
+            <a:off x="457200" y="6547104"/>
+            <a:ext cx="7315200" cy="274320"/>
+          </a:xfrm>
+          <a:prstGeom prst="rect">
+            <a:avLst/>
+          </a:prstGeom>
+          <a:noFill/>
+        </p:spPr>
+        <p:txBody>
+          <a:bodyPr wrap="none" lIns="0" tIns="0">
+            <a:spAutoFit/>
+          </a:bodyPr>
+          <a:lstStyle/>
+          <a:p>
+            <a:r>
+              <a:rPr sz="900" b="0" i="0">
+                <a:solidFill>
+                  <a:srgbClr val="A6A6A6"/>
+                </a:solidFill>
+                <a:latin typeface="맑은 고딕"/>
+                <a:ea typeface="맑은 고딕"/>
+              </a:rPr>
+              <a:t>ETRI AI_EDGE 2차년도 - 상명대학교 보안 코어 모듈  |  2026-08-03</a:t>
+            </a:r>
           </a:p>
         </p:txBody>
       </p:sp>
@@ -6569,201 +7951,62 @@
         </p:nvSpPr>
         <p:spPr>
           <a:xfrm>
-            <a:off x="566928" y="1472184"/>
-            <a:ext cx="5266944" cy="4553712"/>
-          </a:xfrm>
-          <a:prstGeom prst="rect">
-            <a:avLst/>
-          </a:prstGeom>
-          <a:noFill/>
-        </p:spPr>
-        <p:txBody>
-          <a:bodyPr wrap="square" lIns="0" rIns="0" tIns="0" bIns="0">
+            <a:off x="11277295" y="6547104"/>
+            <a:ext cx="548640" cy="274320"/>
+          </a:xfrm>
+          <a:prstGeom prst="rect">
+            <a:avLst/>
+          </a:prstGeom>
+          <a:noFill/>
+        </p:spPr>
+        <p:txBody>
+          <a:bodyPr wrap="none" lIns="0" tIns="0">
             <a:spAutoFit/>
           </a:bodyPr>
           <a:lstStyle/>
           <a:p>
-            <a:pPr>
-              <a:spcAft>
-                <a:spcPts val="300"/>
-              </a:spcAft>
-            </a:pPr>
-            <a:r>
-              <a:rPr sz="1100" b="0" i="0">
-                <a:solidFill>
-                  <a:srgbClr val="404040"/>
-                </a:solidFill>
-                <a:latin typeface="맑은 고딕"/>
-                <a:ea typeface="맑은 고딕"/>
-              </a:rPr>
-              <a:t>• 장애 인지·자동 복구 - 2차년도는 시연용 최소 수준(401 거부+감사)만 제공</a:t>
-            </a:r>
-          </a:p>
-          <a:p>
-            <a:pPr>
-              <a:spcAft>
-                <a:spcPts val="300"/>
-              </a:spcAft>
-            </a:pPr>
-            <a:r>
-              <a:rPr sz="1100" b="0" i="0">
-                <a:solidFill>
-                  <a:srgbClr val="404040"/>
-                </a:solidFill>
-                <a:latin typeface="맑은 고딕"/>
-                <a:ea typeface="맑은 고딕"/>
-              </a:rPr>
-              <a:t>• 프레임워크(KubeEdge/ETRI 플랫폼) 전체 통합 - 3차년도 또는 타 기관 연계</a:t>
-            </a:r>
-          </a:p>
-          <a:p>
-            <a:pPr>
-              <a:spcAft>
-                <a:spcPts val="300"/>
-              </a:spcAft>
-            </a:pPr>
-            <a:r>
-              <a:rPr sz="1100" b="0" i="0">
-                <a:solidFill>
-                  <a:srgbClr val="404040"/>
-                </a:solidFill>
-                <a:latin typeface="맑은 고딕"/>
-                <a:ea typeface="맑은 고딕"/>
-              </a:rPr>
-              <a:t>• 실네트워크/K8s 환경 재측정 (현재 μ=23.76 auth/s는 in-process ASGI 기준)</a:t>
-            </a:r>
-          </a:p>
-          <a:p>
-            <a:pPr>
-              <a:spcAft>
-                <a:spcPts val="300"/>
-              </a:spcAft>
-            </a:pPr>
-            <a:r>
-              <a:rPr sz="1100" b="0" i="0">
-                <a:solidFill>
-                  <a:srgbClr val="404040"/>
-                </a:solidFill>
-                <a:latin typeface="맑은 고딕"/>
-                <a:ea typeface="맑은 고딕"/>
-              </a:rPr>
-              <a:t>• uvicorn 다중 워커 + SQLite -&gt; 다른 저장소 전환 (레플리카 확장 시 락 경합 대응)</a:t>
-            </a:r>
-          </a:p>
-          <a:p>
-            <a:pPr>
-              <a:spcAft>
-                <a:spcPts val="300"/>
-              </a:spcAft>
-            </a:pPr>
-            <a:r>
-              <a:rPr sz="1100" b="0" i="0">
-                <a:solidFill>
-                  <a:srgbClr val="404040"/>
-                </a:solidFill>
-                <a:latin typeface="맑은 고딕"/>
-                <a:ea typeface="맑은 고딕"/>
-              </a:rPr>
-              <a:t>• CA 계층 구조 - 다기관 연동 시 Intermediate CA 필요 여부 결정</a:t>
-            </a:r>
-          </a:p>
-          <a:p>
-            <a:pPr>
-              <a:spcAft>
-                <a:spcPts val="300"/>
-              </a:spcAft>
-            </a:pPr>
-            <a:r>
-              <a:rPr sz="1100" b="0" i="0">
-                <a:solidFill>
-                  <a:srgbClr val="404040"/>
-                </a:solidFill>
-                <a:latin typeface="맑은 고딕"/>
-                <a:ea typeface="맑은 고딕"/>
-              </a:rPr>
-              <a:t>• 인증서/키 영속화 - emptyDir -&gt; PVC 또는 KMS/HSM 연동</a:t>
-            </a:r>
-          </a:p>
-          <a:p>
-            <a:pPr>
-              <a:spcAft>
-                <a:spcPts val="300"/>
-              </a:spcAft>
-            </a:pPr>
-            <a:r>
-              <a:rPr sz="1100" b="0" i="0">
-                <a:solidFill>
-                  <a:srgbClr val="404040"/>
-                </a:solidFill>
-                <a:latin typeface="맑은 고딕"/>
-                <a:ea typeface="맑은 고딕"/>
-              </a:rPr>
-              <a:t>• RabbitMQ 등 비동기 채널 채택 여부, EdgeMesh 도입 검토</a:t>
-            </a:r>
-          </a:p>
-          <a:p>
-            <a:pPr>
-              <a:spcAft>
-                <a:spcPts val="300"/>
-              </a:spcAft>
-            </a:pPr>
-            <a:r>
-              <a:rPr sz="1100" b="0" i="0">
-                <a:solidFill>
-                  <a:srgbClr val="404040"/>
-                </a:solidFill>
-                <a:latin typeface="맑은 고딕"/>
-                <a:ea typeface="맑은 고딕"/>
-              </a:rPr>
-              <a:t>• auth/token 키 소지 증명(서명 nonce 챌린지) - 현재는 인증서 제시만 검증</a:t>
-            </a:r>
-          </a:p>
-          <a:p>
-            <a:pPr>
-              <a:spcAft>
-                <a:spcPts val="300"/>
-              </a:spcAft>
-            </a:pPr>
-            <a:r>
-              <a:rPr sz="1100" b="0" i="0">
-                <a:solidFill>
-                  <a:srgbClr val="404040"/>
-                </a:solidFill>
-                <a:latin typeface="맑은 고딕"/>
-                <a:ea typeface="맑은 고딕"/>
-              </a:rPr>
-              <a:t>• RBAC default-deny 전환 - 미등재 엔드포인트의 암묵적 허용 제거</a:t>
-            </a:r>
-          </a:p>
-          <a:p>
-            <a:pPr>
-              <a:spcAft>
-                <a:spcPts val="300"/>
-              </a:spcAft>
-            </a:pPr>
-            <a:r>
-              <a:rPr sz="1100" b="0" i="0">
-                <a:solidFill>
-                  <a:srgbClr val="404040"/>
-                </a:solidFill>
-                <a:latin typeface="맑은 고딕"/>
-                <a:ea typeface="맑은 고딕"/>
-              </a:rPr>
-              <a:t>• JWS freshness(재전송 방지) - 텔레메트리 서명에 타임스탬프/nonce 검증 추가</a:t>
-            </a:r>
-          </a:p>
-        </p:txBody>
-      </p:sp>
-      <p:sp>
-        <p:nvSpPr>
-          <p:cNvPr id="8" name="Rectangle 7"/>
+            <a:pPr algn="r"/>
+            <a:r>
+              <a:rPr sz="900" b="0" i="0">
+                <a:solidFill>
+                  <a:srgbClr val="A6A6A6"/>
+                </a:solidFill>
+                <a:latin typeface="맑은 고딕"/>
+                <a:ea typeface="맑은 고딕"/>
+              </a:rPr>
+              <a:t>15</a:t>
+            </a:r>
+          </a:p>
+        </p:txBody>
+      </p:sp>
+    </p:spTree>
+  </p:cSld>
+  <p:clrMapOvr>
+    <a:masterClrMapping/>
+  </p:clrMapOvr>
+</p:sld>
+</file>
+
+<file path=ppt/slides/slide16.xml><?xml version="1.0" encoding="utf-8"?>
+<p:sld xmlns:a="http://schemas.openxmlformats.org/drawingml/2006/main" xmlns:p="http://schemas.openxmlformats.org/presentationml/2006/main" xmlns:r="http://schemas.openxmlformats.org/officeDocument/2006/relationships">
+  <p:cSld>
+    <p:spTree>
+      <p:nvGrpSpPr>
+        <p:cNvPr id="1" name=""/>
+        <p:cNvGrpSpPr/>
+        <p:nvPr/>
+      </p:nvGrpSpPr>
+      <p:grpSpPr/>
+      <p:sp>
+        <p:nvSpPr>
+          <p:cNvPr id="2" name="Rectangle 1"/>
           <p:cNvSpPr/>
           <p:nvPr/>
         </p:nvSpPr>
         <p:spPr>
           <a:xfrm>
-            <a:off x="6126480" y="1051560"/>
-            <a:ext cx="5605272" cy="329184"/>
+            <a:off x="0" y="0"/>
+            <a:ext cx="12191695" cy="868680"/>
           </a:xfrm>
           <a:prstGeom prst="rect">
             <a:avLst/>
@@ -6800,14 +8043,705 @@
       </p:sp>
       <p:sp>
         <p:nvSpPr>
+          <p:cNvPr id="3" name="TextBox 2"/>
+          <p:cNvSpPr txBox="1"/>
+          <p:nvPr/>
+        </p:nvSpPr>
+        <p:spPr>
+          <a:xfrm>
+            <a:off x="457200" y="73152"/>
+            <a:ext cx="11277295" cy="731520"/>
+          </a:xfrm>
+          <a:prstGeom prst="rect">
+            <a:avLst/>
+          </a:prstGeom>
+          <a:noFill/>
+        </p:spPr>
+        <p:txBody>
+          <a:bodyPr wrap="none" anchor="ctr" lIns="0" tIns="0">
+            <a:spAutoFit/>
+          </a:bodyPr>
+          <a:lstStyle/>
+          <a:p>
+            <a:r>
+              <a:rPr sz="2600" b="1" i="0">
+                <a:solidFill>
+                  <a:srgbClr val="FFFFFF"/>
+                </a:solidFill>
+                <a:latin typeface="맑은 고딕"/>
+                <a:ea typeface="맑은 고딕"/>
+              </a:rPr>
+              <a:t>화면 2. 디바이스 관리·감사로그 조회 (수행항목 ③ AAA)</a:t>
+            </a:r>
+          </a:p>
+          <a:p>
+            <a:r>
+              <a:rPr sz="1300" b="0" i="0">
+                <a:solidFill>
+                  <a:srgbClr val="8EA9DB"/>
+                </a:solidFill>
+                <a:latin typeface="맑은 고딕"/>
+                <a:ea typeface="맑은 고딕"/>
+              </a:rPr>
+              <a:t>Manager 관리 API 실제 응답 - RBAC(operator/admin) 적용</a:t>
+            </a:r>
+          </a:p>
+        </p:txBody>
+      </p:sp>
+      <p:pic>
+        <p:nvPicPr>
+          <p:cNvPr id="4" name="Picture 3" descr="screen_devices.png"/>
+          <p:cNvPicPr>
+            <a:picLocks noChangeAspect="1"/>
+          </p:cNvPicPr>
+          <p:nvPr/>
+        </p:nvPicPr>
+        <p:blipFill>
+          <a:blip r:embed="rId2"/>
+          <a:stretch>
+            <a:fillRect/>
+          </a:stretch>
+        </p:blipFill>
+        <p:spPr>
+          <a:xfrm>
+            <a:off x="457200" y="1848231"/>
+            <a:ext cx="5532120" cy="3042666"/>
+          </a:xfrm>
+          <a:prstGeom prst="rect">
+            <a:avLst/>
+          </a:prstGeom>
+        </p:spPr>
+      </p:pic>
+      <p:sp>
+        <p:nvSpPr>
+          <p:cNvPr id="5" name="TextBox 4"/>
+          <p:cNvSpPr txBox="1"/>
+          <p:nvPr/>
+        </p:nvSpPr>
+        <p:spPr>
+          <a:xfrm>
+            <a:off x="457200" y="4945761"/>
+            <a:ext cx="5532120" cy="292608"/>
+          </a:xfrm>
+          <a:prstGeom prst="rect">
+            <a:avLst/>
+          </a:prstGeom>
+          <a:noFill/>
+        </p:spPr>
+        <p:txBody>
+          <a:bodyPr wrap="square" anchor="t" lIns="0" rIns="0" tIns="0" bIns="0">
+            <a:spAutoFit/>
+          </a:bodyPr>
+          <a:lstStyle/>
+          <a:p>
+            <a:pPr algn="ctr"/>
+            <a:r>
+              <a:rPr sz="1050" b="0" i="0">
+                <a:solidFill>
+                  <a:srgbClr val="404040"/>
+                </a:solidFill>
+                <a:latin typeface="맑은 고딕"/>
+                <a:ea typeface="맑은 고딕"/>
+              </a:rPr>
+              <a:t>GET /api/v1/devices - 등록 상태·인증서 시리얼·last_seen (revoked 상태 포함)</a:t>
+            </a:r>
+          </a:p>
+        </p:txBody>
+      </p:sp>
+      <p:pic>
+        <p:nvPicPr>
+          <p:cNvPr id="6" name="Picture 5" descr="screen_audit.png"/>
+          <p:cNvPicPr>
+            <a:picLocks noChangeAspect="1"/>
+          </p:cNvPicPr>
+          <p:nvPr/>
+        </p:nvPicPr>
+        <p:blipFill>
+          <a:blip r:embed="rId3"/>
+          <a:stretch>
+            <a:fillRect/>
+          </a:stretch>
+        </p:blipFill>
+        <p:spPr>
+          <a:xfrm>
+            <a:off x="6199632" y="2521056"/>
+            <a:ext cx="5532120" cy="1697015"/>
+          </a:xfrm>
+          <a:prstGeom prst="rect">
+            <a:avLst/>
+          </a:prstGeom>
+        </p:spPr>
+      </p:pic>
+      <p:sp>
+        <p:nvSpPr>
+          <p:cNvPr id="7" name="TextBox 6"/>
+          <p:cNvSpPr txBox="1"/>
+          <p:nvPr/>
+        </p:nvSpPr>
+        <p:spPr>
+          <a:xfrm>
+            <a:off x="6199632" y="4272935"/>
+            <a:ext cx="5532120" cy="292608"/>
+          </a:xfrm>
+          <a:prstGeom prst="rect">
+            <a:avLst/>
+          </a:prstGeom>
+          <a:noFill/>
+        </p:spPr>
+        <p:txBody>
+          <a:bodyPr wrap="square" anchor="t" lIns="0" rIns="0" tIns="0" bIns="0">
+            <a:spAutoFit/>
+          </a:bodyPr>
+          <a:lstStyle/>
+          <a:p>
+            <a:pPr algn="ctr"/>
+            <a:r>
+              <a:rPr sz="1050" b="0" i="0">
+                <a:solidFill>
+                  <a:srgbClr val="404040"/>
+                </a:solidFill>
+                <a:latin typeface="맑은 고딕"/>
+                <a:ea typeface="맑은 고딕"/>
+              </a:rPr>
+              <a:t>GET /api/v1/audit - 등록/인증 성공, 위조 JWS 거부, 폐기 후 인증 실패 실기록</a:t>
+            </a:r>
+          </a:p>
+        </p:txBody>
+      </p:sp>
+      <p:sp>
+        <p:nvSpPr>
+          <p:cNvPr id="8" name="TextBox 7"/>
+          <p:cNvSpPr txBox="1"/>
+          <p:nvPr/>
+        </p:nvSpPr>
+        <p:spPr>
+          <a:xfrm>
+            <a:off x="457200" y="6547104"/>
+            <a:ext cx="7315200" cy="274320"/>
+          </a:xfrm>
+          <a:prstGeom prst="rect">
+            <a:avLst/>
+          </a:prstGeom>
+          <a:noFill/>
+        </p:spPr>
+        <p:txBody>
+          <a:bodyPr wrap="none" lIns="0" tIns="0">
+            <a:spAutoFit/>
+          </a:bodyPr>
+          <a:lstStyle/>
+          <a:p>
+            <a:r>
+              <a:rPr sz="900" b="0" i="0">
+                <a:solidFill>
+                  <a:srgbClr val="A6A6A6"/>
+                </a:solidFill>
+                <a:latin typeface="맑은 고딕"/>
+                <a:ea typeface="맑은 고딕"/>
+              </a:rPr>
+              <a:t>ETRI AI_EDGE 2차년도 - 상명대학교 보안 코어 모듈  |  2026-08-03</a:t>
+            </a:r>
+          </a:p>
+        </p:txBody>
+      </p:sp>
+      <p:sp>
+        <p:nvSpPr>
           <p:cNvPr id="9" name="TextBox 8"/>
           <p:cNvSpPr txBox="1"/>
           <p:nvPr/>
         </p:nvSpPr>
         <p:spPr>
           <a:xfrm>
-            <a:off x="6126480" y="1051560"/>
-            <a:ext cx="5605272" cy="329184"/>
+            <a:off x="11277295" y="6547104"/>
+            <a:ext cx="548640" cy="274320"/>
+          </a:xfrm>
+          <a:prstGeom prst="rect">
+            <a:avLst/>
+          </a:prstGeom>
+          <a:noFill/>
+        </p:spPr>
+        <p:txBody>
+          <a:bodyPr wrap="none" lIns="0" tIns="0">
+            <a:spAutoFit/>
+          </a:bodyPr>
+          <a:lstStyle/>
+          <a:p>
+            <a:pPr algn="r"/>
+            <a:r>
+              <a:rPr sz="900" b="0" i="0">
+                <a:solidFill>
+                  <a:srgbClr val="A6A6A6"/>
+                </a:solidFill>
+                <a:latin typeface="맑은 고딕"/>
+                <a:ea typeface="맑은 고딕"/>
+              </a:rPr>
+              <a:t>16</a:t>
+            </a:r>
+          </a:p>
+        </p:txBody>
+      </p:sp>
+    </p:spTree>
+  </p:cSld>
+  <p:clrMapOvr>
+    <a:masterClrMapping/>
+  </p:clrMapOvr>
+</p:sld>
+</file>
+
+<file path=ppt/slides/slide17.xml><?xml version="1.0" encoding="utf-8"?>
+<p:sld xmlns:a="http://schemas.openxmlformats.org/drawingml/2006/main" xmlns:p="http://schemas.openxmlformats.org/presentationml/2006/main" xmlns:r="http://schemas.openxmlformats.org/officeDocument/2006/relationships">
+  <p:cSld>
+    <p:spTree>
+      <p:nvGrpSpPr>
+        <p:cNvPr id="1" name=""/>
+        <p:cNvGrpSpPr/>
+        <p:nvPr/>
+      </p:nvGrpSpPr>
+      <p:grpSpPr/>
+      <p:sp>
+        <p:nvSpPr>
+          <p:cNvPr id="2" name="Rectangle 1"/>
+          <p:cNvSpPr/>
+          <p:nvPr/>
+        </p:nvSpPr>
+        <p:spPr>
+          <a:xfrm>
+            <a:off x="0" y="0"/>
+            <a:ext cx="12191695" cy="868680"/>
+          </a:xfrm>
+          <a:prstGeom prst="rect">
+            <a:avLst/>
+          </a:prstGeom>
+          <a:solidFill>
+            <a:srgbClr val="1F3864"/>
+          </a:solidFill>
+          <a:ln>
+            <a:noFill/>
+          </a:ln>
+          <a:effectLst/>
+        </p:spPr>
+        <p:style>
+          <a:lnRef idx="1">
+            <a:schemeClr val="accent1"/>
+          </a:lnRef>
+          <a:fillRef idx="3">
+            <a:schemeClr val="accent1"/>
+          </a:fillRef>
+          <a:effectRef idx="2">
+            <a:schemeClr val="accent1"/>
+          </a:effectRef>
+          <a:fontRef idx="minor">
+            <a:schemeClr val="lt1"/>
+          </a:fontRef>
+        </p:style>
+        <p:txBody>
+          <a:bodyPr rtlCol="0" anchor="ctr"/>
+          <a:lstStyle/>
+          <a:p>
+            <a:pPr algn="ctr"/>
+          </a:p>
+        </p:txBody>
+      </p:sp>
+      <p:sp>
+        <p:nvSpPr>
+          <p:cNvPr id="3" name="TextBox 2"/>
+          <p:cNvSpPr txBox="1"/>
+          <p:nvPr/>
+        </p:nvSpPr>
+        <p:spPr>
+          <a:xfrm>
+            <a:off x="457200" y="73152"/>
+            <a:ext cx="11277295" cy="731520"/>
+          </a:xfrm>
+          <a:prstGeom prst="rect">
+            <a:avLst/>
+          </a:prstGeom>
+          <a:noFill/>
+        </p:spPr>
+        <p:txBody>
+          <a:bodyPr wrap="none" anchor="ctr" lIns="0" tIns="0">
+            <a:spAutoFit/>
+          </a:bodyPr>
+          <a:lstStyle/>
+          <a:p>
+            <a:r>
+              <a:rPr sz="2600" b="1" i="0">
+                <a:solidFill>
+                  <a:srgbClr val="FFFFFF"/>
+                </a:solidFill>
+                <a:latin typeface="맑은 고딕"/>
+                <a:ea typeface="맑은 고딕"/>
+              </a:rPr>
+              <a:t>화면 3. 연동 인터페이스·대규모 인증 시뮬레이터 (수행항목 ⑥·①·③)</a:t>
+            </a:r>
+          </a:p>
+          <a:p>
+            <a:r>
+              <a:rPr sz="1300" b="0" i="0">
+                <a:solidFill>
+                  <a:srgbClr val="8EA9DB"/>
+                </a:solidFill>
+                <a:latin typeface="맑은 고딕"/>
+                <a:ea typeface="맑은 고딕"/>
+              </a:rPr>
+              <a:t>Swagger UI(/docs) + 가상 디바이스 fleet CLI 실제 실행 출력</a:t>
+            </a:r>
+          </a:p>
+        </p:txBody>
+      </p:sp>
+      <p:pic>
+        <p:nvPicPr>
+          <p:cNvPr id="4" name="Picture 3" descr="screen_swagger.png"/>
+          <p:cNvPicPr>
+            <a:picLocks noChangeAspect="1"/>
+          </p:cNvPicPr>
+          <p:nvPr/>
+        </p:nvPicPr>
+        <p:blipFill>
+          <a:blip r:embed="rId2"/>
+          <a:stretch>
+            <a:fillRect/>
+          </a:stretch>
+        </p:blipFill>
+        <p:spPr>
+          <a:xfrm>
+            <a:off x="457200" y="1500605"/>
+            <a:ext cx="5532120" cy="3737918"/>
+          </a:xfrm>
+          <a:prstGeom prst="rect">
+            <a:avLst/>
+          </a:prstGeom>
+        </p:spPr>
+      </p:pic>
+      <p:sp>
+        <p:nvSpPr>
+          <p:cNvPr id="5" name="TextBox 4"/>
+          <p:cNvSpPr txBox="1"/>
+          <p:nvPr/>
+        </p:nvSpPr>
+        <p:spPr>
+          <a:xfrm>
+            <a:off x="457200" y="5293387"/>
+            <a:ext cx="5532120" cy="292608"/>
+          </a:xfrm>
+          <a:prstGeom prst="rect">
+            <a:avLst/>
+          </a:prstGeom>
+          <a:noFill/>
+        </p:spPr>
+        <p:txBody>
+          <a:bodyPr wrap="square" anchor="t" lIns="0" rIns="0" tIns="0" bIns="0">
+            <a:spAutoFit/>
+          </a:bodyPr>
+          <a:lstStyle/>
+          <a:p>
+            <a:pPr algn="ctr"/>
+            <a:r>
+              <a:rPr sz="1050" b="0" i="0">
+                <a:solidFill>
+                  <a:srgbClr val="404040"/>
+                </a:solidFill>
+                <a:latin typeface="맑은 고딕"/>
+                <a:ea typeface="맑은 고딕"/>
+              </a:rPr>
+              <a:t>Swagger UI - Manager 전체 API 계약 (docs/04 §2 인터페이스 명세와 1:1 대응)</a:t>
+            </a:r>
+          </a:p>
+        </p:txBody>
+      </p:sp>
+      <p:pic>
+        <p:nvPicPr>
+          <p:cNvPr id="6" name="Picture 5" descr="screen_fleet.png"/>
+          <p:cNvPicPr>
+            <a:picLocks noChangeAspect="1"/>
+          </p:cNvPicPr>
+          <p:nvPr/>
+        </p:nvPicPr>
+        <p:blipFill>
+          <a:blip r:embed="rId3"/>
+          <a:stretch>
+            <a:fillRect/>
+          </a:stretch>
+        </p:blipFill>
+        <p:spPr>
+          <a:xfrm>
+            <a:off x="6199632" y="1623956"/>
+            <a:ext cx="5532120" cy="3491216"/>
+          </a:xfrm>
+          <a:prstGeom prst="rect">
+            <a:avLst/>
+          </a:prstGeom>
+        </p:spPr>
+      </p:pic>
+      <p:sp>
+        <p:nvSpPr>
+          <p:cNvPr id="7" name="TextBox 6"/>
+          <p:cNvSpPr txBox="1"/>
+          <p:nvPr/>
+        </p:nvSpPr>
+        <p:spPr>
+          <a:xfrm>
+            <a:off x="6199632" y="5170036"/>
+            <a:ext cx="5532120" cy="292608"/>
+          </a:xfrm>
+          <a:prstGeom prst="rect">
+            <a:avLst/>
+          </a:prstGeom>
+          <a:noFill/>
+        </p:spPr>
+        <p:txBody>
+          <a:bodyPr wrap="square" anchor="t" lIns="0" rIns="0" tIns="0" bIns="0">
+            <a:spAutoFit/>
+          </a:bodyPr>
+          <a:lstStyle/>
+          <a:p>
+            <a:pPr algn="ctr"/>
+            <a:r>
+              <a:rPr sz="1050" b="0" i="0">
+                <a:solidFill>
+                  <a:srgbClr val="404040"/>
+                </a:solidFill>
+                <a:latin typeface="맑은 고딕"/>
+                <a:ea typeface="맑은 고딕"/>
+              </a:rPr>
+              <a:t>python -m eam.simulator.fleet - N기 일괄 등록·인증·전송, 단계별 p50/p95/p99 산출</a:t>
+            </a:r>
+          </a:p>
+        </p:txBody>
+      </p:sp>
+      <p:sp>
+        <p:nvSpPr>
+          <p:cNvPr id="8" name="TextBox 7"/>
+          <p:cNvSpPr txBox="1"/>
+          <p:nvPr/>
+        </p:nvSpPr>
+        <p:spPr>
+          <a:xfrm>
+            <a:off x="457200" y="6547104"/>
+            <a:ext cx="7315200" cy="274320"/>
+          </a:xfrm>
+          <a:prstGeom prst="rect">
+            <a:avLst/>
+          </a:prstGeom>
+          <a:noFill/>
+        </p:spPr>
+        <p:txBody>
+          <a:bodyPr wrap="none" lIns="0" tIns="0">
+            <a:spAutoFit/>
+          </a:bodyPr>
+          <a:lstStyle/>
+          <a:p>
+            <a:r>
+              <a:rPr sz="900" b="0" i="0">
+                <a:solidFill>
+                  <a:srgbClr val="A6A6A6"/>
+                </a:solidFill>
+                <a:latin typeface="맑은 고딕"/>
+                <a:ea typeface="맑은 고딕"/>
+              </a:rPr>
+              <a:t>ETRI AI_EDGE 2차년도 - 상명대학교 보안 코어 모듈  |  2026-08-03</a:t>
+            </a:r>
+          </a:p>
+        </p:txBody>
+      </p:sp>
+      <p:sp>
+        <p:nvSpPr>
+          <p:cNvPr id="9" name="TextBox 8"/>
+          <p:cNvSpPr txBox="1"/>
+          <p:nvPr/>
+        </p:nvSpPr>
+        <p:spPr>
+          <a:xfrm>
+            <a:off x="11277295" y="6547104"/>
+            <a:ext cx="548640" cy="274320"/>
+          </a:xfrm>
+          <a:prstGeom prst="rect">
+            <a:avLst/>
+          </a:prstGeom>
+          <a:noFill/>
+        </p:spPr>
+        <p:txBody>
+          <a:bodyPr wrap="none" lIns="0" tIns="0">
+            <a:spAutoFit/>
+          </a:bodyPr>
+          <a:lstStyle/>
+          <a:p>
+            <a:pPr algn="r"/>
+            <a:r>
+              <a:rPr sz="900" b="0" i="0">
+                <a:solidFill>
+                  <a:srgbClr val="A6A6A6"/>
+                </a:solidFill>
+                <a:latin typeface="맑은 고딕"/>
+                <a:ea typeface="맑은 고딕"/>
+              </a:rPr>
+              <a:t>17</a:t>
+            </a:r>
+          </a:p>
+        </p:txBody>
+      </p:sp>
+    </p:spTree>
+  </p:cSld>
+  <p:clrMapOvr>
+    <a:masterClrMapping/>
+  </p:clrMapOvr>
+</p:sld>
+</file>
+
+<file path=ppt/slides/slide18.xml><?xml version="1.0" encoding="utf-8"?>
+<p:sld xmlns:a="http://schemas.openxmlformats.org/drawingml/2006/main" xmlns:p="http://schemas.openxmlformats.org/presentationml/2006/main" xmlns:r="http://schemas.openxmlformats.org/officeDocument/2006/relationships">
+  <p:cSld>
+    <p:spTree>
+      <p:nvGrpSpPr>
+        <p:cNvPr id="1" name=""/>
+        <p:cNvGrpSpPr/>
+        <p:nvPr/>
+      </p:nvGrpSpPr>
+      <p:grpSpPr/>
+      <p:sp>
+        <p:nvSpPr>
+          <p:cNvPr id="2" name="Rectangle 1"/>
+          <p:cNvSpPr/>
+          <p:nvPr/>
+        </p:nvSpPr>
+        <p:spPr>
+          <a:xfrm>
+            <a:off x="0" y="0"/>
+            <a:ext cx="12191695" cy="868680"/>
+          </a:xfrm>
+          <a:prstGeom prst="rect">
+            <a:avLst/>
+          </a:prstGeom>
+          <a:solidFill>
+            <a:srgbClr val="1F3864"/>
+          </a:solidFill>
+          <a:ln>
+            <a:noFill/>
+          </a:ln>
+          <a:effectLst/>
+        </p:spPr>
+        <p:style>
+          <a:lnRef idx="1">
+            <a:schemeClr val="accent1"/>
+          </a:lnRef>
+          <a:fillRef idx="3">
+            <a:schemeClr val="accent1"/>
+          </a:fillRef>
+          <a:effectRef idx="2">
+            <a:schemeClr val="accent1"/>
+          </a:effectRef>
+          <a:fontRef idx="minor">
+            <a:schemeClr val="lt1"/>
+          </a:fontRef>
+        </p:style>
+        <p:txBody>
+          <a:bodyPr rtlCol="0" anchor="ctr"/>
+          <a:lstStyle/>
+          <a:p>
+            <a:pPr algn="ctr"/>
+          </a:p>
+        </p:txBody>
+      </p:sp>
+      <p:sp>
+        <p:nvSpPr>
+          <p:cNvPr id="3" name="TextBox 2"/>
+          <p:cNvSpPr txBox="1"/>
+          <p:nvPr/>
+        </p:nvSpPr>
+        <p:spPr>
+          <a:xfrm>
+            <a:off x="457200" y="73152"/>
+            <a:ext cx="11277295" cy="731520"/>
+          </a:xfrm>
+          <a:prstGeom prst="rect">
+            <a:avLst/>
+          </a:prstGeom>
+          <a:noFill/>
+        </p:spPr>
+        <p:txBody>
+          <a:bodyPr wrap="none" anchor="ctr" lIns="0" tIns="0">
+            <a:spAutoFit/>
+          </a:bodyPr>
+          <a:lstStyle/>
+          <a:p>
+            <a:r>
+              <a:rPr sz="2600" b="1" i="0">
+                <a:solidFill>
+                  <a:srgbClr val="FFFFFF"/>
+                </a:solidFill>
+                <a:latin typeface="맑은 고딕"/>
+                <a:ea typeface="맑은 고딕"/>
+              </a:rPr>
+              <a:t>향후 계획</a:t>
+            </a:r>
+          </a:p>
+          <a:p>
+            <a:r>
+              <a:rPr sz="1300" b="0" i="0">
+                <a:solidFill>
+                  <a:srgbClr val="8EA9DB"/>
+                </a:solidFill>
+                <a:latin typeface="맑은 고딕"/>
+                <a:ea typeface="맑은 고딕"/>
+              </a:rPr>
+              <a:t>3차년도 이관 항목 및 ETRI 협의 항목</a:t>
+            </a:r>
+          </a:p>
+        </p:txBody>
+      </p:sp>
+      <p:sp>
+        <p:nvSpPr>
+          <p:cNvPr id="4" name="Rectangle 3"/>
+          <p:cNvSpPr/>
+          <p:nvPr/>
+        </p:nvSpPr>
+        <p:spPr>
+          <a:xfrm>
+            <a:off x="457200" y="1051560"/>
+            <a:ext cx="5486400" cy="329184"/>
+          </a:xfrm>
+          <a:prstGeom prst="rect">
+            <a:avLst/>
+          </a:prstGeom>
+          <a:solidFill>
+            <a:srgbClr val="1F3864"/>
+          </a:solidFill>
+          <a:ln>
+            <a:noFill/>
+          </a:ln>
+          <a:effectLst/>
+        </p:spPr>
+        <p:style>
+          <a:lnRef idx="1">
+            <a:schemeClr val="accent1"/>
+          </a:lnRef>
+          <a:fillRef idx="3">
+            <a:schemeClr val="accent1"/>
+          </a:fillRef>
+          <a:effectRef idx="2">
+            <a:schemeClr val="accent1"/>
+          </a:effectRef>
+          <a:fontRef idx="minor">
+            <a:schemeClr val="lt1"/>
+          </a:fontRef>
+        </p:style>
+        <p:txBody>
+          <a:bodyPr rtlCol="0" anchor="ctr"/>
+          <a:lstStyle/>
+          <a:p>
+            <a:pPr algn="ctr"/>
+          </a:p>
+        </p:txBody>
+      </p:sp>
+      <p:sp>
+        <p:nvSpPr>
+          <p:cNvPr id="5" name="TextBox 4"/>
+          <p:cNvSpPr txBox="1"/>
+          <p:nvPr/>
+        </p:nvSpPr>
+        <p:spPr>
+          <a:xfrm>
+            <a:off x="457200" y="1051560"/>
+            <a:ext cx="5486400" cy="329184"/>
           </a:xfrm>
           <a:prstGeom prst="rect">
             <a:avLst/>
@@ -6828,21 +8762,21 @@
                 <a:latin typeface="맑은 고딕"/>
                 <a:ea typeface="맑은 고딕"/>
               </a:rPr>
-              <a:t>ETRI 협의 필요 항목</a:t>
-            </a:r>
-          </a:p>
-        </p:txBody>
-      </p:sp>
-      <p:sp>
-        <p:nvSpPr>
-          <p:cNvPr id="10" name="Rectangle 9"/>
+              <a:t>3차년도 이관 / 확장 검토 항목</a:t>
+            </a:r>
+          </a:p>
+        </p:txBody>
+      </p:sp>
+      <p:sp>
+        <p:nvSpPr>
+          <p:cNvPr id="6" name="Rectangle 5"/>
           <p:cNvSpPr/>
           <p:nvPr/>
         </p:nvSpPr>
         <p:spPr>
           <a:xfrm>
-            <a:off x="6126480" y="1417320"/>
-            <a:ext cx="5605272" cy="4663440"/>
+            <a:off x="457200" y="1417320"/>
+            <a:ext cx="5486400" cy="4663440"/>
           </a:xfrm>
           <a:prstGeom prst="rect">
             <a:avLst/>
@@ -6879,14 +8813,14 @@
       </p:sp>
       <p:sp>
         <p:nvSpPr>
-          <p:cNvPr id="11" name="TextBox 10"/>
+          <p:cNvPr id="7" name="TextBox 6"/>
           <p:cNvSpPr txBox="1"/>
           <p:nvPr/>
         </p:nvSpPr>
         <p:spPr>
           <a:xfrm>
-            <a:off x="6236208" y="1472184"/>
-            <a:ext cx="5385816" cy="4553712"/>
+            <a:off x="566928" y="1472184"/>
+            <a:ext cx="5266944" cy="4553712"/>
           </a:xfrm>
           <a:prstGeom prst="rect">
             <a:avLst/>
@@ -6905,14 +8839,14 @@
               </a:spcAft>
             </a:pPr>
             <a:r>
-              <a:rPr sz="1250" b="0" i="0">
+              <a:rPr sz="1100" b="0" i="0">
                 <a:solidFill>
                   <a:srgbClr val="404040"/>
                 </a:solidFill>
                 <a:latin typeface="맑은 고딕"/>
                 <a:ea typeface="맑은 고딕"/>
               </a:rPr>
-              <a:t>• mTLS 종단 위치 - 리버스 프록시/Ingress 실제 구성 확정</a:t>
+              <a:t>• 장애 인지·자동 복구 - 2차년도는 시연용 최소 수준(401 거부+감사)만 제공</a:t>
             </a:r>
           </a:p>
           <a:p>
@@ -6922,14 +8856,14 @@
               </a:spcAft>
             </a:pPr>
             <a:r>
-              <a:rPr sz="1250" b="0" i="0">
+              <a:rPr sz="1100" b="0" i="0">
                 <a:solidFill>
                   <a:srgbClr val="404040"/>
                 </a:solidFill>
                 <a:latin typeface="맑은 고딕"/>
                 <a:ea typeface="맑은 고딕"/>
               </a:rPr>
-              <a:t>• 다수 Manager 트래픽 라우팅 - site/group 샤딩 규칙의 실배포 토폴로지 매핑</a:t>
+              <a:t>• 프레임워크(KubeEdge/ETRI 플랫폼) 전체 통합 - 3차년도 또는 타 기관 연계</a:t>
             </a:r>
           </a:p>
           <a:p>
@@ -6939,14 +8873,14 @@
               </a:spcAft>
             </a:pPr>
             <a:r>
-              <a:rPr sz="1250" b="0" i="0">
+              <a:rPr sz="1100" b="0" i="0">
                 <a:solidFill>
                   <a:srgbClr val="404040"/>
                 </a:solidFill>
                 <a:latin typeface="맑은 고딕"/>
                 <a:ea typeface="맑은 고딕"/>
               </a:rPr>
-              <a:t>• 목표 SLA 재정의 - 현재 Wq p95&lt;1.0s는 임의 설정값, 실제 요구사항 확정 필요</a:t>
+              <a:t>• 실네트워크/K8s 환경 재측정 (현재 μ=23.76 auth/s는 in-process ASGI 기준)</a:t>
             </a:r>
           </a:p>
           <a:p>
@@ -6956,14 +8890,14 @@
               </a:spcAft>
             </a:pPr>
             <a:r>
-              <a:rPr sz="1250" b="0" i="0">
+              <a:rPr sz="1100" b="0" i="0">
                 <a:solidFill>
                   <a:srgbClr val="404040"/>
                 </a:solidFill>
                 <a:latin typeface="맑은 고딕"/>
                 <a:ea typeface="맑은 고딕"/>
               </a:rPr>
-              <a:t>• 1,000기 규모 실증 테스트베드 - 물리/가상 디바이스 자원 배정</a:t>
+              <a:t>• uvicorn 다중 워커 + SQLite -&gt; 다른 저장소 전환 (레플리카 확장 시 락 경합 대응)</a:t>
             </a:r>
           </a:p>
           <a:p>
@@ -6973,6 +8907,322 @@
               </a:spcAft>
             </a:pPr>
             <a:r>
+              <a:rPr sz="1100" b="0" i="0">
+                <a:solidFill>
+                  <a:srgbClr val="404040"/>
+                </a:solidFill>
+                <a:latin typeface="맑은 고딕"/>
+                <a:ea typeface="맑은 고딕"/>
+              </a:rPr>
+              <a:t>• CA 계층 구조 - 다기관 연동 시 Intermediate CA 필요 여부 결정</a:t>
+            </a:r>
+          </a:p>
+          <a:p>
+            <a:pPr>
+              <a:spcAft>
+                <a:spcPts val="300"/>
+              </a:spcAft>
+            </a:pPr>
+            <a:r>
+              <a:rPr sz="1100" b="0" i="0">
+                <a:solidFill>
+                  <a:srgbClr val="404040"/>
+                </a:solidFill>
+                <a:latin typeface="맑은 고딕"/>
+                <a:ea typeface="맑은 고딕"/>
+              </a:rPr>
+              <a:t>• 인증서/키 영속화 - emptyDir -&gt; PVC 또는 KMS/HSM 연동</a:t>
+            </a:r>
+          </a:p>
+          <a:p>
+            <a:pPr>
+              <a:spcAft>
+                <a:spcPts val="300"/>
+              </a:spcAft>
+            </a:pPr>
+            <a:r>
+              <a:rPr sz="1100" b="0" i="0">
+                <a:solidFill>
+                  <a:srgbClr val="404040"/>
+                </a:solidFill>
+                <a:latin typeface="맑은 고딕"/>
+                <a:ea typeface="맑은 고딕"/>
+              </a:rPr>
+              <a:t>• RabbitMQ 등 비동기 채널 채택 여부, EdgeMesh 도입 검토</a:t>
+            </a:r>
+          </a:p>
+          <a:p>
+            <a:pPr>
+              <a:spcAft>
+                <a:spcPts val="300"/>
+              </a:spcAft>
+            </a:pPr>
+            <a:r>
+              <a:rPr sz="1100" b="0" i="0">
+                <a:solidFill>
+                  <a:srgbClr val="404040"/>
+                </a:solidFill>
+                <a:latin typeface="맑은 고딕"/>
+                <a:ea typeface="맑은 고딕"/>
+              </a:rPr>
+              <a:t>• auth/token 키 소지 증명(서명 nonce 챌린지) - 현재는 인증서 제시만 검증</a:t>
+            </a:r>
+          </a:p>
+          <a:p>
+            <a:pPr>
+              <a:spcAft>
+                <a:spcPts val="300"/>
+              </a:spcAft>
+            </a:pPr>
+            <a:r>
+              <a:rPr sz="1100" b="0" i="0">
+                <a:solidFill>
+                  <a:srgbClr val="404040"/>
+                </a:solidFill>
+                <a:latin typeface="맑은 고딕"/>
+                <a:ea typeface="맑은 고딕"/>
+              </a:rPr>
+              <a:t>• RBAC default-deny 전환 - 미등재 엔드포인트의 암묵적 허용 제거</a:t>
+            </a:r>
+          </a:p>
+          <a:p>
+            <a:pPr>
+              <a:spcAft>
+                <a:spcPts val="300"/>
+              </a:spcAft>
+            </a:pPr>
+            <a:r>
+              <a:rPr sz="1100" b="0" i="0">
+                <a:solidFill>
+                  <a:srgbClr val="404040"/>
+                </a:solidFill>
+                <a:latin typeface="맑은 고딕"/>
+                <a:ea typeface="맑은 고딕"/>
+              </a:rPr>
+              <a:t>• JWS freshness(재전송 방지) - 텔레메트리 서명에 타임스탬프/nonce 검증 추가</a:t>
+            </a:r>
+          </a:p>
+        </p:txBody>
+      </p:sp>
+      <p:sp>
+        <p:nvSpPr>
+          <p:cNvPr id="8" name="Rectangle 7"/>
+          <p:cNvSpPr/>
+          <p:nvPr/>
+        </p:nvSpPr>
+        <p:spPr>
+          <a:xfrm>
+            <a:off x="6126480" y="1051560"/>
+            <a:ext cx="5605272" cy="329184"/>
+          </a:xfrm>
+          <a:prstGeom prst="rect">
+            <a:avLst/>
+          </a:prstGeom>
+          <a:solidFill>
+            <a:srgbClr val="1F3864"/>
+          </a:solidFill>
+          <a:ln>
+            <a:noFill/>
+          </a:ln>
+          <a:effectLst/>
+        </p:spPr>
+        <p:style>
+          <a:lnRef idx="1">
+            <a:schemeClr val="accent1"/>
+          </a:lnRef>
+          <a:fillRef idx="3">
+            <a:schemeClr val="accent1"/>
+          </a:fillRef>
+          <a:effectRef idx="2">
+            <a:schemeClr val="accent1"/>
+          </a:effectRef>
+          <a:fontRef idx="minor">
+            <a:schemeClr val="lt1"/>
+          </a:fontRef>
+        </p:style>
+        <p:txBody>
+          <a:bodyPr rtlCol="0" anchor="ctr"/>
+          <a:lstStyle/>
+          <a:p>
+            <a:pPr algn="ctr"/>
+          </a:p>
+        </p:txBody>
+      </p:sp>
+      <p:sp>
+        <p:nvSpPr>
+          <p:cNvPr id="9" name="TextBox 8"/>
+          <p:cNvSpPr txBox="1"/>
+          <p:nvPr/>
+        </p:nvSpPr>
+        <p:spPr>
+          <a:xfrm>
+            <a:off x="6126480" y="1051560"/>
+            <a:ext cx="5605272" cy="329184"/>
+          </a:xfrm>
+          <a:prstGeom prst="rect">
+            <a:avLst/>
+          </a:prstGeom>
+          <a:noFill/>
+        </p:spPr>
+        <p:txBody>
+          <a:bodyPr wrap="none" tIns="0" bIns="0" anchor="ctr">
+            <a:spAutoFit/>
+          </a:bodyPr>
+          <a:lstStyle/>
+          <a:p>
+            <a:r>
+              <a:rPr sz="1400" b="1" i="0">
+                <a:solidFill>
+                  <a:srgbClr val="FFFFFF"/>
+                </a:solidFill>
+                <a:latin typeface="맑은 고딕"/>
+                <a:ea typeface="맑은 고딕"/>
+              </a:rPr>
+              <a:t>ETRI 협의 필요 항목</a:t>
+            </a:r>
+          </a:p>
+        </p:txBody>
+      </p:sp>
+      <p:sp>
+        <p:nvSpPr>
+          <p:cNvPr id="10" name="Rectangle 9"/>
+          <p:cNvSpPr/>
+          <p:nvPr/>
+        </p:nvSpPr>
+        <p:spPr>
+          <a:xfrm>
+            <a:off x="6126480" y="1417320"/>
+            <a:ext cx="5605272" cy="4663440"/>
+          </a:xfrm>
+          <a:prstGeom prst="rect">
+            <a:avLst/>
+          </a:prstGeom>
+          <a:noFill/>
+          <a:ln w="9525">
+            <a:solidFill>
+              <a:srgbClr val="A6A6A6"/>
+            </a:solidFill>
+          </a:ln>
+          <a:effectLst/>
+        </p:spPr>
+        <p:style>
+          <a:lnRef idx="1">
+            <a:schemeClr val="accent1"/>
+          </a:lnRef>
+          <a:fillRef idx="3">
+            <a:schemeClr val="accent1"/>
+          </a:fillRef>
+          <a:effectRef idx="2">
+            <a:schemeClr val="accent1"/>
+          </a:effectRef>
+          <a:fontRef idx="minor">
+            <a:schemeClr val="lt1"/>
+          </a:fontRef>
+        </p:style>
+        <p:txBody>
+          <a:bodyPr rtlCol="0" anchor="ctr"/>
+          <a:lstStyle/>
+          <a:p>
+            <a:pPr algn="ctr"/>
+          </a:p>
+        </p:txBody>
+      </p:sp>
+      <p:sp>
+        <p:nvSpPr>
+          <p:cNvPr id="11" name="TextBox 10"/>
+          <p:cNvSpPr txBox="1"/>
+          <p:nvPr/>
+        </p:nvSpPr>
+        <p:spPr>
+          <a:xfrm>
+            <a:off x="6236208" y="1472184"/>
+            <a:ext cx="5385816" cy="4553712"/>
+          </a:xfrm>
+          <a:prstGeom prst="rect">
+            <a:avLst/>
+          </a:prstGeom>
+          <a:noFill/>
+        </p:spPr>
+        <p:txBody>
+          <a:bodyPr wrap="square" lIns="0" rIns="0" tIns="0" bIns="0">
+            <a:spAutoFit/>
+          </a:bodyPr>
+          <a:lstStyle/>
+          <a:p>
+            <a:pPr>
+              <a:spcAft>
+                <a:spcPts val="300"/>
+              </a:spcAft>
+            </a:pPr>
+            <a:r>
+              <a:rPr sz="1250" b="0" i="0">
+                <a:solidFill>
+                  <a:srgbClr val="404040"/>
+                </a:solidFill>
+                <a:latin typeface="맑은 고딕"/>
+                <a:ea typeface="맑은 고딕"/>
+              </a:rPr>
+              <a:t>• mTLS 종단 위치 - 리버스 프록시/Ingress 실제 구성 확정</a:t>
+            </a:r>
+          </a:p>
+          <a:p>
+            <a:pPr>
+              <a:spcAft>
+                <a:spcPts val="300"/>
+              </a:spcAft>
+            </a:pPr>
+            <a:r>
+              <a:rPr sz="1250" b="0" i="0">
+                <a:solidFill>
+                  <a:srgbClr val="404040"/>
+                </a:solidFill>
+                <a:latin typeface="맑은 고딕"/>
+                <a:ea typeface="맑은 고딕"/>
+              </a:rPr>
+              <a:t>• 다수 Manager 트래픽 라우팅 - site/group 샤딩 규칙의 실배포 토폴로지 매핑</a:t>
+            </a:r>
+          </a:p>
+          <a:p>
+            <a:pPr>
+              <a:spcAft>
+                <a:spcPts val="300"/>
+              </a:spcAft>
+            </a:pPr>
+            <a:r>
+              <a:rPr sz="1250" b="0" i="0">
+                <a:solidFill>
+                  <a:srgbClr val="404040"/>
+                </a:solidFill>
+                <a:latin typeface="맑은 고딕"/>
+                <a:ea typeface="맑은 고딕"/>
+              </a:rPr>
+              <a:t>• 목표 SLA 재정의 - 현재 Wq p95&lt;1.0s는 임의 설정값, 실제 요구사항 확정 필요</a:t>
+            </a:r>
+          </a:p>
+          <a:p>
+            <a:pPr>
+              <a:spcAft>
+                <a:spcPts val="300"/>
+              </a:spcAft>
+            </a:pPr>
+            <a:r>
+              <a:rPr sz="1250" b="0" i="0">
+                <a:solidFill>
+                  <a:srgbClr val="404040"/>
+                </a:solidFill>
+                <a:latin typeface="맑은 고딕"/>
+                <a:ea typeface="맑은 고딕"/>
+              </a:rPr>
+              <a:t>• 1,000기 규모 실증 테스트베드 - 물리/가상 디바이스 자원 배정</a:t>
+            </a:r>
+          </a:p>
+          <a:p>
+            <a:pPr>
+              <a:spcAft>
+                <a:spcPts val="300"/>
+              </a:spcAft>
+            </a:pPr>
+            <a:r>
               <a:rPr sz="1250" b="0" i="0">
                 <a:solidFill>
                   <a:srgbClr val="404040"/>
@@ -7051,7 +9301,7 @@
                 <a:latin typeface="맑은 고딕"/>
                 <a:ea typeface="맑은 고딕"/>
               </a:rPr>
-              <a:t>14</a:t>
+              <a:t>18</a:t>
             </a:r>
           </a:p>
         </p:txBody>

--- a/ppt/ETRI_2차년도_수행항목_매핑.pptx
+++ b/ppt/ETRI_2차년도_수행항목_매핑.pptx
@@ -23,6 +23,7 @@
     <p:sldId id="271" r:id="rId22"/>
     <p:sldId id="272" r:id="rId23"/>
     <p:sldId id="273" r:id="rId24"/>
+    <p:sldId id="274" r:id="rId25"/>
   </p:sldIdLst>
   <p:sldSz cx="12191695" cy="6858000" type="screen4x3"/>
   <p:notesSz cx="6858000" cy="9144000"/>
@@ -6437,7 +6438,7 @@
                 <a:latin typeface="맑은 고딕"/>
                 <a:ea typeface="맑은 고딕"/>
               </a:rPr>
-              <a:t>모든 캡처는 실제 실행 화면 - ppt/capture_screens.py 로 재생성 가능</a:t>
+              <a:t>모든 캡처는 실제 플랫폼 화면 - Swagger UI·Kubernetes Dashboard·실제 CLI 출력 (ppt/capture_*.py 로 재생성)</a:t>
             </a:r>
           </a:p>
         </p:txBody>
@@ -6451,7 +6452,7 @@
         <p:spPr>
           <a:xfrm>
             <a:off x="457200" y="1097280"/>
-            <a:ext cx="3200400" cy="841248"/>
+            <a:ext cx="3200400" cy="713232"/>
           </a:xfrm>
           <a:prstGeom prst="rect">
             <a:avLst/>
@@ -6495,7 +6496,7 @@
         <p:spPr>
           <a:xfrm>
             <a:off x="566928" y="1097280"/>
-            <a:ext cx="2980944" cy="841248"/>
+            <a:ext cx="2980944" cy="713232"/>
           </a:xfrm>
           <a:prstGeom prst="rect">
             <a:avLst/>
@@ -6530,7 +6531,7 @@
         <p:spPr>
           <a:xfrm>
             <a:off x="3730752" y="1097280"/>
-            <a:ext cx="6537960" cy="841248"/>
+            <a:ext cx="6537960" cy="713232"/>
           </a:xfrm>
           <a:prstGeom prst="rect">
             <a:avLst/>
@@ -6574,7 +6575,7 @@
         <p:spPr>
           <a:xfrm>
             <a:off x="3840480" y="1097280"/>
-            <a:ext cx="6309360" cy="841248"/>
+            <a:ext cx="6309360" cy="713232"/>
           </a:xfrm>
           <a:prstGeom prst="rect">
             <a:avLst/>
@@ -6609,7 +6610,7 @@
         <p:spPr>
           <a:xfrm>
             <a:off x="10341864" y="1097280"/>
-            <a:ext cx="1389888" cy="841248"/>
+            <a:ext cx="1389888" cy="713232"/>
           </a:xfrm>
           <a:prstGeom prst="rect">
             <a:avLst/>
@@ -6653,7 +6654,7 @@
         <p:spPr>
           <a:xfrm>
             <a:off x="10341864" y="1097280"/>
-            <a:ext cx="1389888" cy="841248"/>
+            <a:ext cx="1389888" cy="713232"/>
           </a:xfrm>
           <a:prstGeom prst="rect">
             <a:avLst/>
@@ -6688,8 +6689,8 @@
         </p:nvSpPr>
         <p:spPr>
           <a:xfrm>
-            <a:off x="457200" y="2029968"/>
-            <a:ext cx="3200400" cy="841248"/>
+            <a:off x="457200" y="1901952"/>
+            <a:ext cx="3200400" cy="713232"/>
           </a:xfrm>
           <a:prstGeom prst="rect">
             <a:avLst/>
@@ -6732,8 +6733,8 @@
         </p:nvSpPr>
         <p:spPr>
           <a:xfrm>
-            <a:off x="566928" y="2029968"/>
-            <a:ext cx="2980944" cy="841248"/>
+            <a:off x="566928" y="1901952"/>
+            <a:ext cx="2980944" cy="713232"/>
           </a:xfrm>
           <a:prstGeom prst="rect">
             <a:avLst/>
@@ -6767,8 +6768,8 @@
         </p:nvSpPr>
         <p:spPr>
           <a:xfrm>
-            <a:off x="3730752" y="2029968"/>
-            <a:ext cx="6537960" cy="841248"/>
+            <a:off x="3730752" y="1901952"/>
+            <a:ext cx="6537960" cy="713232"/>
           </a:xfrm>
           <a:prstGeom prst="rect">
             <a:avLst/>
@@ -6811,8 +6812,8 @@
         </p:nvSpPr>
         <p:spPr>
           <a:xfrm>
-            <a:off x="3840480" y="2029968"/>
-            <a:ext cx="6309360" cy="841248"/>
+            <a:off x="3840480" y="1901952"/>
+            <a:ext cx="6309360" cy="713232"/>
           </a:xfrm>
           <a:prstGeom prst="rect">
             <a:avLst/>
@@ -6846,8 +6847,8 @@
         </p:nvSpPr>
         <p:spPr>
           <a:xfrm>
-            <a:off x="10341864" y="2029968"/>
-            <a:ext cx="1389888" cy="841248"/>
+            <a:off x="10341864" y="1901952"/>
+            <a:ext cx="1389888" cy="713232"/>
           </a:xfrm>
           <a:prstGeom prst="rect">
             <a:avLst/>
@@ -6890,8 +6891,8 @@
         </p:nvSpPr>
         <p:spPr>
           <a:xfrm>
-            <a:off x="10341864" y="2029968"/>
-            <a:ext cx="1389888" cy="841248"/>
+            <a:off x="10341864" y="1901952"/>
+            <a:ext cx="1389888" cy="713232"/>
           </a:xfrm>
           <a:prstGeom prst="rect">
             <a:avLst/>
@@ -6926,8 +6927,8 @@
         </p:nvSpPr>
         <p:spPr>
           <a:xfrm>
-            <a:off x="457200" y="2962656"/>
-            <a:ext cx="3200400" cy="841248"/>
+            <a:off x="457200" y="2706624"/>
+            <a:ext cx="3200400" cy="713232"/>
           </a:xfrm>
           <a:prstGeom prst="rect">
             <a:avLst/>
@@ -6970,8 +6971,8 @@
         </p:nvSpPr>
         <p:spPr>
           <a:xfrm>
-            <a:off x="566928" y="2962656"/>
-            <a:ext cx="2980944" cy="841248"/>
+            <a:off x="566928" y="2706624"/>
+            <a:ext cx="2980944" cy="713232"/>
           </a:xfrm>
           <a:prstGeom prst="rect">
             <a:avLst/>
@@ -7005,8 +7006,8 @@
         </p:nvSpPr>
         <p:spPr>
           <a:xfrm>
-            <a:off x="3730752" y="2962656"/>
-            <a:ext cx="6537960" cy="841248"/>
+            <a:off x="3730752" y="2706624"/>
+            <a:ext cx="6537960" cy="713232"/>
           </a:xfrm>
           <a:prstGeom prst="rect">
             <a:avLst/>
@@ -7049,8 +7050,8 @@
         </p:nvSpPr>
         <p:spPr>
           <a:xfrm>
-            <a:off x="3840480" y="2962656"/>
-            <a:ext cx="6309360" cy="841248"/>
+            <a:off x="3840480" y="2706624"/>
+            <a:ext cx="6309360" cy="713232"/>
           </a:xfrm>
           <a:prstGeom prst="rect">
             <a:avLst/>
@@ -7084,8 +7085,8 @@
         </p:nvSpPr>
         <p:spPr>
           <a:xfrm>
-            <a:off x="10341864" y="2962656"/>
-            <a:ext cx="1389888" cy="841248"/>
+            <a:off x="10341864" y="2706624"/>
+            <a:ext cx="1389888" cy="713232"/>
           </a:xfrm>
           <a:prstGeom prst="rect">
             <a:avLst/>
@@ -7128,8 +7129,8 @@
         </p:nvSpPr>
         <p:spPr>
           <a:xfrm>
-            <a:off x="10341864" y="2962656"/>
-            <a:ext cx="1389888" cy="841248"/>
+            <a:off x="10341864" y="2706624"/>
+            <a:ext cx="1389888" cy="713232"/>
           </a:xfrm>
           <a:prstGeom prst="rect">
             <a:avLst/>
@@ -7164,8 +7165,8 @@
         </p:nvSpPr>
         <p:spPr>
           <a:xfrm>
-            <a:off x="457200" y="3895344"/>
-            <a:ext cx="3200400" cy="841248"/>
+            <a:off x="457200" y="3511296"/>
+            <a:ext cx="3200400" cy="713232"/>
           </a:xfrm>
           <a:prstGeom prst="rect">
             <a:avLst/>
@@ -7208,8 +7209,8 @@
         </p:nvSpPr>
         <p:spPr>
           <a:xfrm>
-            <a:off x="566928" y="3895344"/>
-            <a:ext cx="2980944" cy="841248"/>
+            <a:off x="566928" y="3511296"/>
+            <a:ext cx="2980944" cy="713232"/>
           </a:xfrm>
           <a:prstGeom prst="rect">
             <a:avLst/>
@@ -7243,8 +7244,8 @@
         </p:nvSpPr>
         <p:spPr>
           <a:xfrm>
-            <a:off x="3730752" y="3895344"/>
-            <a:ext cx="6537960" cy="841248"/>
+            <a:off x="3730752" y="3511296"/>
+            <a:ext cx="6537960" cy="713232"/>
           </a:xfrm>
           <a:prstGeom prst="rect">
             <a:avLst/>
@@ -7287,8 +7288,8 @@
         </p:nvSpPr>
         <p:spPr>
           <a:xfrm>
-            <a:off x="3840480" y="3895344"/>
-            <a:ext cx="6309360" cy="841248"/>
+            <a:off x="3840480" y="3511296"/>
+            <a:ext cx="6309360" cy="713232"/>
           </a:xfrm>
           <a:prstGeom prst="rect">
             <a:avLst/>
@@ -7322,8 +7323,8 @@
         </p:nvSpPr>
         <p:spPr>
           <a:xfrm>
-            <a:off x="10341864" y="3895344"/>
-            <a:ext cx="1389888" cy="841248"/>
+            <a:off x="10341864" y="3511296"/>
+            <a:ext cx="1389888" cy="713232"/>
           </a:xfrm>
           <a:prstGeom prst="rect">
             <a:avLst/>
@@ -7366,8 +7367,8 @@
         </p:nvSpPr>
         <p:spPr>
           <a:xfrm>
-            <a:off x="10341864" y="3895344"/>
-            <a:ext cx="1389888" cy="841248"/>
+            <a:off x="10341864" y="3511296"/>
+            <a:ext cx="1389888" cy="713232"/>
           </a:xfrm>
           <a:prstGeom prst="rect">
             <a:avLst/>
@@ -7402,8 +7403,8 @@
         </p:nvSpPr>
         <p:spPr>
           <a:xfrm>
-            <a:off x="457200" y="4828032"/>
-            <a:ext cx="3200400" cy="841248"/>
+            <a:off x="457200" y="4315968"/>
+            <a:ext cx="3200400" cy="713232"/>
           </a:xfrm>
           <a:prstGeom prst="rect">
             <a:avLst/>
@@ -7446,8 +7447,8 @@
         </p:nvSpPr>
         <p:spPr>
           <a:xfrm>
-            <a:off x="566928" y="4828032"/>
-            <a:ext cx="2980944" cy="841248"/>
+            <a:off x="566928" y="4315968"/>
+            <a:ext cx="2980944" cy="713232"/>
           </a:xfrm>
           <a:prstGeom prst="rect">
             <a:avLst/>
@@ -7481,8 +7482,8 @@
         </p:nvSpPr>
         <p:spPr>
           <a:xfrm>
-            <a:off x="3730752" y="4828032"/>
-            <a:ext cx="6537960" cy="841248"/>
+            <a:off x="3730752" y="4315968"/>
+            <a:ext cx="6537960" cy="713232"/>
           </a:xfrm>
           <a:prstGeom prst="rect">
             <a:avLst/>
@@ -7525,8 +7526,8 @@
         </p:nvSpPr>
         <p:spPr>
           <a:xfrm>
-            <a:off x="3840480" y="4828032"/>
-            <a:ext cx="6309360" cy="841248"/>
+            <a:off x="3840480" y="4315968"/>
+            <a:ext cx="6309360" cy="713232"/>
           </a:xfrm>
           <a:prstGeom prst="rect">
             <a:avLst/>
@@ -7560,8 +7561,8 @@
         </p:nvSpPr>
         <p:spPr>
           <a:xfrm>
-            <a:off x="10341864" y="4828032"/>
-            <a:ext cx="1389888" cy="841248"/>
+            <a:off x="10341864" y="4315968"/>
+            <a:ext cx="1389888" cy="713232"/>
           </a:xfrm>
           <a:prstGeom prst="rect">
             <a:avLst/>
@@ -7604,8 +7605,8 @@
         </p:nvSpPr>
         <p:spPr>
           <a:xfrm>
-            <a:off x="10341864" y="4828032"/>
-            <a:ext cx="1389888" cy="841248"/>
+            <a:off x="10341864" y="4315968"/>
+            <a:ext cx="1389888" cy="713232"/>
           </a:xfrm>
           <a:prstGeom prst="rect">
             <a:avLst/>
@@ -7634,13 +7635,251 @@
       </p:sp>
       <p:sp>
         <p:nvSpPr>
-          <p:cNvPr id="34" name="TextBox 33"/>
+          <p:cNvPr id="34" name="Rectangle 33"/>
+          <p:cNvSpPr/>
+          <p:nvPr/>
+        </p:nvSpPr>
+        <p:spPr>
+          <a:xfrm>
+            <a:off x="457200" y="5120640"/>
+            <a:ext cx="3200400" cy="713232"/>
+          </a:xfrm>
+          <a:prstGeom prst="rect">
+            <a:avLst/>
+          </a:prstGeom>
+          <a:solidFill>
+            <a:srgbClr val="2E5490"/>
+          </a:solidFill>
+          <a:ln>
+            <a:noFill/>
+          </a:ln>
+          <a:effectLst/>
+        </p:spPr>
+        <p:style>
+          <a:lnRef idx="1">
+            <a:schemeClr val="accent1"/>
+          </a:lnRef>
+          <a:fillRef idx="3">
+            <a:schemeClr val="accent1"/>
+          </a:fillRef>
+          <a:effectRef idx="2">
+            <a:schemeClr val="accent1"/>
+          </a:effectRef>
+          <a:fontRef idx="minor">
+            <a:schemeClr val="lt1"/>
+          </a:fontRef>
+        </p:style>
+        <p:txBody>
+          <a:bodyPr rtlCol="0" anchor="ctr"/>
+          <a:lstStyle/>
+          <a:p>
+            <a:pPr algn="ctr"/>
+          </a:p>
+        </p:txBody>
+      </p:sp>
+      <p:sp>
+        <p:nvSpPr>
+          <p:cNvPr id="35" name="TextBox 34"/>
           <p:cNvSpPr txBox="1"/>
           <p:nvPr/>
         </p:nvSpPr>
         <p:spPr>
           <a:xfrm>
-            <a:off x="457200" y="5852160"/>
+            <a:off x="566928" y="5120640"/>
+            <a:ext cx="2980944" cy="713232"/>
+          </a:xfrm>
+          <a:prstGeom prst="rect">
+            <a:avLst/>
+          </a:prstGeom>
+          <a:noFill/>
+        </p:spPr>
+        <p:txBody>
+          <a:bodyPr wrap="square" anchor="ctr">
+            <a:spAutoFit/>
+          </a:bodyPr>
+          <a:lstStyle/>
+          <a:p>
+            <a:r>
+              <a:rPr sz="1250" b="1" i="0">
+                <a:solidFill>
+                  <a:srgbClr val="FFFFFF"/>
+                </a:solidFill>
+                <a:latin typeface="맑은 고딕"/>
+                <a:ea typeface="맑은 고딕"/>
+              </a:rPr>
+              <a:t>항목 ①·④  실제 K8s 클러스터 구동</a:t>
+            </a:r>
+          </a:p>
+        </p:txBody>
+      </p:sp>
+      <p:sp>
+        <p:nvSpPr>
+          <p:cNvPr id="36" name="Rectangle 35"/>
+          <p:cNvSpPr/>
+          <p:nvPr/>
+        </p:nvSpPr>
+        <p:spPr>
+          <a:xfrm>
+            <a:off x="3730752" y="5120640"/>
+            <a:ext cx="6537960" cy="713232"/>
+          </a:xfrm>
+          <a:prstGeom prst="rect">
+            <a:avLst/>
+          </a:prstGeom>
+          <a:noFill/>
+          <a:ln w="9525">
+            <a:solidFill>
+              <a:srgbClr val="A6A6A6"/>
+            </a:solidFill>
+          </a:ln>
+          <a:effectLst/>
+        </p:spPr>
+        <p:style>
+          <a:lnRef idx="1">
+            <a:schemeClr val="accent1"/>
+          </a:lnRef>
+          <a:fillRef idx="3">
+            <a:schemeClr val="accent1"/>
+          </a:fillRef>
+          <a:effectRef idx="2">
+            <a:schemeClr val="accent1"/>
+          </a:effectRef>
+          <a:fontRef idx="minor">
+            <a:schemeClr val="lt1"/>
+          </a:fontRef>
+        </p:style>
+        <p:txBody>
+          <a:bodyPr rtlCol="0" anchor="ctr"/>
+          <a:lstStyle/>
+          <a:p>
+            <a:pPr algn="ctr"/>
+          </a:p>
+        </p:txBody>
+      </p:sp>
+      <p:sp>
+        <p:nvSpPr>
+          <p:cNvPr id="37" name="TextBox 36"/>
+          <p:cNvSpPr txBox="1"/>
+          <p:nvPr/>
+        </p:nvSpPr>
+        <p:spPr>
+          <a:xfrm>
+            <a:off x="3840480" y="5120640"/>
+            <a:ext cx="6309360" cy="713232"/>
+          </a:xfrm>
+          <a:prstGeom prst="rect">
+            <a:avLst/>
+          </a:prstGeom>
+          <a:noFill/>
+        </p:spPr>
+        <p:txBody>
+          <a:bodyPr wrap="square" anchor="ctr">
+            <a:spAutoFit/>
+          </a:bodyPr>
+          <a:lstStyle/>
+          <a:p>
+            <a:r>
+              <a:rPr sz="1200" b="0" i="0">
+                <a:solidFill>
+                  <a:srgbClr val="404040"/>
+                </a:solidFill>
+                <a:latin typeface="맑은 고딕"/>
+                <a:ea typeface="맑은 고딕"/>
+              </a:rPr>
+              <a:t>Kubernetes Dashboard(edge-auth 네임스페이스)와 kubectl 실제 상태 - manager/agent/gateway 파드 Running</a:t>
+            </a:r>
+          </a:p>
+        </p:txBody>
+      </p:sp>
+      <p:sp>
+        <p:nvSpPr>
+          <p:cNvPr id="38" name="Rectangle 37"/>
+          <p:cNvSpPr/>
+          <p:nvPr/>
+        </p:nvSpPr>
+        <p:spPr>
+          <a:xfrm>
+            <a:off x="10341864" y="5120640"/>
+            <a:ext cx="1389888" cy="713232"/>
+          </a:xfrm>
+          <a:prstGeom prst="rect">
+            <a:avLst/>
+          </a:prstGeom>
+          <a:solidFill>
+            <a:srgbClr val="D9D9D9"/>
+          </a:solidFill>
+          <a:ln>
+            <a:noFill/>
+          </a:ln>
+          <a:effectLst/>
+        </p:spPr>
+        <p:style>
+          <a:lnRef idx="1">
+            <a:schemeClr val="accent1"/>
+          </a:lnRef>
+          <a:fillRef idx="3">
+            <a:schemeClr val="accent1"/>
+          </a:fillRef>
+          <a:effectRef idx="2">
+            <a:schemeClr val="accent1"/>
+          </a:effectRef>
+          <a:fontRef idx="minor">
+            <a:schemeClr val="lt1"/>
+          </a:fontRef>
+        </p:style>
+        <p:txBody>
+          <a:bodyPr rtlCol="0" anchor="ctr"/>
+          <a:lstStyle/>
+          <a:p>
+            <a:pPr algn="ctr"/>
+          </a:p>
+        </p:txBody>
+      </p:sp>
+      <p:sp>
+        <p:nvSpPr>
+          <p:cNvPr id="39" name="TextBox 38"/>
+          <p:cNvSpPr txBox="1"/>
+          <p:nvPr/>
+        </p:nvSpPr>
+        <p:spPr>
+          <a:xfrm>
+            <a:off x="10341864" y="5120640"/>
+            <a:ext cx="1389888" cy="713232"/>
+          </a:xfrm>
+          <a:prstGeom prst="rect">
+            <a:avLst/>
+          </a:prstGeom>
+          <a:noFill/>
+        </p:spPr>
+        <p:txBody>
+          <a:bodyPr wrap="none" anchor="ctr">
+            <a:spAutoFit/>
+          </a:bodyPr>
+          <a:lstStyle/>
+          <a:p>
+            <a:pPr algn="ctr"/>
+            <a:r>
+              <a:rPr sz="1200" b="1" i="0">
+                <a:solidFill>
+                  <a:srgbClr val="1F3864"/>
+                </a:solidFill>
+                <a:latin typeface="맑은 고딕"/>
+                <a:ea typeface="맑은 고딕"/>
+              </a:rPr>
+              <a:t>슬라이드 18</a:t>
+            </a:r>
+          </a:p>
+        </p:txBody>
+      </p:sp>
+      <p:sp>
+        <p:nvSpPr>
+          <p:cNvPr id="40" name="TextBox 39"/>
+          <p:cNvSpPr txBox="1"/>
+          <p:nvPr/>
+        </p:nvSpPr>
+        <p:spPr>
+          <a:xfrm>
+            <a:off x="457200" y="6016752"/>
             <a:ext cx="11274552" cy="548640"/>
           </a:xfrm>
           <a:prstGeom prst="rect">
@@ -7670,7 +7909,7 @@
       </p:sp>
       <p:sp>
         <p:nvSpPr>
-          <p:cNvPr id="35" name="TextBox 34"/>
+          <p:cNvPr id="41" name="TextBox 40"/>
           <p:cNvSpPr txBox="1"/>
           <p:nvPr/>
         </p:nvSpPr>
@@ -7705,7 +7944,7 @@
       </p:sp>
       <p:sp>
         <p:nvSpPr>
-          <p:cNvPr id="36" name="TextBox 35"/>
+          <p:cNvPr id="42" name="TextBox 41"/>
           <p:cNvSpPr txBox="1"/>
           <p:nvPr/>
         </p:nvSpPr>
@@ -7864,8 +8103,8 @@
         </p:blipFill>
         <p:spPr>
           <a:xfrm>
-            <a:off x="2146043" y="1097280"/>
-            <a:ext cx="7896865" cy="4727448"/>
+            <a:off x="1913360" y="1097280"/>
+            <a:ext cx="8362231" cy="4727448"/>
           </a:xfrm>
           <a:prstGeom prst="rect">
             <a:avLst/>
@@ -8083,14 +8322,14 @@
                 <a:latin typeface="맑은 고딕"/>
                 <a:ea typeface="맑은 고딕"/>
               </a:rPr>
-              <a:t>Manager 관리 API 실제 응답 - RBAC(operator/admin) 적용</a:t>
+              <a:t>실행 중인 Manager의 Swagger UI에서 직접 호출한 실제 응답 - RBAC(operator/admin) 적용</a:t>
             </a:r>
           </a:p>
         </p:txBody>
       </p:sp>
       <p:pic>
         <p:nvPicPr>
-          <p:cNvPr id="4" name="Picture 3" descr="screen_devices.png"/>
+          <p:cNvPr id="4" name="Picture 3" descr="platform_devices.png"/>
           <p:cNvPicPr>
             <a:picLocks noChangeAspect="1"/>
           </p:cNvPicPr>
@@ -8104,8 +8343,8 @@
         </p:blipFill>
         <p:spPr>
           <a:xfrm>
-            <a:off x="457200" y="1848231"/>
-            <a:ext cx="5532120" cy="3042666"/>
+            <a:off x="457200" y="1133341"/>
+            <a:ext cx="5532120" cy="4472446"/>
           </a:xfrm>
           <a:prstGeom prst="rect">
             <a:avLst/>
@@ -8120,7 +8359,7 @@
         </p:nvSpPr>
         <p:spPr>
           <a:xfrm>
-            <a:off x="457200" y="4945761"/>
+            <a:off x="457200" y="5660651"/>
             <a:ext cx="5532120" cy="292608"/>
           </a:xfrm>
           <a:prstGeom prst="rect">
@@ -8150,7 +8389,7 @@
       </p:sp>
       <p:pic>
         <p:nvPicPr>
-          <p:cNvPr id="6" name="Picture 5" descr="screen_audit.png"/>
+          <p:cNvPr id="6" name="Picture 5" descr="platform_audit.png"/>
           <p:cNvPicPr>
             <a:picLocks noChangeAspect="1"/>
           </p:cNvPicPr>
@@ -8164,8 +8403,8 @@
         </p:blipFill>
         <p:spPr>
           <a:xfrm>
-            <a:off x="6199632" y="2521056"/>
-            <a:ext cx="5532120" cy="1697015"/>
+            <a:off x="6731174" y="1097280"/>
+            <a:ext cx="4469035" cy="4544568"/>
           </a:xfrm>
           <a:prstGeom prst="rect">
             <a:avLst/>
@@ -8180,7 +8419,7 @@
         </p:nvSpPr>
         <p:spPr>
           <a:xfrm>
-            <a:off x="6199632" y="4272935"/>
+            <a:off x="6199632" y="5696712"/>
             <a:ext cx="5532120" cy="292608"/>
           </a:xfrm>
           <a:prstGeom prst="rect">
@@ -8390,7 +8629,7 @@
       </p:sp>
       <p:pic>
         <p:nvPicPr>
-          <p:cNvPr id="4" name="Picture 3" descr="screen_swagger.png"/>
+          <p:cNvPr id="4" name="Picture 3" descr="platform_swagger_overview.png"/>
           <p:cNvPicPr>
             <a:picLocks noChangeAspect="1"/>
           </p:cNvPicPr>
@@ -8404,8 +8643,8 @@
         </p:blipFill>
         <p:spPr>
           <a:xfrm>
-            <a:off x="457200" y="1500605"/>
-            <a:ext cx="5532120" cy="3737918"/>
+            <a:off x="457200" y="1525524"/>
+            <a:ext cx="5532120" cy="3688080"/>
           </a:xfrm>
           <a:prstGeom prst="rect">
             <a:avLst/>
@@ -8420,7 +8659,7 @@
         </p:nvSpPr>
         <p:spPr>
           <a:xfrm>
-            <a:off x="457200" y="5293387"/>
+            <a:off x="457200" y="5268468"/>
             <a:ext cx="5532120" cy="292608"/>
           </a:xfrm>
           <a:prstGeom prst="rect">
@@ -8464,8 +8703,8 @@
         </p:blipFill>
         <p:spPr>
           <a:xfrm>
-            <a:off x="6199632" y="1623956"/>
-            <a:ext cx="5532120" cy="3491216"/>
+            <a:off x="6199632" y="1719148"/>
+            <a:ext cx="5532120" cy="3300831"/>
           </a:xfrm>
           <a:prstGeom prst="rect">
             <a:avLst/>
@@ -8480,7 +8719,7 @@
         </p:nvSpPr>
         <p:spPr>
           <a:xfrm>
-            <a:off x="6199632" y="5170036"/>
+            <a:off x="6199632" y="5074843"/>
             <a:ext cx="5532120" cy="292608"/>
           </a:xfrm>
           <a:prstGeom prst="rect">
@@ -8671,7 +8910,7 @@
                 <a:latin typeface="맑은 고딕"/>
                 <a:ea typeface="맑은 고딕"/>
               </a:rPr>
-              <a:t>향후 계획</a:t>
+              <a:t>화면 4. 실제 Kubernetes 클러스터 구동 (수행항목 ①·④)</a:t>
             </a:r>
           </a:p>
           <a:p>
@@ -8683,21 +8922,230 @@
                 <a:latin typeface="맑은 고딕"/>
                 <a:ea typeface="맑은 고딕"/>
               </a:rPr>
-              <a:t>3차년도 이관 항목 및 ETRI 협의 항목</a:t>
-            </a:r>
-          </a:p>
-        </p:txBody>
-      </p:sp>
-      <p:sp>
-        <p:nvSpPr>
-          <p:cNvPr id="4" name="Rectangle 3"/>
+              <a:t>kind 기반 2노드 클러스터(etri-edge)에 본 저장소 k8s/*.yaml 을 그대로 배포한 실제 상태</a:t>
+            </a:r>
+          </a:p>
+        </p:txBody>
+      </p:sp>
+      <p:pic>
+        <p:nvPicPr>
+          <p:cNvPr id="4" name="Picture 3" descr="k8s_dashboard.png"/>
+          <p:cNvPicPr>
+            <a:picLocks noChangeAspect="1"/>
+          </p:cNvPicPr>
+          <p:nvPr/>
+        </p:nvPicPr>
+        <p:blipFill>
+          <a:blip r:embed="rId2"/>
+          <a:stretch>
+            <a:fillRect/>
+          </a:stretch>
+        </p:blipFill>
+        <p:spPr>
+          <a:xfrm>
+            <a:off x="457200" y="1525524"/>
+            <a:ext cx="5532120" cy="3688080"/>
+          </a:xfrm>
+          <a:prstGeom prst="rect">
+            <a:avLst/>
+          </a:prstGeom>
+        </p:spPr>
+      </p:pic>
+      <p:sp>
+        <p:nvSpPr>
+          <p:cNvPr id="5" name="TextBox 4"/>
+          <p:cNvSpPr txBox="1"/>
+          <p:nvPr/>
+        </p:nvSpPr>
+        <p:spPr>
+          <a:xfrm>
+            <a:off x="457200" y="5268468"/>
+            <a:ext cx="5532120" cy="292608"/>
+          </a:xfrm>
+          <a:prstGeom prst="rect">
+            <a:avLst/>
+          </a:prstGeom>
+          <a:noFill/>
+        </p:spPr>
+        <p:txBody>
+          <a:bodyPr wrap="square" anchor="t" lIns="0" rIns="0" tIns="0" bIns="0">
+            <a:spAutoFit/>
+          </a:bodyPr>
+          <a:lstStyle/>
+          <a:p>
+            <a:pPr algn="ctr"/>
+            <a:r>
+              <a:rPr sz="1050" b="0" i="0">
+                <a:solidFill>
+                  <a:srgbClr val="404040"/>
+                </a:solidFill>
+                <a:latin typeface="맑은 고딕"/>
+                <a:ea typeface="맑은 고딕"/>
+              </a:rPr>
+              <a:t>Kubernetes Dashboard - edge-auth 네임스페이스, manager/agent×2/gateway 4개 Deployment Running</a:t>
+            </a:r>
+          </a:p>
+        </p:txBody>
+      </p:sp>
+      <p:pic>
+        <p:nvPicPr>
+          <p:cNvPr id="6" name="Picture 5" descr="k8s_pods.png"/>
+          <p:cNvPicPr>
+            <a:picLocks noChangeAspect="1"/>
+          </p:cNvPicPr>
+          <p:nvPr/>
+        </p:nvPicPr>
+        <p:blipFill>
+          <a:blip r:embed="rId3"/>
+          <a:stretch>
+            <a:fillRect/>
+          </a:stretch>
+        </p:blipFill>
+        <p:spPr>
+          <a:xfrm>
+            <a:off x="6199632" y="2360874"/>
+            <a:ext cx="5532120" cy="2017379"/>
+          </a:xfrm>
+          <a:prstGeom prst="rect">
+            <a:avLst/>
+          </a:prstGeom>
+        </p:spPr>
+      </p:pic>
+      <p:sp>
+        <p:nvSpPr>
+          <p:cNvPr id="7" name="TextBox 6"/>
+          <p:cNvSpPr txBox="1"/>
+          <p:nvPr/>
+        </p:nvSpPr>
+        <p:spPr>
+          <a:xfrm>
+            <a:off x="6199632" y="4433117"/>
+            <a:ext cx="5532120" cy="292608"/>
+          </a:xfrm>
+          <a:prstGeom prst="rect">
+            <a:avLst/>
+          </a:prstGeom>
+          <a:noFill/>
+        </p:spPr>
+        <p:txBody>
+          <a:bodyPr wrap="square" anchor="t" lIns="0" rIns="0" tIns="0" bIns="0">
+            <a:spAutoFit/>
+          </a:bodyPr>
+          <a:lstStyle/>
+          <a:p>
+            <a:pPr algn="ctr"/>
+            <a:r>
+              <a:rPr sz="1050" b="0" i="0">
+                <a:solidFill>
+                  <a:srgbClr val="404040"/>
+                </a:solidFill>
+                <a:latin typeface="맑은 고딕"/>
+                <a:ea typeface="맑은 고딕"/>
+              </a:rPr>
+              <a:t>kubectl 실제 출력 - edge 라벨 노드에 agent/gateway 배치, manager NodePort 30443</a:t>
+            </a:r>
+          </a:p>
+        </p:txBody>
+      </p:sp>
+      <p:sp>
+        <p:nvSpPr>
+          <p:cNvPr id="8" name="TextBox 7"/>
+          <p:cNvSpPr txBox="1"/>
+          <p:nvPr/>
+        </p:nvSpPr>
+        <p:spPr>
+          <a:xfrm>
+            <a:off x="457200" y="6547104"/>
+            <a:ext cx="7315200" cy="274320"/>
+          </a:xfrm>
+          <a:prstGeom prst="rect">
+            <a:avLst/>
+          </a:prstGeom>
+          <a:noFill/>
+        </p:spPr>
+        <p:txBody>
+          <a:bodyPr wrap="none" lIns="0" tIns="0">
+            <a:spAutoFit/>
+          </a:bodyPr>
+          <a:lstStyle/>
+          <a:p>
+            <a:r>
+              <a:rPr sz="900" b="0" i="0">
+                <a:solidFill>
+                  <a:srgbClr val="A6A6A6"/>
+                </a:solidFill>
+                <a:latin typeface="맑은 고딕"/>
+                <a:ea typeface="맑은 고딕"/>
+              </a:rPr>
+              <a:t>ETRI AI_EDGE 2차년도 - 상명대학교 보안 코어 모듈  |  2026-08-03</a:t>
+            </a:r>
+          </a:p>
+        </p:txBody>
+      </p:sp>
+      <p:sp>
+        <p:nvSpPr>
+          <p:cNvPr id="9" name="TextBox 8"/>
+          <p:cNvSpPr txBox="1"/>
+          <p:nvPr/>
+        </p:nvSpPr>
+        <p:spPr>
+          <a:xfrm>
+            <a:off x="11277295" y="6547104"/>
+            <a:ext cx="548640" cy="274320"/>
+          </a:xfrm>
+          <a:prstGeom prst="rect">
+            <a:avLst/>
+          </a:prstGeom>
+          <a:noFill/>
+        </p:spPr>
+        <p:txBody>
+          <a:bodyPr wrap="none" lIns="0" tIns="0">
+            <a:spAutoFit/>
+          </a:bodyPr>
+          <a:lstStyle/>
+          <a:p>
+            <a:pPr algn="r"/>
+            <a:r>
+              <a:rPr sz="900" b="0" i="0">
+                <a:solidFill>
+                  <a:srgbClr val="A6A6A6"/>
+                </a:solidFill>
+                <a:latin typeface="맑은 고딕"/>
+                <a:ea typeface="맑은 고딕"/>
+              </a:rPr>
+              <a:t>18</a:t>
+            </a:r>
+          </a:p>
+        </p:txBody>
+      </p:sp>
+    </p:spTree>
+  </p:cSld>
+  <p:clrMapOvr>
+    <a:masterClrMapping/>
+  </p:clrMapOvr>
+</p:sld>
+</file>
+
+<file path=ppt/slides/slide19.xml><?xml version="1.0" encoding="utf-8"?>
+<p:sld xmlns:a="http://schemas.openxmlformats.org/drawingml/2006/main" xmlns:p="http://schemas.openxmlformats.org/presentationml/2006/main" xmlns:r="http://schemas.openxmlformats.org/officeDocument/2006/relationships">
+  <p:cSld>
+    <p:spTree>
+      <p:nvGrpSpPr>
+        <p:cNvPr id="1" name=""/>
+        <p:cNvGrpSpPr/>
+        <p:nvPr/>
+      </p:nvGrpSpPr>
+      <p:grpSpPr/>
+      <p:sp>
+        <p:nvSpPr>
+          <p:cNvPr id="2" name="Rectangle 1"/>
           <p:cNvSpPr/>
           <p:nvPr/>
         </p:nvSpPr>
         <p:spPr>
           <a:xfrm>
-            <a:off x="457200" y="1051560"/>
-            <a:ext cx="5486400" cy="329184"/>
+            <a:off x="0" y="0"/>
+            <a:ext cx="12191695" cy="868680"/>
           </a:xfrm>
           <a:prstGeom prst="rect">
             <a:avLst/>
@@ -8734,286 +9182,61 @@
       </p:sp>
       <p:sp>
         <p:nvSpPr>
-          <p:cNvPr id="5" name="TextBox 4"/>
+          <p:cNvPr id="3" name="TextBox 2"/>
           <p:cNvSpPr txBox="1"/>
+          <p:nvPr/>
+        </p:nvSpPr>
+        <p:spPr>
+          <a:xfrm>
+            <a:off x="457200" y="73152"/>
+            <a:ext cx="11277295" cy="731520"/>
+          </a:xfrm>
+          <a:prstGeom prst="rect">
+            <a:avLst/>
+          </a:prstGeom>
+          <a:noFill/>
+        </p:spPr>
+        <p:txBody>
+          <a:bodyPr wrap="none" anchor="ctr" lIns="0" tIns="0">
+            <a:spAutoFit/>
+          </a:bodyPr>
+          <a:lstStyle/>
+          <a:p>
+            <a:r>
+              <a:rPr sz="2600" b="1" i="0">
+                <a:solidFill>
+                  <a:srgbClr val="FFFFFF"/>
+                </a:solidFill>
+                <a:latin typeface="맑은 고딕"/>
+                <a:ea typeface="맑은 고딕"/>
+              </a:rPr>
+              <a:t>향후 계획</a:t>
+            </a:r>
+          </a:p>
+          <a:p>
+            <a:r>
+              <a:rPr sz="1300" b="0" i="0">
+                <a:solidFill>
+                  <a:srgbClr val="8EA9DB"/>
+                </a:solidFill>
+                <a:latin typeface="맑은 고딕"/>
+                <a:ea typeface="맑은 고딕"/>
+              </a:rPr>
+              <a:t>3차년도 이관 항목 및 ETRI 협의 항목</a:t>
+            </a:r>
+          </a:p>
+        </p:txBody>
+      </p:sp>
+      <p:sp>
+        <p:nvSpPr>
+          <p:cNvPr id="4" name="Rectangle 3"/>
+          <p:cNvSpPr/>
           <p:nvPr/>
         </p:nvSpPr>
         <p:spPr>
           <a:xfrm>
             <a:off x="457200" y="1051560"/>
             <a:ext cx="5486400" cy="329184"/>
-          </a:xfrm>
-          <a:prstGeom prst="rect">
-            <a:avLst/>
-          </a:prstGeom>
-          <a:noFill/>
-        </p:spPr>
-        <p:txBody>
-          <a:bodyPr wrap="none" tIns="0" bIns="0" anchor="ctr">
-            <a:spAutoFit/>
-          </a:bodyPr>
-          <a:lstStyle/>
-          <a:p>
-            <a:r>
-              <a:rPr sz="1400" b="1" i="0">
-                <a:solidFill>
-                  <a:srgbClr val="FFFFFF"/>
-                </a:solidFill>
-                <a:latin typeface="맑은 고딕"/>
-                <a:ea typeface="맑은 고딕"/>
-              </a:rPr>
-              <a:t>3차년도 이관 / 확장 검토 항목</a:t>
-            </a:r>
-          </a:p>
-        </p:txBody>
-      </p:sp>
-      <p:sp>
-        <p:nvSpPr>
-          <p:cNvPr id="6" name="Rectangle 5"/>
-          <p:cNvSpPr/>
-          <p:nvPr/>
-        </p:nvSpPr>
-        <p:spPr>
-          <a:xfrm>
-            <a:off x="457200" y="1417320"/>
-            <a:ext cx="5486400" cy="4663440"/>
-          </a:xfrm>
-          <a:prstGeom prst="rect">
-            <a:avLst/>
-          </a:prstGeom>
-          <a:noFill/>
-          <a:ln w="9525">
-            <a:solidFill>
-              <a:srgbClr val="A6A6A6"/>
-            </a:solidFill>
-          </a:ln>
-          <a:effectLst/>
-        </p:spPr>
-        <p:style>
-          <a:lnRef idx="1">
-            <a:schemeClr val="accent1"/>
-          </a:lnRef>
-          <a:fillRef idx="3">
-            <a:schemeClr val="accent1"/>
-          </a:fillRef>
-          <a:effectRef idx="2">
-            <a:schemeClr val="accent1"/>
-          </a:effectRef>
-          <a:fontRef idx="minor">
-            <a:schemeClr val="lt1"/>
-          </a:fontRef>
-        </p:style>
-        <p:txBody>
-          <a:bodyPr rtlCol="0" anchor="ctr"/>
-          <a:lstStyle/>
-          <a:p>
-            <a:pPr algn="ctr"/>
-          </a:p>
-        </p:txBody>
-      </p:sp>
-      <p:sp>
-        <p:nvSpPr>
-          <p:cNvPr id="7" name="TextBox 6"/>
-          <p:cNvSpPr txBox="1"/>
-          <p:nvPr/>
-        </p:nvSpPr>
-        <p:spPr>
-          <a:xfrm>
-            <a:off x="566928" y="1472184"/>
-            <a:ext cx="5266944" cy="4553712"/>
-          </a:xfrm>
-          <a:prstGeom prst="rect">
-            <a:avLst/>
-          </a:prstGeom>
-          <a:noFill/>
-        </p:spPr>
-        <p:txBody>
-          <a:bodyPr wrap="square" lIns="0" rIns="0" tIns="0" bIns="0">
-            <a:spAutoFit/>
-          </a:bodyPr>
-          <a:lstStyle/>
-          <a:p>
-            <a:pPr>
-              <a:spcAft>
-                <a:spcPts val="300"/>
-              </a:spcAft>
-            </a:pPr>
-            <a:r>
-              <a:rPr sz="1100" b="0" i="0">
-                <a:solidFill>
-                  <a:srgbClr val="404040"/>
-                </a:solidFill>
-                <a:latin typeface="맑은 고딕"/>
-                <a:ea typeface="맑은 고딕"/>
-              </a:rPr>
-              <a:t>• 장애 인지·자동 복구 - 2차년도는 시연용 최소 수준(401 거부+감사)만 제공</a:t>
-            </a:r>
-          </a:p>
-          <a:p>
-            <a:pPr>
-              <a:spcAft>
-                <a:spcPts val="300"/>
-              </a:spcAft>
-            </a:pPr>
-            <a:r>
-              <a:rPr sz="1100" b="0" i="0">
-                <a:solidFill>
-                  <a:srgbClr val="404040"/>
-                </a:solidFill>
-                <a:latin typeface="맑은 고딕"/>
-                <a:ea typeface="맑은 고딕"/>
-              </a:rPr>
-              <a:t>• 프레임워크(KubeEdge/ETRI 플랫폼) 전체 통합 - 3차년도 또는 타 기관 연계</a:t>
-            </a:r>
-          </a:p>
-          <a:p>
-            <a:pPr>
-              <a:spcAft>
-                <a:spcPts val="300"/>
-              </a:spcAft>
-            </a:pPr>
-            <a:r>
-              <a:rPr sz="1100" b="0" i="0">
-                <a:solidFill>
-                  <a:srgbClr val="404040"/>
-                </a:solidFill>
-                <a:latin typeface="맑은 고딕"/>
-                <a:ea typeface="맑은 고딕"/>
-              </a:rPr>
-              <a:t>• 실네트워크/K8s 환경 재측정 (현재 μ=23.76 auth/s는 in-process ASGI 기준)</a:t>
-            </a:r>
-          </a:p>
-          <a:p>
-            <a:pPr>
-              <a:spcAft>
-                <a:spcPts val="300"/>
-              </a:spcAft>
-            </a:pPr>
-            <a:r>
-              <a:rPr sz="1100" b="0" i="0">
-                <a:solidFill>
-                  <a:srgbClr val="404040"/>
-                </a:solidFill>
-                <a:latin typeface="맑은 고딕"/>
-                <a:ea typeface="맑은 고딕"/>
-              </a:rPr>
-              <a:t>• uvicorn 다중 워커 + SQLite -&gt; 다른 저장소 전환 (레플리카 확장 시 락 경합 대응)</a:t>
-            </a:r>
-          </a:p>
-          <a:p>
-            <a:pPr>
-              <a:spcAft>
-                <a:spcPts val="300"/>
-              </a:spcAft>
-            </a:pPr>
-            <a:r>
-              <a:rPr sz="1100" b="0" i="0">
-                <a:solidFill>
-                  <a:srgbClr val="404040"/>
-                </a:solidFill>
-                <a:latin typeface="맑은 고딕"/>
-                <a:ea typeface="맑은 고딕"/>
-              </a:rPr>
-              <a:t>• CA 계층 구조 - 다기관 연동 시 Intermediate CA 필요 여부 결정</a:t>
-            </a:r>
-          </a:p>
-          <a:p>
-            <a:pPr>
-              <a:spcAft>
-                <a:spcPts val="300"/>
-              </a:spcAft>
-            </a:pPr>
-            <a:r>
-              <a:rPr sz="1100" b="0" i="0">
-                <a:solidFill>
-                  <a:srgbClr val="404040"/>
-                </a:solidFill>
-                <a:latin typeface="맑은 고딕"/>
-                <a:ea typeface="맑은 고딕"/>
-              </a:rPr>
-              <a:t>• 인증서/키 영속화 - emptyDir -&gt; PVC 또는 KMS/HSM 연동</a:t>
-            </a:r>
-          </a:p>
-          <a:p>
-            <a:pPr>
-              <a:spcAft>
-                <a:spcPts val="300"/>
-              </a:spcAft>
-            </a:pPr>
-            <a:r>
-              <a:rPr sz="1100" b="0" i="0">
-                <a:solidFill>
-                  <a:srgbClr val="404040"/>
-                </a:solidFill>
-                <a:latin typeface="맑은 고딕"/>
-                <a:ea typeface="맑은 고딕"/>
-              </a:rPr>
-              <a:t>• RabbitMQ 등 비동기 채널 채택 여부, EdgeMesh 도입 검토</a:t>
-            </a:r>
-          </a:p>
-          <a:p>
-            <a:pPr>
-              <a:spcAft>
-                <a:spcPts val="300"/>
-              </a:spcAft>
-            </a:pPr>
-            <a:r>
-              <a:rPr sz="1100" b="0" i="0">
-                <a:solidFill>
-                  <a:srgbClr val="404040"/>
-                </a:solidFill>
-                <a:latin typeface="맑은 고딕"/>
-                <a:ea typeface="맑은 고딕"/>
-              </a:rPr>
-              <a:t>• auth/token 키 소지 증명(서명 nonce 챌린지) - 현재는 인증서 제시만 검증</a:t>
-            </a:r>
-          </a:p>
-          <a:p>
-            <a:pPr>
-              <a:spcAft>
-                <a:spcPts val="300"/>
-              </a:spcAft>
-            </a:pPr>
-            <a:r>
-              <a:rPr sz="1100" b="0" i="0">
-                <a:solidFill>
-                  <a:srgbClr val="404040"/>
-                </a:solidFill>
-                <a:latin typeface="맑은 고딕"/>
-                <a:ea typeface="맑은 고딕"/>
-              </a:rPr>
-              <a:t>• RBAC default-deny 전환 - 미등재 엔드포인트의 암묵적 허용 제거</a:t>
-            </a:r>
-          </a:p>
-          <a:p>
-            <a:pPr>
-              <a:spcAft>
-                <a:spcPts val="300"/>
-              </a:spcAft>
-            </a:pPr>
-            <a:r>
-              <a:rPr sz="1100" b="0" i="0">
-                <a:solidFill>
-                  <a:srgbClr val="404040"/>
-                </a:solidFill>
-                <a:latin typeface="맑은 고딕"/>
-                <a:ea typeface="맑은 고딕"/>
-              </a:rPr>
-              <a:t>• JWS freshness(재전송 방지) - 텔레메트리 서명에 타임스탬프/nonce 검증 추가</a:t>
-            </a:r>
-          </a:p>
-        </p:txBody>
-      </p:sp>
-      <p:sp>
-        <p:nvSpPr>
-          <p:cNvPr id="8" name="Rectangle 7"/>
-          <p:cNvSpPr/>
-          <p:nvPr/>
-        </p:nvSpPr>
-        <p:spPr>
-          <a:xfrm>
-            <a:off x="6126480" y="1051560"/>
-            <a:ext cx="5605272" cy="329184"/>
           </a:xfrm>
           <a:prstGeom prst="rect">
             <a:avLst/>
@@ -9050,14 +9273,14 @@
       </p:sp>
       <p:sp>
         <p:nvSpPr>
-          <p:cNvPr id="9" name="TextBox 8"/>
+          <p:cNvPr id="5" name="TextBox 4"/>
           <p:cNvSpPr txBox="1"/>
           <p:nvPr/>
         </p:nvSpPr>
         <p:spPr>
           <a:xfrm>
-            <a:off x="6126480" y="1051560"/>
-            <a:ext cx="5605272" cy="329184"/>
+            <a:off x="457200" y="1051560"/>
+            <a:ext cx="5486400" cy="329184"/>
           </a:xfrm>
           <a:prstGeom prst="rect">
             <a:avLst/>
@@ -9078,21 +9301,21 @@
                 <a:latin typeface="맑은 고딕"/>
                 <a:ea typeface="맑은 고딕"/>
               </a:rPr>
-              <a:t>ETRI 협의 필요 항목</a:t>
-            </a:r>
-          </a:p>
-        </p:txBody>
-      </p:sp>
-      <p:sp>
-        <p:nvSpPr>
-          <p:cNvPr id="10" name="Rectangle 9"/>
+              <a:t>3차년도 이관 / 확장 검토 항목</a:t>
+            </a:r>
+          </a:p>
+        </p:txBody>
+      </p:sp>
+      <p:sp>
+        <p:nvSpPr>
+          <p:cNvPr id="6" name="Rectangle 5"/>
           <p:cNvSpPr/>
           <p:nvPr/>
         </p:nvSpPr>
         <p:spPr>
           <a:xfrm>
-            <a:off x="6126480" y="1417320"/>
-            <a:ext cx="5605272" cy="4663440"/>
+            <a:off x="457200" y="1417320"/>
+            <a:ext cx="5486400" cy="4663440"/>
           </a:xfrm>
           <a:prstGeom prst="rect">
             <a:avLst/>
@@ -9129,14 +9352,14 @@
       </p:sp>
       <p:sp>
         <p:nvSpPr>
-          <p:cNvPr id="11" name="TextBox 10"/>
+          <p:cNvPr id="7" name="TextBox 6"/>
           <p:cNvSpPr txBox="1"/>
           <p:nvPr/>
         </p:nvSpPr>
         <p:spPr>
           <a:xfrm>
-            <a:off x="6236208" y="1472184"/>
-            <a:ext cx="5385816" cy="4553712"/>
+            <a:off x="566928" y="1472184"/>
+            <a:ext cx="5266944" cy="4553712"/>
           </a:xfrm>
           <a:prstGeom prst="rect">
             <a:avLst/>
@@ -9155,14 +9378,14 @@
               </a:spcAft>
             </a:pPr>
             <a:r>
-              <a:rPr sz="1250" b="0" i="0">
+              <a:rPr sz="1100" b="0" i="0">
                 <a:solidFill>
                   <a:srgbClr val="404040"/>
                 </a:solidFill>
                 <a:latin typeface="맑은 고딕"/>
                 <a:ea typeface="맑은 고딕"/>
               </a:rPr>
-              <a:t>• mTLS 종단 위치 - 리버스 프록시/Ingress 실제 구성 확정</a:t>
+              <a:t>• 장애 인지·자동 복구 - 2차년도는 시연용 최소 수준(401 거부+감사)만 제공</a:t>
             </a:r>
           </a:p>
           <a:p>
@@ -9172,14 +9395,14 @@
               </a:spcAft>
             </a:pPr>
             <a:r>
-              <a:rPr sz="1250" b="0" i="0">
+              <a:rPr sz="1100" b="0" i="0">
                 <a:solidFill>
                   <a:srgbClr val="404040"/>
                 </a:solidFill>
                 <a:latin typeface="맑은 고딕"/>
                 <a:ea typeface="맑은 고딕"/>
               </a:rPr>
-              <a:t>• 다수 Manager 트래픽 라우팅 - site/group 샤딩 규칙의 실배포 토폴로지 매핑</a:t>
+              <a:t>• 프레임워크(KubeEdge/ETRI 플랫폼) 전체 통합 - 3차년도 또는 타 기관 연계</a:t>
             </a:r>
           </a:p>
           <a:p>
@@ -9189,14 +9412,14 @@
               </a:spcAft>
             </a:pPr>
             <a:r>
-              <a:rPr sz="1250" b="0" i="0">
+              <a:rPr sz="1100" b="0" i="0">
                 <a:solidFill>
                   <a:srgbClr val="404040"/>
                 </a:solidFill>
                 <a:latin typeface="맑은 고딕"/>
                 <a:ea typeface="맑은 고딕"/>
               </a:rPr>
-              <a:t>• 목표 SLA 재정의 - 현재 Wq p95&lt;1.0s는 임의 설정값, 실제 요구사항 확정 필요</a:t>
+              <a:t>• 실네트워크/K8s 환경 재측정 (현재 μ=23.76 auth/s는 in-process ASGI 기준)</a:t>
             </a:r>
           </a:p>
           <a:p>
@@ -9206,14 +9429,14 @@
               </a:spcAft>
             </a:pPr>
             <a:r>
-              <a:rPr sz="1250" b="0" i="0">
+              <a:rPr sz="1100" b="0" i="0">
                 <a:solidFill>
                   <a:srgbClr val="404040"/>
                 </a:solidFill>
                 <a:latin typeface="맑은 고딕"/>
                 <a:ea typeface="맑은 고딕"/>
               </a:rPr>
-              <a:t>• 1,000기 규모 실증 테스트베드 - 물리/가상 디바이스 자원 배정</a:t>
+              <a:t>• uvicorn 다중 워커 + SQLite -&gt; 다른 저장소 전환 (레플리카 확장 시 락 경합 대응)</a:t>
             </a:r>
           </a:p>
           <a:p>
@@ -9223,6 +9446,322 @@
               </a:spcAft>
             </a:pPr>
             <a:r>
+              <a:rPr sz="1100" b="0" i="0">
+                <a:solidFill>
+                  <a:srgbClr val="404040"/>
+                </a:solidFill>
+                <a:latin typeface="맑은 고딕"/>
+                <a:ea typeface="맑은 고딕"/>
+              </a:rPr>
+              <a:t>• CA 계층 구조 - 다기관 연동 시 Intermediate CA 필요 여부 결정</a:t>
+            </a:r>
+          </a:p>
+          <a:p>
+            <a:pPr>
+              <a:spcAft>
+                <a:spcPts val="300"/>
+              </a:spcAft>
+            </a:pPr>
+            <a:r>
+              <a:rPr sz="1100" b="0" i="0">
+                <a:solidFill>
+                  <a:srgbClr val="404040"/>
+                </a:solidFill>
+                <a:latin typeface="맑은 고딕"/>
+                <a:ea typeface="맑은 고딕"/>
+              </a:rPr>
+              <a:t>• 인증서/키 영속화 - emptyDir -&gt; PVC 또는 KMS/HSM 연동</a:t>
+            </a:r>
+          </a:p>
+          <a:p>
+            <a:pPr>
+              <a:spcAft>
+                <a:spcPts val="300"/>
+              </a:spcAft>
+            </a:pPr>
+            <a:r>
+              <a:rPr sz="1100" b="0" i="0">
+                <a:solidFill>
+                  <a:srgbClr val="404040"/>
+                </a:solidFill>
+                <a:latin typeface="맑은 고딕"/>
+                <a:ea typeface="맑은 고딕"/>
+              </a:rPr>
+              <a:t>• RabbitMQ 등 비동기 채널 채택 여부, EdgeMesh 도입 검토</a:t>
+            </a:r>
+          </a:p>
+          <a:p>
+            <a:pPr>
+              <a:spcAft>
+                <a:spcPts val="300"/>
+              </a:spcAft>
+            </a:pPr>
+            <a:r>
+              <a:rPr sz="1100" b="0" i="0">
+                <a:solidFill>
+                  <a:srgbClr val="404040"/>
+                </a:solidFill>
+                <a:latin typeface="맑은 고딕"/>
+                <a:ea typeface="맑은 고딕"/>
+              </a:rPr>
+              <a:t>• auth/token 키 소지 증명(서명 nonce 챌린지) - 현재는 인증서 제시만 검증</a:t>
+            </a:r>
+          </a:p>
+          <a:p>
+            <a:pPr>
+              <a:spcAft>
+                <a:spcPts val="300"/>
+              </a:spcAft>
+            </a:pPr>
+            <a:r>
+              <a:rPr sz="1100" b="0" i="0">
+                <a:solidFill>
+                  <a:srgbClr val="404040"/>
+                </a:solidFill>
+                <a:latin typeface="맑은 고딕"/>
+                <a:ea typeface="맑은 고딕"/>
+              </a:rPr>
+              <a:t>• RBAC default-deny 전환 - 미등재 엔드포인트의 암묵적 허용 제거</a:t>
+            </a:r>
+          </a:p>
+          <a:p>
+            <a:pPr>
+              <a:spcAft>
+                <a:spcPts val="300"/>
+              </a:spcAft>
+            </a:pPr>
+            <a:r>
+              <a:rPr sz="1100" b="0" i="0">
+                <a:solidFill>
+                  <a:srgbClr val="404040"/>
+                </a:solidFill>
+                <a:latin typeface="맑은 고딕"/>
+                <a:ea typeface="맑은 고딕"/>
+              </a:rPr>
+              <a:t>• JWS freshness(재전송 방지) - 텔레메트리 서명에 타임스탬프/nonce 검증 추가</a:t>
+            </a:r>
+          </a:p>
+        </p:txBody>
+      </p:sp>
+      <p:sp>
+        <p:nvSpPr>
+          <p:cNvPr id="8" name="Rectangle 7"/>
+          <p:cNvSpPr/>
+          <p:nvPr/>
+        </p:nvSpPr>
+        <p:spPr>
+          <a:xfrm>
+            <a:off x="6126480" y="1051560"/>
+            <a:ext cx="5605272" cy="329184"/>
+          </a:xfrm>
+          <a:prstGeom prst="rect">
+            <a:avLst/>
+          </a:prstGeom>
+          <a:solidFill>
+            <a:srgbClr val="1F3864"/>
+          </a:solidFill>
+          <a:ln>
+            <a:noFill/>
+          </a:ln>
+          <a:effectLst/>
+        </p:spPr>
+        <p:style>
+          <a:lnRef idx="1">
+            <a:schemeClr val="accent1"/>
+          </a:lnRef>
+          <a:fillRef idx="3">
+            <a:schemeClr val="accent1"/>
+          </a:fillRef>
+          <a:effectRef idx="2">
+            <a:schemeClr val="accent1"/>
+          </a:effectRef>
+          <a:fontRef idx="minor">
+            <a:schemeClr val="lt1"/>
+          </a:fontRef>
+        </p:style>
+        <p:txBody>
+          <a:bodyPr rtlCol="0" anchor="ctr"/>
+          <a:lstStyle/>
+          <a:p>
+            <a:pPr algn="ctr"/>
+          </a:p>
+        </p:txBody>
+      </p:sp>
+      <p:sp>
+        <p:nvSpPr>
+          <p:cNvPr id="9" name="TextBox 8"/>
+          <p:cNvSpPr txBox="1"/>
+          <p:nvPr/>
+        </p:nvSpPr>
+        <p:spPr>
+          <a:xfrm>
+            <a:off x="6126480" y="1051560"/>
+            <a:ext cx="5605272" cy="329184"/>
+          </a:xfrm>
+          <a:prstGeom prst="rect">
+            <a:avLst/>
+          </a:prstGeom>
+          <a:noFill/>
+        </p:spPr>
+        <p:txBody>
+          <a:bodyPr wrap="none" tIns="0" bIns="0" anchor="ctr">
+            <a:spAutoFit/>
+          </a:bodyPr>
+          <a:lstStyle/>
+          <a:p>
+            <a:r>
+              <a:rPr sz="1400" b="1" i="0">
+                <a:solidFill>
+                  <a:srgbClr val="FFFFFF"/>
+                </a:solidFill>
+                <a:latin typeface="맑은 고딕"/>
+                <a:ea typeface="맑은 고딕"/>
+              </a:rPr>
+              <a:t>ETRI 협의 필요 항목</a:t>
+            </a:r>
+          </a:p>
+        </p:txBody>
+      </p:sp>
+      <p:sp>
+        <p:nvSpPr>
+          <p:cNvPr id="10" name="Rectangle 9"/>
+          <p:cNvSpPr/>
+          <p:nvPr/>
+        </p:nvSpPr>
+        <p:spPr>
+          <a:xfrm>
+            <a:off x="6126480" y="1417320"/>
+            <a:ext cx="5605272" cy="4663440"/>
+          </a:xfrm>
+          <a:prstGeom prst="rect">
+            <a:avLst/>
+          </a:prstGeom>
+          <a:noFill/>
+          <a:ln w="9525">
+            <a:solidFill>
+              <a:srgbClr val="A6A6A6"/>
+            </a:solidFill>
+          </a:ln>
+          <a:effectLst/>
+        </p:spPr>
+        <p:style>
+          <a:lnRef idx="1">
+            <a:schemeClr val="accent1"/>
+          </a:lnRef>
+          <a:fillRef idx="3">
+            <a:schemeClr val="accent1"/>
+          </a:fillRef>
+          <a:effectRef idx="2">
+            <a:schemeClr val="accent1"/>
+          </a:effectRef>
+          <a:fontRef idx="minor">
+            <a:schemeClr val="lt1"/>
+          </a:fontRef>
+        </p:style>
+        <p:txBody>
+          <a:bodyPr rtlCol="0" anchor="ctr"/>
+          <a:lstStyle/>
+          <a:p>
+            <a:pPr algn="ctr"/>
+          </a:p>
+        </p:txBody>
+      </p:sp>
+      <p:sp>
+        <p:nvSpPr>
+          <p:cNvPr id="11" name="TextBox 10"/>
+          <p:cNvSpPr txBox="1"/>
+          <p:nvPr/>
+        </p:nvSpPr>
+        <p:spPr>
+          <a:xfrm>
+            <a:off x="6236208" y="1472184"/>
+            <a:ext cx="5385816" cy="4553712"/>
+          </a:xfrm>
+          <a:prstGeom prst="rect">
+            <a:avLst/>
+          </a:prstGeom>
+          <a:noFill/>
+        </p:spPr>
+        <p:txBody>
+          <a:bodyPr wrap="square" lIns="0" rIns="0" tIns="0" bIns="0">
+            <a:spAutoFit/>
+          </a:bodyPr>
+          <a:lstStyle/>
+          <a:p>
+            <a:pPr>
+              <a:spcAft>
+                <a:spcPts val="300"/>
+              </a:spcAft>
+            </a:pPr>
+            <a:r>
+              <a:rPr sz="1250" b="0" i="0">
+                <a:solidFill>
+                  <a:srgbClr val="404040"/>
+                </a:solidFill>
+                <a:latin typeface="맑은 고딕"/>
+                <a:ea typeface="맑은 고딕"/>
+              </a:rPr>
+              <a:t>• mTLS 종단 위치 - 리버스 프록시/Ingress 실제 구성 확정</a:t>
+            </a:r>
+          </a:p>
+          <a:p>
+            <a:pPr>
+              <a:spcAft>
+                <a:spcPts val="300"/>
+              </a:spcAft>
+            </a:pPr>
+            <a:r>
+              <a:rPr sz="1250" b="0" i="0">
+                <a:solidFill>
+                  <a:srgbClr val="404040"/>
+                </a:solidFill>
+                <a:latin typeface="맑은 고딕"/>
+                <a:ea typeface="맑은 고딕"/>
+              </a:rPr>
+              <a:t>• 다수 Manager 트래픽 라우팅 - site/group 샤딩 규칙의 실배포 토폴로지 매핑</a:t>
+            </a:r>
+          </a:p>
+          <a:p>
+            <a:pPr>
+              <a:spcAft>
+                <a:spcPts val="300"/>
+              </a:spcAft>
+            </a:pPr>
+            <a:r>
+              <a:rPr sz="1250" b="0" i="0">
+                <a:solidFill>
+                  <a:srgbClr val="404040"/>
+                </a:solidFill>
+                <a:latin typeface="맑은 고딕"/>
+                <a:ea typeface="맑은 고딕"/>
+              </a:rPr>
+              <a:t>• 목표 SLA 재정의 - 현재 Wq p95&lt;1.0s는 임의 설정값, 실제 요구사항 확정 필요</a:t>
+            </a:r>
+          </a:p>
+          <a:p>
+            <a:pPr>
+              <a:spcAft>
+                <a:spcPts val="300"/>
+              </a:spcAft>
+            </a:pPr>
+            <a:r>
+              <a:rPr sz="1250" b="0" i="0">
+                <a:solidFill>
+                  <a:srgbClr val="404040"/>
+                </a:solidFill>
+                <a:latin typeface="맑은 고딕"/>
+                <a:ea typeface="맑은 고딕"/>
+              </a:rPr>
+              <a:t>• 1,000기 규모 실증 테스트베드 - 물리/가상 디바이스 자원 배정</a:t>
+            </a:r>
+          </a:p>
+          <a:p>
+            <a:pPr>
+              <a:spcAft>
+                <a:spcPts val="300"/>
+              </a:spcAft>
+            </a:pPr>
+            <a:r>
               <a:rPr sz="1250" b="0" i="0">
                 <a:solidFill>
                   <a:srgbClr val="404040"/>
@@ -9301,7 +9840,7 @@
                 <a:latin typeface="맑은 고딕"/>
                 <a:ea typeface="맑은 고딕"/>
               </a:rPr>
-              <a:t>18</a:t>
+              <a:t>19</a:t>
             </a:r>
           </a:p>
         </p:txBody>

--- a/ppt/ETRI_2차년도_수행항목_매핑.pptx
+++ b/ppt/ETRI_2차년도_수행항목_매핑.pptx
@@ -24,6 +24,7 @@
     <p:sldId id="272" r:id="rId23"/>
     <p:sldId id="273" r:id="rId24"/>
     <p:sldId id="274" r:id="rId25"/>
+    <p:sldId id="275" r:id="rId26"/>
   </p:sldIdLst>
   <p:sldSz cx="12191695" cy="6858000" type="screen4x3"/>
   <p:notesSz cx="6858000" cy="9144000"/>
@@ -6452,7 +6453,7 @@
         <p:spPr>
           <a:xfrm>
             <a:off x="457200" y="1097280"/>
-            <a:ext cx="3200400" cy="713232"/>
+            <a:ext cx="3200400" cy="621792"/>
           </a:xfrm>
           <a:prstGeom prst="rect">
             <a:avLst/>
@@ -6496,7 +6497,7 @@
         <p:spPr>
           <a:xfrm>
             <a:off x="566928" y="1097280"/>
-            <a:ext cx="2980944" cy="713232"/>
+            <a:ext cx="2980944" cy="621792"/>
           </a:xfrm>
           <a:prstGeom prst="rect">
             <a:avLst/>
@@ -6531,7 +6532,7 @@
         <p:spPr>
           <a:xfrm>
             <a:off x="3730752" y="1097280"/>
-            <a:ext cx="6537960" cy="713232"/>
+            <a:ext cx="6537960" cy="621792"/>
           </a:xfrm>
           <a:prstGeom prst="rect">
             <a:avLst/>
@@ -6575,7 +6576,7 @@
         <p:spPr>
           <a:xfrm>
             <a:off x="3840480" y="1097280"/>
-            <a:ext cx="6309360" cy="713232"/>
+            <a:ext cx="6309360" cy="621792"/>
           </a:xfrm>
           <a:prstGeom prst="rect">
             <a:avLst/>
@@ -6610,7 +6611,7 @@
         <p:spPr>
           <a:xfrm>
             <a:off x="10341864" y="1097280"/>
-            <a:ext cx="1389888" cy="713232"/>
+            <a:ext cx="1389888" cy="621792"/>
           </a:xfrm>
           <a:prstGeom prst="rect">
             <a:avLst/>
@@ -6654,7 +6655,7 @@
         <p:spPr>
           <a:xfrm>
             <a:off x="10341864" y="1097280"/>
-            <a:ext cx="1389888" cy="713232"/>
+            <a:ext cx="1389888" cy="621792"/>
           </a:xfrm>
           <a:prstGeom prst="rect">
             <a:avLst/>
@@ -6689,8 +6690,8 @@
         </p:nvSpPr>
         <p:spPr>
           <a:xfrm>
-            <a:off x="457200" y="1901952"/>
-            <a:ext cx="3200400" cy="713232"/>
+            <a:off x="457200" y="1810512"/>
+            <a:ext cx="3200400" cy="621792"/>
           </a:xfrm>
           <a:prstGeom prst="rect">
             <a:avLst/>
@@ -6733,8 +6734,8 @@
         </p:nvSpPr>
         <p:spPr>
           <a:xfrm>
-            <a:off x="566928" y="1901952"/>
-            <a:ext cx="2980944" cy="713232"/>
+            <a:off x="566928" y="1810512"/>
+            <a:ext cx="2980944" cy="621792"/>
           </a:xfrm>
           <a:prstGeom prst="rect">
             <a:avLst/>
@@ -6768,8 +6769,8 @@
         </p:nvSpPr>
         <p:spPr>
           <a:xfrm>
-            <a:off x="3730752" y="1901952"/>
-            <a:ext cx="6537960" cy="713232"/>
+            <a:off x="3730752" y="1810512"/>
+            <a:ext cx="6537960" cy="621792"/>
           </a:xfrm>
           <a:prstGeom prst="rect">
             <a:avLst/>
@@ -6812,8 +6813,8 @@
         </p:nvSpPr>
         <p:spPr>
           <a:xfrm>
-            <a:off x="3840480" y="1901952"/>
-            <a:ext cx="6309360" cy="713232"/>
+            <a:off x="3840480" y="1810512"/>
+            <a:ext cx="6309360" cy="621792"/>
           </a:xfrm>
           <a:prstGeom prst="rect">
             <a:avLst/>
@@ -6847,8 +6848,8 @@
         </p:nvSpPr>
         <p:spPr>
           <a:xfrm>
-            <a:off x="10341864" y="1901952"/>
-            <a:ext cx="1389888" cy="713232"/>
+            <a:off x="10341864" y="1810512"/>
+            <a:ext cx="1389888" cy="621792"/>
           </a:xfrm>
           <a:prstGeom prst="rect">
             <a:avLst/>
@@ -6891,8 +6892,8 @@
         </p:nvSpPr>
         <p:spPr>
           <a:xfrm>
-            <a:off x="10341864" y="1901952"/>
-            <a:ext cx="1389888" cy="713232"/>
+            <a:off x="10341864" y="1810512"/>
+            <a:ext cx="1389888" cy="621792"/>
           </a:xfrm>
           <a:prstGeom prst="rect">
             <a:avLst/>
@@ -6927,8 +6928,8 @@
         </p:nvSpPr>
         <p:spPr>
           <a:xfrm>
-            <a:off x="457200" y="2706624"/>
-            <a:ext cx="3200400" cy="713232"/>
+            <a:off x="457200" y="2523744"/>
+            <a:ext cx="3200400" cy="621792"/>
           </a:xfrm>
           <a:prstGeom prst="rect">
             <a:avLst/>
@@ -6971,8 +6972,8 @@
         </p:nvSpPr>
         <p:spPr>
           <a:xfrm>
-            <a:off x="566928" y="2706624"/>
-            <a:ext cx="2980944" cy="713232"/>
+            <a:off x="566928" y="2523744"/>
+            <a:ext cx="2980944" cy="621792"/>
           </a:xfrm>
           <a:prstGeom prst="rect">
             <a:avLst/>
@@ -7006,8 +7007,8 @@
         </p:nvSpPr>
         <p:spPr>
           <a:xfrm>
-            <a:off x="3730752" y="2706624"/>
-            <a:ext cx="6537960" cy="713232"/>
+            <a:off x="3730752" y="2523744"/>
+            <a:ext cx="6537960" cy="621792"/>
           </a:xfrm>
           <a:prstGeom prst="rect">
             <a:avLst/>
@@ -7050,8 +7051,8 @@
         </p:nvSpPr>
         <p:spPr>
           <a:xfrm>
-            <a:off x="3840480" y="2706624"/>
-            <a:ext cx="6309360" cy="713232"/>
+            <a:off x="3840480" y="2523744"/>
+            <a:ext cx="6309360" cy="621792"/>
           </a:xfrm>
           <a:prstGeom prst="rect">
             <a:avLst/>
@@ -7085,8 +7086,8 @@
         </p:nvSpPr>
         <p:spPr>
           <a:xfrm>
-            <a:off x="10341864" y="2706624"/>
-            <a:ext cx="1389888" cy="713232"/>
+            <a:off x="10341864" y="2523744"/>
+            <a:ext cx="1389888" cy="621792"/>
           </a:xfrm>
           <a:prstGeom prst="rect">
             <a:avLst/>
@@ -7129,8 +7130,8 @@
         </p:nvSpPr>
         <p:spPr>
           <a:xfrm>
-            <a:off x="10341864" y="2706624"/>
-            <a:ext cx="1389888" cy="713232"/>
+            <a:off x="10341864" y="2523744"/>
+            <a:ext cx="1389888" cy="621792"/>
           </a:xfrm>
           <a:prstGeom prst="rect">
             <a:avLst/>
@@ -7165,8 +7166,8 @@
         </p:nvSpPr>
         <p:spPr>
           <a:xfrm>
-            <a:off x="457200" y="3511296"/>
-            <a:ext cx="3200400" cy="713232"/>
+            <a:off x="457200" y="3236976"/>
+            <a:ext cx="3200400" cy="621792"/>
           </a:xfrm>
           <a:prstGeom prst="rect">
             <a:avLst/>
@@ -7209,8 +7210,8 @@
         </p:nvSpPr>
         <p:spPr>
           <a:xfrm>
-            <a:off x="566928" y="3511296"/>
-            <a:ext cx="2980944" cy="713232"/>
+            <a:off x="566928" y="3236976"/>
+            <a:ext cx="2980944" cy="621792"/>
           </a:xfrm>
           <a:prstGeom prst="rect">
             <a:avLst/>
@@ -7244,8 +7245,8 @@
         </p:nvSpPr>
         <p:spPr>
           <a:xfrm>
-            <a:off x="3730752" y="3511296"/>
-            <a:ext cx="6537960" cy="713232"/>
+            <a:off x="3730752" y="3236976"/>
+            <a:ext cx="6537960" cy="621792"/>
           </a:xfrm>
           <a:prstGeom prst="rect">
             <a:avLst/>
@@ -7288,8 +7289,8 @@
         </p:nvSpPr>
         <p:spPr>
           <a:xfrm>
-            <a:off x="3840480" y="3511296"/>
-            <a:ext cx="6309360" cy="713232"/>
+            <a:off x="3840480" y="3236976"/>
+            <a:ext cx="6309360" cy="621792"/>
           </a:xfrm>
           <a:prstGeom prst="rect">
             <a:avLst/>
@@ -7323,8 +7324,8 @@
         </p:nvSpPr>
         <p:spPr>
           <a:xfrm>
-            <a:off x="10341864" y="3511296"/>
-            <a:ext cx="1389888" cy="713232"/>
+            <a:off x="10341864" y="3236976"/>
+            <a:ext cx="1389888" cy="621792"/>
           </a:xfrm>
           <a:prstGeom prst="rect">
             <a:avLst/>
@@ -7367,8 +7368,8 @@
         </p:nvSpPr>
         <p:spPr>
           <a:xfrm>
-            <a:off x="10341864" y="3511296"/>
-            <a:ext cx="1389888" cy="713232"/>
+            <a:off x="10341864" y="3236976"/>
+            <a:ext cx="1389888" cy="621792"/>
           </a:xfrm>
           <a:prstGeom prst="rect">
             <a:avLst/>
@@ -7403,8 +7404,8 @@
         </p:nvSpPr>
         <p:spPr>
           <a:xfrm>
-            <a:off x="457200" y="4315968"/>
-            <a:ext cx="3200400" cy="713232"/>
+            <a:off x="457200" y="3950208"/>
+            <a:ext cx="3200400" cy="621792"/>
           </a:xfrm>
           <a:prstGeom prst="rect">
             <a:avLst/>
@@ -7447,8 +7448,8 @@
         </p:nvSpPr>
         <p:spPr>
           <a:xfrm>
-            <a:off x="566928" y="4315968"/>
-            <a:ext cx="2980944" cy="713232"/>
+            <a:off x="566928" y="3950208"/>
+            <a:ext cx="2980944" cy="621792"/>
           </a:xfrm>
           <a:prstGeom prst="rect">
             <a:avLst/>
@@ -7482,8 +7483,8 @@
         </p:nvSpPr>
         <p:spPr>
           <a:xfrm>
-            <a:off x="3730752" y="4315968"/>
-            <a:ext cx="6537960" cy="713232"/>
+            <a:off x="3730752" y="3950208"/>
+            <a:ext cx="6537960" cy="621792"/>
           </a:xfrm>
           <a:prstGeom prst="rect">
             <a:avLst/>
@@ -7526,8 +7527,8 @@
         </p:nvSpPr>
         <p:spPr>
           <a:xfrm>
-            <a:off x="3840480" y="4315968"/>
-            <a:ext cx="6309360" cy="713232"/>
+            <a:off x="3840480" y="3950208"/>
+            <a:ext cx="6309360" cy="621792"/>
           </a:xfrm>
           <a:prstGeom prst="rect">
             <a:avLst/>
@@ -7561,8 +7562,8 @@
         </p:nvSpPr>
         <p:spPr>
           <a:xfrm>
-            <a:off x="10341864" y="4315968"/>
-            <a:ext cx="1389888" cy="713232"/>
+            <a:off x="10341864" y="3950208"/>
+            <a:ext cx="1389888" cy="621792"/>
           </a:xfrm>
           <a:prstGeom prst="rect">
             <a:avLst/>
@@ -7605,8 +7606,8 @@
         </p:nvSpPr>
         <p:spPr>
           <a:xfrm>
-            <a:off x="10341864" y="4315968"/>
-            <a:ext cx="1389888" cy="713232"/>
+            <a:off x="10341864" y="3950208"/>
+            <a:ext cx="1389888" cy="621792"/>
           </a:xfrm>
           <a:prstGeom prst="rect">
             <a:avLst/>
@@ -7641,8 +7642,8 @@
         </p:nvSpPr>
         <p:spPr>
           <a:xfrm>
-            <a:off x="457200" y="5120640"/>
-            <a:ext cx="3200400" cy="713232"/>
+            <a:off x="457200" y="4663440"/>
+            <a:ext cx="3200400" cy="621792"/>
           </a:xfrm>
           <a:prstGeom prst="rect">
             <a:avLst/>
@@ -7685,8 +7686,8 @@
         </p:nvSpPr>
         <p:spPr>
           <a:xfrm>
-            <a:off x="566928" y="5120640"/>
-            <a:ext cx="2980944" cy="713232"/>
+            <a:off x="566928" y="4663440"/>
+            <a:ext cx="2980944" cy="621792"/>
           </a:xfrm>
           <a:prstGeom prst="rect">
             <a:avLst/>
@@ -7720,8 +7721,8 @@
         </p:nvSpPr>
         <p:spPr>
           <a:xfrm>
-            <a:off x="3730752" y="5120640"/>
-            <a:ext cx="6537960" cy="713232"/>
+            <a:off x="3730752" y="4663440"/>
+            <a:ext cx="6537960" cy="621792"/>
           </a:xfrm>
           <a:prstGeom prst="rect">
             <a:avLst/>
@@ -7764,8 +7765,8 @@
         </p:nvSpPr>
         <p:spPr>
           <a:xfrm>
-            <a:off x="3840480" y="5120640"/>
-            <a:ext cx="6309360" cy="713232"/>
+            <a:off x="3840480" y="4663440"/>
+            <a:ext cx="6309360" cy="621792"/>
           </a:xfrm>
           <a:prstGeom prst="rect">
             <a:avLst/>
@@ -7799,8 +7800,8 @@
         </p:nvSpPr>
         <p:spPr>
           <a:xfrm>
-            <a:off x="10341864" y="5120640"/>
-            <a:ext cx="1389888" cy="713232"/>
+            <a:off x="10341864" y="4663440"/>
+            <a:ext cx="1389888" cy="621792"/>
           </a:xfrm>
           <a:prstGeom prst="rect">
             <a:avLst/>
@@ -7843,8 +7844,8 @@
         </p:nvSpPr>
         <p:spPr>
           <a:xfrm>
-            <a:off x="10341864" y="5120640"/>
-            <a:ext cx="1389888" cy="713232"/>
+            <a:off x="10341864" y="4663440"/>
+            <a:ext cx="1389888" cy="621792"/>
           </a:xfrm>
           <a:prstGeom prst="rect">
             <a:avLst/>
@@ -7873,13 +7874,251 @@
       </p:sp>
       <p:sp>
         <p:nvSpPr>
-          <p:cNvPr id="40" name="TextBox 39"/>
+          <p:cNvPr id="40" name="Rectangle 39"/>
+          <p:cNvSpPr/>
+          <p:nvPr/>
+        </p:nvSpPr>
+        <p:spPr>
+          <a:xfrm>
+            <a:off x="457200" y="5376672"/>
+            <a:ext cx="3200400" cy="621792"/>
+          </a:xfrm>
+          <a:prstGeom prst="rect">
+            <a:avLst/>
+          </a:prstGeom>
+          <a:solidFill>
+            <a:srgbClr val="2E5490"/>
+          </a:solidFill>
+          <a:ln>
+            <a:noFill/>
+          </a:ln>
+          <a:effectLst/>
+        </p:spPr>
+        <p:style>
+          <a:lnRef idx="1">
+            <a:schemeClr val="accent1"/>
+          </a:lnRef>
+          <a:fillRef idx="3">
+            <a:schemeClr val="accent1"/>
+          </a:fillRef>
+          <a:effectRef idx="2">
+            <a:schemeClr val="accent1"/>
+          </a:effectRef>
+          <a:fontRef idx="minor">
+            <a:schemeClr val="lt1"/>
+          </a:fontRef>
+        </p:style>
+        <p:txBody>
+          <a:bodyPr rtlCol="0" anchor="ctr"/>
+          <a:lstStyle/>
+          <a:p>
+            <a:pPr algn="ctr"/>
+          </a:p>
+        </p:txBody>
+      </p:sp>
+      <p:sp>
+        <p:nvSpPr>
+          <p:cNvPr id="41" name="TextBox 40"/>
           <p:cNvSpPr txBox="1"/>
           <p:nvPr/>
         </p:nvSpPr>
         <p:spPr>
           <a:xfrm>
-            <a:off x="457200" y="6016752"/>
+            <a:off x="566928" y="5376672"/>
+            <a:ext cx="2980944" cy="621792"/>
+          </a:xfrm>
+          <a:prstGeom prst="rect">
+            <a:avLst/>
+          </a:prstGeom>
+          <a:noFill/>
+        </p:spPr>
+        <p:txBody>
+          <a:bodyPr wrap="square" anchor="ctr">
+            <a:spAutoFit/>
+          </a:bodyPr>
+          <a:lstStyle/>
+          <a:p>
+            <a:r>
+              <a:rPr sz="1250" b="1" i="0">
+                <a:solidFill>
+                  <a:srgbClr val="FFFFFF"/>
+                </a:solidFill>
+                <a:latin typeface="맑은 고딕"/>
+                <a:ea typeface="맑은 고딕"/>
+              </a:rPr>
+              <a:t>항목 ③·⑥  시나리오 공격 테스트·수신 데이터</a:t>
+            </a:r>
+          </a:p>
+        </p:txBody>
+      </p:sp>
+      <p:sp>
+        <p:nvSpPr>
+          <p:cNvPr id="42" name="Rectangle 41"/>
+          <p:cNvSpPr/>
+          <p:nvPr/>
+        </p:nvSpPr>
+        <p:spPr>
+          <a:xfrm>
+            <a:off x="3730752" y="5376672"/>
+            <a:ext cx="6537960" cy="621792"/>
+          </a:xfrm>
+          <a:prstGeom prst="rect">
+            <a:avLst/>
+          </a:prstGeom>
+          <a:noFill/>
+          <a:ln w="9525">
+            <a:solidFill>
+              <a:srgbClr val="A6A6A6"/>
+            </a:solidFill>
+          </a:ln>
+          <a:effectLst/>
+        </p:spPr>
+        <p:style>
+          <a:lnRef idx="1">
+            <a:schemeClr val="accent1"/>
+          </a:lnRef>
+          <a:fillRef idx="3">
+            <a:schemeClr val="accent1"/>
+          </a:fillRef>
+          <a:effectRef idx="2">
+            <a:schemeClr val="accent1"/>
+          </a:effectRef>
+          <a:fontRef idx="minor">
+            <a:schemeClr val="lt1"/>
+          </a:fontRef>
+        </p:style>
+        <p:txBody>
+          <a:bodyPr rtlCol="0" anchor="ctr"/>
+          <a:lstStyle/>
+          <a:p>
+            <a:pPr algn="ctr"/>
+          </a:p>
+        </p:txBody>
+      </p:sp>
+      <p:sp>
+        <p:nvSpPr>
+          <p:cNvPr id="43" name="TextBox 42"/>
+          <p:cNvSpPr txBox="1"/>
+          <p:nvPr/>
+        </p:nvSpPr>
+        <p:spPr>
+          <a:xfrm>
+            <a:off x="3840480" y="5376672"/>
+            <a:ext cx="6309360" cy="621792"/>
+          </a:xfrm>
+          <a:prstGeom prst="rect">
+            <a:avLst/>
+          </a:prstGeom>
+          <a:noFill/>
+        </p:spPr>
+        <p:txBody>
+          <a:bodyPr wrap="square" anchor="ctr">
+            <a:spAutoFit/>
+          </a:bodyPr>
+          <a:lstStyle/>
+          <a:p>
+            <a:r>
+              <a:rPr sz="1200" b="0" i="0">
+                <a:solidFill>
+                  <a:srgbClr val="404040"/>
+                </a:solidFill>
+                <a:latin typeface="맑은 고딕"/>
+                <a:ea typeface="맑은 고딕"/>
+              </a:rPr>
+              <a:t>실제 Manager 대상 red-team 15종 15/15 차단·감사 + GET /api/v1/telemetry 수신·검증(verified) 실조회</a:t>
+            </a:r>
+          </a:p>
+        </p:txBody>
+      </p:sp>
+      <p:sp>
+        <p:nvSpPr>
+          <p:cNvPr id="44" name="Rectangle 43"/>
+          <p:cNvSpPr/>
+          <p:nvPr/>
+        </p:nvSpPr>
+        <p:spPr>
+          <a:xfrm>
+            <a:off x="10341864" y="5376672"/>
+            <a:ext cx="1389888" cy="621792"/>
+          </a:xfrm>
+          <a:prstGeom prst="rect">
+            <a:avLst/>
+          </a:prstGeom>
+          <a:solidFill>
+            <a:srgbClr val="D9D9D9"/>
+          </a:solidFill>
+          <a:ln>
+            <a:noFill/>
+          </a:ln>
+          <a:effectLst/>
+        </p:spPr>
+        <p:style>
+          <a:lnRef idx="1">
+            <a:schemeClr val="accent1"/>
+          </a:lnRef>
+          <a:fillRef idx="3">
+            <a:schemeClr val="accent1"/>
+          </a:fillRef>
+          <a:effectRef idx="2">
+            <a:schemeClr val="accent1"/>
+          </a:effectRef>
+          <a:fontRef idx="minor">
+            <a:schemeClr val="lt1"/>
+          </a:fontRef>
+        </p:style>
+        <p:txBody>
+          <a:bodyPr rtlCol="0" anchor="ctr"/>
+          <a:lstStyle/>
+          <a:p>
+            <a:pPr algn="ctr"/>
+          </a:p>
+        </p:txBody>
+      </p:sp>
+      <p:sp>
+        <p:nvSpPr>
+          <p:cNvPr id="45" name="TextBox 44"/>
+          <p:cNvSpPr txBox="1"/>
+          <p:nvPr/>
+        </p:nvSpPr>
+        <p:spPr>
+          <a:xfrm>
+            <a:off x="10341864" y="5376672"/>
+            <a:ext cx="1389888" cy="621792"/>
+          </a:xfrm>
+          <a:prstGeom prst="rect">
+            <a:avLst/>
+          </a:prstGeom>
+          <a:noFill/>
+        </p:spPr>
+        <p:txBody>
+          <a:bodyPr wrap="none" anchor="ctr">
+            <a:spAutoFit/>
+          </a:bodyPr>
+          <a:lstStyle/>
+          <a:p>
+            <a:pPr algn="ctr"/>
+            <a:r>
+              <a:rPr sz="1200" b="1" i="0">
+                <a:solidFill>
+                  <a:srgbClr val="1F3864"/>
+                </a:solidFill>
+                <a:latin typeface="맑은 고딕"/>
+                <a:ea typeface="맑은 고딕"/>
+              </a:rPr>
+              <a:t>슬라이드 19</a:t>
+            </a:r>
+          </a:p>
+        </p:txBody>
+      </p:sp>
+      <p:sp>
+        <p:nvSpPr>
+          <p:cNvPr id="46" name="TextBox 45"/>
+          <p:cNvSpPr txBox="1"/>
+          <p:nvPr/>
+        </p:nvSpPr>
+        <p:spPr>
+          <a:xfrm>
+            <a:off x="457200" y="6181344"/>
             <a:ext cx="11274552" cy="548640"/>
           </a:xfrm>
           <a:prstGeom prst="rect">
@@ -7909,7 +8148,7 @@
       </p:sp>
       <p:sp>
         <p:nvSpPr>
-          <p:cNvPr id="41" name="TextBox 40"/>
+          <p:cNvPr id="47" name="TextBox 46"/>
           <p:cNvSpPr txBox="1"/>
           <p:nvPr/>
         </p:nvSpPr>
@@ -7944,7 +8183,7 @@
       </p:sp>
       <p:sp>
         <p:nvSpPr>
-          <p:cNvPr id="42" name="TextBox 41"/>
+          <p:cNvPr id="48" name="TextBox 47"/>
           <p:cNvSpPr txBox="1"/>
           <p:nvPr/>
         </p:nvSpPr>
@@ -9210,7 +9449,7 @@
                 <a:latin typeface="맑은 고딕"/>
                 <a:ea typeface="맑은 고딕"/>
               </a:rPr>
-              <a:t>향후 계획</a:t>
+              <a:t>화면 5. 시나리오 기반 공격 테스트·수신 데이터 실조회 (수행항목 ③·⑥)</a:t>
             </a:r>
           </a:p>
           <a:p>
@@ -9222,55 +9461,35 @@
                 <a:latin typeface="맑은 고딕"/>
                 <a:ea typeface="맑은 고딕"/>
               </a:rPr>
-              <a:t>3차년도 이관 항목 및 ETRI 협의 항목</a:t>
-            </a:r>
-          </a:p>
-        </p:txBody>
-      </p:sp>
-      <p:sp>
-        <p:nvSpPr>
-          <p:cNvPr id="4" name="Rectangle 3"/>
-          <p:cNvSpPr/>
-          <p:nvPr/>
-        </p:nvSpPr>
-        <p:spPr>
-          <a:xfrm>
-            <a:off x="457200" y="1051560"/>
-            <a:ext cx="5486400" cy="329184"/>
-          </a:xfrm>
-          <a:prstGeom prst="rect">
-            <a:avLst/>
-          </a:prstGeom>
-          <a:solidFill>
-            <a:srgbClr val="1F3864"/>
-          </a:solidFill>
-          <a:ln>
-            <a:noFill/>
-          </a:ln>
-          <a:effectLst/>
-        </p:spPr>
-        <p:style>
-          <a:lnRef idx="1">
-            <a:schemeClr val="accent1"/>
-          </a:lnRef>
-          <a:fillRef idx="3">
-            <a:schemeClr val="accent1"/>
-          </a:fillRef>
-          <a:effectRef idx="2">
-            <a:schemeClr val="accent1"/>
-          </a:effectRef>
-          <a:fontRef idx="minor">
-            <a:schemeClr val="lt1"/>
-          </a:fontRef>
-        </p:style>
-        <p:txBody>
-          <a:bodyPr rtlCol="0" anchor="ctr"/>
-          <a:lstStyle/>
-          <a:p>
-            <a:pPr algn="ctr"/>
-          </a:p>
-        </p:txBody>
-      </p:sp>
+              <a:t>실제 Manager 대상 red-team 15종 전부 차단·감사 + 텔레메트리 수신·검증 여부 플랫폼 실조회</a:t>
+            </a:r>
+          </a:p>
+        </p:txBody>
+      </p:sp>
+      <p:pic>
+        <p:nvPicPr>
+          <p:cNvPr id="4" name="Picture 3" descr="screen_attack.png"/>
+          <p:cNvPicPr>
+            <a:picLocks noChangeAspect="1"/>
+          </p:cNvPicPr>
+          <p:nvPr/>
+        </p:nvPicPr>
+        <p:blipFill>
+          <a:blip r:embed="rId2"/>
+          <a:stretch>
+            <a:fillRect/>
+          </a:stretch>
+        </p:blipFill>
+        <p:spPr>
+          <a:xfrm>
+            <a:off x="717064" y="1097280"/>
+            <a:ext cx="5012391" cy="4544568"/>
+          </a:xfrm>
+          <a:prstGeom prst="rect">
+            <a:avLst/>
+          </a:prstGeom>
+        </p:spPr>
+      </p:pic>
       <p:sp>
         <p:nvSpPr>
           <p:cNvPr id="5" name="TextBox 4"/>
@@ -9279,77 +9498,58 @@
         </p:nvSpPr>
         <p:spPr>
           <a:xfrm>
-            <a:off x="457200" y="1051560"/>
-            <a:ext cx="5486400" cy="329184"/>
-          </a:xfrm>
-          <a:prstGeom prst="rect">
-            <a:avLst/>
-          </a:prstGeom>
-          <a:noFill/>
-        </p:spPr>
-        <p:txBody>
-          <a:bodyPr wrap="none" tIns="0" bIns="0" anchor="ctr">
+            <a:off x="457200" y="5696712"/>
+            <a:ext cx="5532120" cy="292608"/>
+          </a:xfrm>
+          <a:prstGeom prst="rect">
+            <a:avLst/>
+          </a:prstGeom>
+          <a:noFill/>
+        </p:spPr>
+        <p:txBody>
+          <a:bodyPr wrap="square" anchor="t" lIns="0" rIns="0" tIns="0" bIns="0">
             <a:spAutoFit/>
           </a:bodyPr>
           <a:lstStyle/>
           <a:p>
-            <a:r>
-              <a:rPr sz="1400" b="1" i="0">
-                <a:solidFill>
-                  <a:srgbClr val="FFFFFF"/>
-                </a:solidFill>
-                <a:latin typeface="맑은 고딕"/>
-                <a:ea typeface="맑은 고딕"/>
-              </a:rPr>
-              <a:t>3차년도 이관 / 확장 검토 항목</a:t>
-            </a:r>
-          </a:p>
-        </p:txBody>
-      </p:sp>
-      <p:sp>
-        <p:nvSpPr>
-          <p:cNvPr id="6" name="Rectangle 5"/>
-          <p:cNvSpPr/>
-          <p:nvPr/>
-        </p:nvSpPr>
-        <p:spPr>
-          <a:xfrm>
-            <a:off x="457200" y="1417320"/>
-            <a:ext cx="5486400" cy="4663440"/>
-          </a:xfrm>
-          <a:prstGeom prst="rect">
-            <a:avLst/>
-          </a:prstGeom>
-          <a:noFill/>
-          <a:ln w="9525">
-            <a:solidFill>
-              <a:srgbClr val="A6A6A6"/>
-            </a:solidFill>
-          </a:ln>
-          <a:effectLst/>
-        </p:spPr>
-        <p:style>
-          <a:lnRef idx="1">
-            <a:schemeClr val="accent1"/>
-          </a:lnRef>
-          <a:fillRef idx="3">
-            <a:schemeClr val="accent1"/>
-          </a:fillRef>
-          <a:effectRef idx="2">
-            <a:schemeClr val="accent1"/>
-          </a:effectRef>
-          <a:fontRef idx="minor">
-            <a:schemeClr val="lt1"/>
-          </a:fontRef>
-        </p:style>
-        <p:txBody>
-          <a:bodyPr rtlCol="0" anchor="ctr"/>
-          <a:lstStyle/>
-          <a:p>
             <a:pPr algn="ctr"/>
-          </a:p>
-        </p:txBody>
-      </p:sp>
+            <a:r>
+              <a:rPr sz="1050" b="0" i="0">
+                <a:solidFill>
+                  <a:srgbClr val="404040"/>
+                </a:solidFill>
+                <a:latin typeface="맑은 고딕"/>
+                <a:ea typeface="맑은 고딕"/>
+              </a:rPr>
+              <a:t>python security/attack_scenarios.py - 위조/권한상승/사칭/재전송 등 15종 15/15 차단, 15/15 감사기록</a:t>
+            </a:r>
+          </a:p>
+        </p:txBody>
+      </p:sp>
+      <p:pic>
+        <p:nvPicPr>
+          <p:cNvPr id="6" name="Picture 5" descr="platform_telemetry_read.png"/>
+          <p:cNvPicPr>
+            <a:picLocks noChangeAspect="1"/>
+          </p:cNvPicPr>
+          <p:nvPr/>
+        </p:nvPicPr>
+        <p:blipFill>
+          <a:blip r:embed="rId3"/>
+          <a:stretch>
+            <a:fillRect/>
+          </a:stretch>
+        </p:blipFill>
+        <p:spPr>
+          <a:xfrm>
+            <a:off x="6723410" y="1097280"/>
+            <a:ext cx="4484563" cy="4544568"/>
+          </a:xfrm>
+          <a:prstGeom prst="rect">
+            <a:avLst/>
+          </a:prstGeom>
+        </p:spPr>
+      </p:pic>
       <p:sp>
         <p:nvSpPr>
           <p:cNvPr id="7" name="TextBox 6"/>
@@ -9358,425 +9558,37 @@
         </p:nvSpPr>
         <p:spPr>
           <a:xfrm>
-            <a:off x="566928" y="1472184"/>
-            <a:ext cx="5266944" cy="4553712"/>
-          </a:xfrm>
-          <a:prstGeom prst="rect">
-            <a:avLst/>
-          </a:prstGeom>
-          <a:noFill/>
-        </p:spPr>
-        <p:txBody>
-          <a:bodyPr wrap="square" lIns="0" rIns="0" tIns="0" bIns="0">
+            <a:off x="6199632" y="5696712"/>
+            <a:ext cx="5532120" cy="292608"/>
+          </a:xfrm>
+          <a:prstGeom prst="rect">
+            <a:avLst/>
+          </a:prstGeom>
+          <a:noFill/>
+        </p:spPr>
+        <p:txBody>
+          <a:bodyPr wrap="square" anchor="t" lIns="0" rIns="0" tIns="0" bIns="0">
             <a:spAutoFit/>
           </a:bodyPr>
           <a:lstStyle/>
           <a:p>
-            <a:pPr>
-              <a:spcAft>
-                <a:spcPts val="300"/>
-              </a:spcAft>
-            </a:pPr>
-            <a:r>
-              <a:rPr sz="1100" b="0" i="0">
+            <a:pPr algn="ctr"/>
+            <a:r>
+              <a:rPr sz="1050" b="0" i="0">
                 <a:solidFill>
                   <a:srgbClr val="404040"/>
                 </a:solidFill>
                 <a:latin typeface="맑은 고딕"/>
                 <a:ea typeface="맑은 고딕"/>
               </a:rPr>
-              <a:t>• 장애 인지·자동 복구 - 2차년도는 시연용 최소 수준(401 거부+감사)만 제공</a:t>
-            </a:r>
-          </a:p>
-          <a:p>
-            <a:pPr>
-              <a:spcAft>
-                <a:spcPts val="300"/>
-              </a:spcAft>
-            </a:pPr>
-            <a:r>
-              <a:rPr sz="1100" b="0" i="0">
-                <a:solidFill>
-                  <a:srgbClr val="404040"/>
-                </a:solidFill>
-                <a:latin typeface="맑은 고딕"/>
-                <a:ea typeface="맑은 고딕"/>
-              </a:rPr>
-              <a:t>• 프레임워크(KubeEdge/ETRI 플랫폼) 전체 통합 - 3차년도 또는 타 기관 연계</a:t>
-            </a:r>
-          </a:p>
-          <a:p>
-            <a:pPr>
-              <a:spcAft>
-                <a:spcPts val="300"/>
-              </a:spcAft>
-            </a:pPr>
-            <a:r>
-              <a:rPr sz="1100" b="0" i="0">
-                <a:solidFill>
-                  <a:srgbClr val="404040"/>
-                </a:solidFill>
-                <a:latin typeface="맑은 고딕"/>
-                <a:ea typeface="맑은 고딕"/>
-              </a:rPr>
-              <a:t>• 실네트워크/K8s 환경 재측정 (현재 μ=23.76 auth/s는 in-process ASGI 기준)</a:t>
-            </a:r>
-          </a:p>
-          <a:p>
-            <a:pPr>
-              <a:spcAft>
-                <a:spcPts val="300"/>
-              </a:spcAft>
-            </a:pPr>
-            <a:r>
-              <a:rPr sz="1100" b="0" i="0">
-                <a:solidFill>
-                  <a:srgbClr val="404040"/>
-                </a:solidFill>
-                <a:latin typeface="맑은 고딕"/>
-                <a:ea typeface="맑은 고딕"/>
-              </a:rPr>
-              <a:t>• uvicorn 다중 워커 + SQLite -&gt; 다른 저장소 전환 (레플리카 확장 시 락 경합 대응)</a:t>
-            </a:r>
-          </a:p>
-          <a:p>
-            <a:pPr>
-              <a:spcAft>
-                <a:spcPts val="300"/>
-              </a:spcAft>
-            </a:pPr>
-            <a:r>
-              <a:rPr sz="1100" b="0" i="0">
-                <a:solidFill>
-                  <a:srgbClr val="404040"/>
-                </a:solidFill>
-                <a:latin typeface="맑은 고딕"/>
-                <a:ea typeface="맑은 고딕"/>
-              </a:rPr>
-              <a:t>• CA 계층 구조 - 다기관 연동 시 Intermediate CA 필요 여부 결정</a:t>
-            </a:r>
-          </a:p>
-          <a:p>
-            <a:pPr>
-              <a:spcAft>
-                <a:spcPts val="300"/>
-              </a:spcAft>
-            </a:pPr>
-            <a:r>
-              <a:rPr sz="1100" b="0" i="0">
-                <a:solidFill>
-                  <a:srgbClr val="404040"/>
-                </a:solidFill>
-                <a:latin typeface="맑은 고딕"/>
-                <a:ea typeface="맑은 고딕"/>
-              </a:rPr>
-              <a:t>• 인증서/키 영속화 - emptyDir -&gt; PVC 또는 KMS/HSM 연동</a:t>
-            </a:r>
-          </a:p>
-          <a:p>
-            <a:pPr>
-              <a:spcAft>
-                <a:spcPts val="300"/>
-              </a:spcAft>
-            </a:pPr>
-            <a:r>
-              <a:rPr sz="1100" b="0" i="0">
-                <a:solidFill>
-                  <a:srgbClr val="404040"/>
-                </a:solidFill>
-                <a:latin typeface="맑은 고딕"/>
-                <a:ea typeface="맑은 고딕"/>
-              </a:rPr>
-              <a:t>• RabbitMQ 등 비동기 채널 채택 여부, EdgeMesh 도입 검토</a:t>
-            </a:r>
-          </a:p>
-          <a:p>
-            <a:pPr>
-              <a:spcAft>
-                <a:spcPts val="300"/>
-              </a:spcAft>
-            </a:pPr>
-            <a:r>
-              <a:rPr sz="1100" b="0" i="0">
-                <a:solidFill>
-                  <a:srgbClr val="404040"/>
-                </a:solidFill>
-                <a:latin typeface="맑은 고딕"/>
-                <a:ea typeface="맑은 고딕"/>
-              </a:rPr>
-              <a:t>• auth/token 키 소지 증명(서명 nonce 챌린지) - 현재는 인증서 제시만 검증</a:t>
-            </a:r>
-          </a:p>
-          <a:p>
-            <a:pPr>
-              <a:spcAft>
-                <a:spcPts val="300"/>
-              </a:spcAft>
-            </a:pPr>
-            <a:r>
-              <a:rPr sz="1100" b="0" i="0">
-                <a:solidFill>
-                  <a:srgbClr val="404040"/>
-                </a:solidFill>
-                <a:latin typeface="맑은 고딕"/>
-                <a:ea typeface="맑은 고딕"/>
-              </a:rPr>
-              <a:t>• RBAC default-deny 전환 - 미등재 엔드포인트의 암묵적 허용 제거</a:t>
-            </a:r>
-          </a:p>
-          <a:p>
-            <a:pPr>
-              <a:spcAft>
-                <a:spcPts val="300"/>
-              </a:spcAft>
-            </a:pPr>
-            <a:r>
-              <a:rPr sz="1100" b="0" i="0">
-                <a:solidFill>
-                  <a:srgbClr val="404040"/>
-                </a:solidFill>
-                <a:latin typeface="맑은 고딕"/>
-                <a:ea typeface="맑은 고딕"/>
-              </a:rPr>
-              <a:t>• JWS freshness(재전송 방지) - 텔레메트리 서명에 타임스탬프/nonce 검증 추가</a:t>
-            </a:r>
-          </a:p>
-        </p:txBody>
-      </p:sp>
-      <p:sp>
-        <p:nvSpPr>
-          <p:cNvPr id="8" name="Rectangle 7"/>
-          <p:cNvSpPr/>
-          <p:nvPr/>
-        </p:nvSpPr>
-        <p:spPr>
-          <a:xfrm>
-            <a:off x="6126480" y="1051560"/>
-            <a:ext cx="5605272" cy="329184"/>
-          </a:xfrm>
-          <a:prstGeom prst="rect">
-            <a:avLst/>
-          </a:prstGeom>
-          <a:solidFill>
-            <a:srgbClr val="1F3864"/>
-          </a:solidFill>
-          <a:ln>
-            <a:noFill/>
-          </a:ln>
-          <a:effectLst/>
-        </p:spPr>
-        <p:style>
-          <a:lnRef idx="1">
-            <a:schemeClr val="accent1"/>
-          </a:lnRef>
-          <a:fillRef idx="3">
-            <a:schemeClr val="accent1"/>
-          </a:fillRef>
-          <a:effectRef idx="2">
-            <a:schemeClr val="accent1"/>
-          </a:effectRef>
-          <a:fontRef idx="minor">
-            <a:schemeClr val="lt1"/>
-          </a:fontRef>
-        </p:style>
-        <p:txBody>
-          <a:bodyPr rtlCol="0" anchor="ctr"/>
-          <a:lstStyle/>
-          <a:p>
-            <a:pPr algn="ctr"/>
-          </a:p>
-        </p:txBody>
-      </p:sp>
-      <p:sp>
-        <p:nvSpPr>
-          <p:cNvPr id="9" name="TextBox 8"/>
-          <p:cNvSpPr txBox="1"/>
-          <p:nvPr/>
-        </p:nvSpPr>
-        <p:spPr>
-          <a:xfrm>
-            <a:off x="6126480" y="1051560"/>
-            <a:ext cx="5605272" cy="329184"/>
-          </a:xfrm>
-          <a:prstGeom prst="rect">
-            <a:avLst/>
-          </a:prstGeom>
-          <a:noFill/>
-        </p:spPr>
-        <p:txBody>
-          <a:bodyPr wrap="none" tIns="0" bIns="0" anchor="ctr">
-            <a:spAutoFit/>
-          </a:bodyPr>
-          <a:lstStyle/>
-          <a:p>
-            <a:r>
-              <a:rPr sz="1400" b="1" i="0">
-                <a:solidFill>
-                  <a:srgbClr val="FFFFFF"/>
-                </a:solidFill>
-                <a:latin typeface="맑은 고딕"/>
-                <a:ea typeface="맑은 고딕"/>
-              </a:rPr>
-              <a:t>ETRI 협의 필요 항목</a:t>
-            </a:r>
-          </a:p>
-        </p:txBody>
-      </p:sp>
-      <p:sp>
-        <p:nvSpPr>
-          <p:cNvPr id="10" name="Rectangle 9"/>
-          <p:cNvSpPr/>
-          <p:nvPr/>
-        </p:nvSpPr>
-        <p:spPr>
-          <a:xfrm>
-            <a:off x="6126480" y="1417320"/>
-            <a:ext cx="5605272" cy="4663440"/>
-          </a:xfrm>
-          <a:prstGeom prst="rect">
-            <a:avLst/>
-          </a:prstGeom>
-          <a:noFill/>
-          <a:ln w="9525">
-            <a:solidFill>
-              <a:srgbClr val="A6A6A6"/>
-            </a:solidFill>
-          </a:ln>
-          <a:effectLst/>
-        </p:spPr>
-        <p:style>
-          <a:lnRef idx="1">
-            <a:schemeClr val="accent1"/>
-          </a:lnRef>
-          <a:fillRef idx="3">
-            <a:schemeClr val="accent1"/>
-          </a:fillRef>
-          <a:effectRef idx="2">
-            <a:schemeClr val="accent1"/>
-          </a:effectRef>
-          <a:fontRef idx="minor">
-            <a:schemeClr val="lt1"/>
-          </a:fontRef>
-        </p:style>
-        <p:txBody>
-          <a:bodyPr rtlCol="0" anchor="ctr"/>
-          <a:lstStyle/>
-          <a:p>
-            <a:pPr algn="ctr"/>
-          </a:p>
-        </p:txBody>
-      </p:sp>
-      <p:sp>
-        <p:nvSpPr>
-          <p:cNvPr id="11" name="TextBox 10"/>
-          <p:cNvSpPr txBox="1"/>
-          <p:nvPr/>
-        </p:nvSpPr>
-        <p:spPr>
-          <a:xfrm>
-            <a:off x="6236208" y="1472184"/>
-            <a:ext cx="5385816" cy="4553712"/>
-          </a:xfrm>
-          <a:prstGeom prst="rect">
-            <a:avLst/>
-          </a:prstGeom>
-          <a:noFill/>
-        </p:spPr>
-        <p:txBody>
-          <a:bodyPr wrap="square" lIns="0" rIns="0" tIns="0" bIns="0">
-            <a:spAutoFit/>
-          </a:bodyPr>
-          <a:lstStyle/>
-          <a:p>
-            <a:pPr>
-              <a:spcAft>
-                <a:spcPts val="300"/>
-              </a:spcAft>
-            </a:pPr>
-            <a:r>
-              <a:rPr sz="1250" b="0" i="0">
-                <a:solidFill>
-                  <a:srgbClr val="404040"/>
-                </a:solidFill>
-                <a:latin typeface="맑은 고딕"/>
-                <a:ea typeface="맑은 고딕"/>
-              </a:rPr>
-              <a:t>• mTLS 종단 위치 - 리버스 프록시/Ingress 실제 구성 확정</a:t>
-            </a:r>
-          </a:p>
-          <a:p>
-            <a:pPr>
-              <a:spcAft>
-                <a:spcPts val="300"/>
-              </a:spcAft>
-            </a:pPr>
-            <a:r>
-              <a:rPr sz="1250" b="0" i="0">
-                <a:solidFill>
-                  <a:srgbClr val="404040"/>
-                </a:solidFill>
-                <a:latin typeface="맑은 고딕"/>
-                <a:ea typeface="맑은 고딕"/>
-              </a:rPr>
-              <a:t>• 다수 Manager 트래픽 라우팅 - site/group 샤딩 규칙의 실배포 토폴로지 매핑</a:t>
-            </a:r>
-          </a:p>
-          <a:p>
-            <a:pPr>
-              <a:spcAft>
-                <a:spcPts val="300"/>
-              </a:spcAft>
-            </a:pPr>
-            <a:r>
-              <a:rPr sz="1250" b="0" i="0">
-                <a:solidFill>
-                  <a:srgbClr val="404040"/>
-                </a:solidFill>
-                <a:latin typeface="맑은 고딕"/>
-                <a:ea typeface="맑은 고딕"/>
-              </a:rPr>
-              <a:t>• 목표 SLA 재정의 - 현재 Wq p95&lt;1.0s는 임의 설정값, 실제 요구사항 확정 필요</a:t>
-            </a:r>
-          </a:p>
-          <a:p>
-            <a:pPr>
-              <a:spcAft>
-                <a:spcPts val="300"/>
-              </a:spcAft>
-            </a:pPr>
-            <a:r>
-              <a:rPr sz="1250" b="0" i="0">
-                <a:solidFill>
-                  <a:srgbClr val="404040"/>
-                </a:solidFill>
-                <a:latin typeface="맑은 고딕"/>
-                <a:ea typeface="맑은 고딕"/>
-              </a:rPr>
-              <a:t>• 1,000기 규모 실증 테스트베드 - 물리/가상 디바이스 자원 배정</a:t>
-            </a:r>
-          </a:p>
-          <a:p>
-            <a:pPr>
-              <a:spcAft>
-                <a:spcPts val="300"/>
-              </a:spcAft>
-            </a:pPr>
-            <a:r>
-              <a:rPr sz="1250" b="0" i="0">
-                <a:solidFill>
-                  <a:srgbClr val="404040"/>
-                </a:solidFill>
-                <a:latin typeface="맑은 고딕"/>
-                <a:ea typeface="맑은 고딕"/>
-              </a:rPr>
-              <a:t>• 회의 참석: 상명대(서대희 교수·김원빈 연구교수·박건우·김도현) / ETRI(나갑주 팀장·김선형·정진욱)</a:t>
-            </a:r>
-          </a:p>
-        </p:txBody>
-      </p:sp>
-      <p:sp>
-        <p:nvSpPr>
-          <p:cNvPr id="12" name="TextBox 11"/>
+              <a:t>GET /api/v1/telemetry - 수신 데이터와 JWS 검증 여부(verified)·재전송 방지 nonce(jti) 플랫폼 실조회</a:t>
+            </a:r>
+          </a:p>
+        </p:txBody>
+      </p:sp>
+      <p:sp>
+        <p:nvSpPr>
+          <p:cNvPr id="8" name="TextBox 7"/>
           <p:cNvSpPr txBox="1"/>
           <p:nvPr/>
         </p:nvSpPr>
@@ -9811,7 +9623,7 @@
       </p:sp>
       <p:sp>
         <p:nvSpPr>
-          <p:cNvPr id="13" name="TextBox 12"/>
+          <p:cNvPr id="9" name="TextBox 8"/>
           <p:cNvSpPr txBox="1"/>
           <p:nvPr/>
         </p:nvSpPr>
@@ -10629,6 +10441,716 @@
                 <a:ea typeface="맑은 고딕"/>
               </a:rPr>
               <a:t>2</a:t>
+            </a:r>
+          </a:p>
+        </p:txBody>
+      </p:sp>
+    </p:spTree>
+  </p:cSld>
+  <p:clrMapOvr>
+    <a:masterClrMapping/>
+  </p:clrMapOvr>
+</p:sld>
+</file>
+
+<file path=ppt/slides/slide20.xml><?xml version="1.0" encoding="utf-8"?>
+<p:sld xmlns:a="http://schemas.openxmlformats.org/drawingml/2006/main" xmlns:p="http://schemas.openxmlformats.org/presentationml/2006/main" xmlns:r="http://schemas.openxmlformats.org/officeDocument/2006/relationships">
+  <p:cSld>
+    <p:spTree>
+      <p:nvGrpSpPr>
+        <p:cNvPr id="1" name=""/>
+        <p:cNvGrpSpPr/>
+        <p:nvPr/>
+      </p:nvGrpSpPr>
+      <p:grpSpPr/>
+      <p:sp>
+        <p:nvSpPr>
+          <p:cNvPr id="2" name="Rectangle 1"/>
+          <p:cNvSpPr/>
+          <p:nvPr/>
+        </p:nvSpPr>
+        <p:spPr>
+          <a:xfrm>
+            <a:off x="0" y="0"/>
+            <a:ext cx="12191695" cy="868680"/>
+          </a:xfrm>
+          <a:prstGeom prst="rect">
+            <a:avLst/>
+          </a:prstGeom>
+          <a:solidFill>
+            <a:srgbClr val="1F3864"/>
+          </a:solidFill>
+          <a:ln>
+            <a:noFill/>
+          </a:ln>
+          <a:effectLst/>
+        </p:spPr>
+        <p:style>
+          <a:lnRef idx="1">
+            <a:schemeClr val="accent1"/>
+          </a:lnRef>
+          <a:fillRef idx="3">
+            <a:schemeClr val="accent1"/>
+          </a:fillRef>
+          <a:effectRef idx="2">
+            <a:schemeClr val="accent1"/>
+          </a:effectRef>
+          <a:fontRef idx="minor">
+            <a:schemeClr val="lt1"/>
+          </a:fontRef>
+        </p:style>
+        <p:txBody>
+          <a:bodyPr rtlCol="0" anchor="ctr"/>
+          <a:lstStyle/>
+          <a:p>
+            <a:pPr algn="ctr"/>
+          </a:p>
+        </p:txBody>
+      </p:sp>
+      <p:sp>
+        <p:nvSpPr>
+          <p:cNvPr id="3" name="TextBox 2"/>
+          <p:cNvSpPr txBox="1"/>
+          <p:nvPr/>
+        </p:nvSpPr>
+        <p:spPr>
+          <a:xfrm>
+            <a:off x="457200" y="73152"/>
+            <a:ext cx="11277295" cy="731520"/>
+          </a:xfrm>
+          <a:prstGeom prst="rect">
+            <a:avLst/>
+          </a:prstGeom>
+          <a:noFill/>
+        </p:spPr>
+        <p:txBody>
+          <a:bodyPr wrap="none" anchor="ctr" lIns="0" tIns="0">
+            <a:spAutoFit/>
+          </a:bodyPr>
+          <a:lstStyle/>
+          <a:p>
+            <a:r>
+              <a:rPr sz="2600" b="1" i="0">
+                <a:solidFill>
+                  <a:srgbClr val="FFFFFF"/>
+                </a:solidFill>
+                <a:latin typeface="맑은 고딕"/>
+                <a:ea typeface="맑은 고딕"/>
+              </a:rPr>
+              <a:t>향후 계획</a:t>
+            </a:r>
+          </a:p>
+          <a:p>
+            <a:r>
+              <a:rPr sz="1300" b="0" i="0">
+                <a:solidFill>
+                  <a:srgbClr val="8EA9DB"/>
+                </a:solidFill>
+                <a:latin typeface="맑은 고딕"/>
+                <a:ea typeface="맑은 고딕"/>
+              </a:rPr>
+              <a:t>3차년도 이관 항목 및 ETRI 협의 항목</a:t>
+            </a:r>
+          </a:p>
+        </p:txBody>
+      </p:sp>
+      <p:sp>
+        <p:nvSpPr>
+          <p:cNvPr id="4" name="Rectangle 3"/>
+          <p:cNvSpPr/>
+          <p:nvPr/>
+        </p:nvSpPr>
+        <p:spPr>
+          <a:xfrm>
+            <a:off x="457200" y="1051560"/>
+            <a:ext cx="5486400" cy="329184"/>
+          </a:xfrm>
+          <a:prstGeom prst="rect">
+            <a:avLst/>
+          </a:prstGeom>
+          <a:solidFill>
+            <a:srgbClr val="1F3864"/>
+          </a:solidFill>
+          <a:ln>
+            <a:noFill/>
+          </a:ln>
+          <a:effectLst/>
+        </p:spPr>
+        <p:style>
+          <a:lnRef idx="1">
+            <a:schemeClr val="accent1"/>
+          </a:lnRef>
+          <a:fillRef idx="3">
+            <a:schemeClr val="accent1"/>
+          </a:fillRef>
+          <a:effectRef idx="2">
+            <a:schemeClr val="accent1"/>
+          </a:effectRef>
+          <a:fontRef idx="minor">
+            <a:schemeClr val="lt1"/>
+          </a:fontRef>
+        </p:style>
+        <p:txBody>
+          <a:bodyPr rtlCol="0" anchor="ctr"/>
+          <a:lstStyle/>
+          <a:p>
+            <a:pPr algn="ctr"/>
+          </a:p>
+        </p:txBody>
+      </p:sp>
+      <p:sp>
+        <p:nvSpPr>
+          <p:cNvPr id="5" name="TextBox 4"/>
+          <p:cNvSpPr txBox="1"/>
+          <p:nvPr/>
+        </p:nvSpPr>
+        <p:spPr>
+          <a:xfrm>
+            <a:off x="457200" y="1051560"/>
+            <a:ext cx="5486400" cy="329184"/>
+          </a:xfrm>
+          <a:prstGeom prst="rect">
+            <a:avLst/>
+          </a:prstGeom>
+          <a:noFill/>
+        </p:spPr>
+        <p:txBody>
+          <a:bodyPr wrap="none" tIns="0" bIns="0" anchor="ctr">
+            <a:spAutoFit/>
+          </a:bodyPr>
+          <a:lstStyle/>
+          <a:p>
+            <a:r>
+              <a:rPr sz="1400" b="1" i="0">
+                <a:solidFill>
+                  <a:srgbClr val="FFFFFF"/>
+                </a:solidFill>
+                <a:latin typeface="맑은 고딕"/>
+                <a:ea typeface="맑은 고딕"/>
+              </a:rPr>
+              <a:t>3차년도 이관 / 확장 검토 항목</a:t>
+            </a:r>
+          </a:p>
+        </p:txBody>
+      </p:sp>
+      <p:sp>
+        <p:nvSpPr>
+          <p:cNvPr id="6" name="Rectangle 5"/>
+          <p:cNvSpPr/>
+          <p:nvPr/>
+        </p:nvSpPr>
+        <p:spPr>
+          <a:xfrm>
+            <a:off x="457200" y="1417320"/>
+            <a:ext cx="5486400" cy="4663440"/>
+          </a:xfrm>
+          <a:prstGeom prst="rect">
+            <a:avLst/>
+          </a:prstGeom>
+          <a:noFill/>
+          <a:ln w="9525">
+            <a:solidFill>
+              <a:srgbClr val="A6A6A6"/>
+            </a:solidFill>
+          </a:ln>
+          <a:effectLst/>
+        </p:spPr>
+        <p:style>
+          <a:lnRef idx="1">
+            <a:schemeClr val="accent1"/>
+          </a:lnRef>
+          <a:fillRef idx="3">
+            <a:schemeClr val="accent1"/>
+          </a:fillRef>
+          <a:effectRef idx="2">
+            <a:schemeClr val="accent1"/>
+          </a:effectRef>
+          <a:fontRef idx="minor">
+            <a:schemeClr val="lt1"/>
+          </a:fontRef>
+        </p:style>
+        <p:txBody>
+          <a:bodyPr rtlCol="0" anchor="ctr"/>
+          <a:lstStyle/>
+          <a:p>
+            <a:pPr algn="ctr"/>
+          </a:p>
+        </p:txBody>
+      </p:sp>
+      <p:sp>
+        <p:nvSpPr>
+          <p:cNvPr id="7" name="TextBox 6"/>
+          <p:cNvSpPr txBox="1"/>
+          <p:nvPr/>
+        </p:nvSpPr>
+        <p:spPr>
+          <a:xfrm>
+            <a:off x="566928" y="1472184"/>
+            <a:ext cx="5266944" cy="4553712"/>
+          </a:xfrm>
+          <a:prstGeom prst="rect">
+            <a:avLst/>
+          </a:prstGeom>
+          <a:noFill/>
+        </p:spPr>
+        <p:txBody>
+          <a:bodyPr wrap="square" lIns="0" rIns="0" tIns="0" bIns="0">
+            <a:spAutoFit/>
+          </a:bodyPr>
+          <a:lstStyle/>
+          <a:p>
+            <a:pPr>
+              <a:spcAft>
+                <a:spcPts val="300"/>
+              </a:spcAft>
+            </a:pPr>
+            <a:r>
+              <a:rPr sz="1100" b="0" i="0">
+                <a:solidFill>
+                  <a:srgbClr val="404040"/>
+                </a:solidFill>
+                <a:latin typeface="맑은 고딕"/>
+                <a:ea typeface="맑은 고딕"/>
+              </a:rPr>
+              <a:t>• 장애 인지·자동 복구 - 2차년도는 시연용 최소 수준(401 거부+감사)만 제공</a:t>
+            </a:r>
+          </a:p>
+          <a:p>
+            <a:pPr>
+              <a:spcAft>
+                <a:spcPts val="300"/>
+              </a:spcAft>
+            </a:pPr>
+            <a:r>
+              <a:rPr sz="1100" b="0" i="0">
+                <a:solidFill>
+                  <a:srgbClr val="404040"/>
+                </a:solidFill>
+                <a:latin typeface="맑은 고딕"/>
+                <a:ea typeface="맑은 고딕"/>
+              </a:rPr>
+              <a:t>• 프레임워크(KubeEdge/ETRI 플랫폼) 전체 통합 - 3차년도 또는 타 기관 연계</a:t>
+            </a:r>
+          </a:p>
+          <a:p>
+            <a:pPr>
+              <a:spcAft>
+                <a:spcPts val="300"/>
+              </a:spcAft>
+            </a:pPr>
+            <a:r>
+              <a:rPr sz="1100" b="0" i="0">
+                <a:solidFill>
+                  <a:srgbClr val="404040"/>
+                </a:solidFill>
+                <a:latin typeface="맑은 고딕"/>
+                <a:ea typeface="맑은 고딕"/>
+              </a:rPr>
+              <a:t>• 실네트워크/K8s 환경 재측정 (현재 μ=23.76 auth/s는 in-process ASGI 기준)</a:t>
+            </a:r>
+          </a:p>
+          <a:p>
+            <a:pPr>
+              <a:spcAft>
+                <a:spcPts val="300"/>
+              </a:spcAft>
+            </a:pPr>
+            <a:r>
+              <a:rPr sz="1100" b="0" i="0">
+                <a:solidFill>
+                  <a:srgbClr val="404040"/>
+                </a:solidFill>
+                <a:latin typeface="맑은 고딕"/>
+                <a:ea typeface="맑은 고딕"/>
+              </a:rPr>
+              <a:t>• uvicorn 다중 워커 + SQLite -&gt; 다른 저장소 전환 (레플리카 확장 시 락 경합 대응)</a:t>
+            </a:r>
+          </a:p>
+          <a:p>
+            <a:pPr>
+              <a:spcAft>
+                <a:spcPts val="300"/>
+              </a:spcAft>
+            </a:pPr>
+            <a:r>
+              <a:rPr sz="1100" b="0" i="0">
+                <a:solidFill>
+                  <a:srgbClr val="404040"/>
+                </a:solidFill>
+                <a:latin typeface="맑은 고딕"/>
+                <a:ea typeface="맑은 고딕"/>
+              </a:rPr>
+              <a:t>• CA 계층 구조 - 다기관 연동 시 Intermediate CA 필요 여부 결정</a:t>
+            </a:r>
+          </a:p>
+          <a:p>
+            <a:pPr>
+              <a:spcAft>
+                <a:spcPts val="300"/>
+              </a:spcAft>
+            </a:pPr>
+            <a:r>
+              <a:rPr sz="1100" b="0" i="0">
+                <a:solidFill>
+                  <a:srgbClr val="404040"/>
+                </a:solidFill>
+                <a:latin typeface="맑은 고딕"/>
+                <a:ea typeface="맑은 고딕"/>
+              </a:rPr>
+              <a:t>• 인증서/키 영속화 - emptyDir -&gt; PVC 또는 KMS/HSM 연동</a:t>
+            </a:r>
+          </a:p>
+          <a:p>
+            <a:pPr>
+              <a:spcAft>
+                <a:spcPts val="300"/>
+              </a:spcAft>
+            </a:pPr>
+            <a:r>
+              <a:rPr sz="1100" b="0" i="0">
+                <a:solidFill>
+                  <a:srgbClr val="404040"/>
+                </a:solidFill>
+                <a:latin typeface="맑은 고딕"/>
+                <a:ea typeface="맑은 고딕"/>
+              </a:rPr>
+              <a:t>• RabbitMQ 등 비동기 채널 채택 여부, EdgeMesh 도입 검토</a:t>
+            </a:r>
+          </a:p>
+          <a:p>
+            <a:pPr>
+              <a:spcAft>
+                <a:spcPts val="300"/>
+              </a:spcAft>
+            </a:pPr>
+            <a:r>
+              <a:rPr sz="1100" b="0" i="0">
+                <a:solidFill>
+                  <a:srgbClr val="404040"/>
+                </a:solidFill>
+                <a:latin typeface="맑은 고딕"/>
+                <a:ea typeface="맑은 고딕"/>
+              </a:rPr>
+              <a:t>• auth/token 키 소지 증명(서명 nonce 챌린지) - 현재는 인증서 제시만 검증</a:t>
+            </a:r>
+          </a:p>
+          <a:p>
+            <a:pPr>
+              <a:spcAft>
+                <a:spcPts val="300"/>
+              </a:spcAft>
+            </a:pPr>
+            <a:r>
+              <a:rPr sz="1100" b="0" i="0">
+                <a:solidFill>
+                  <a:srgbClr val="404040"/>
+                </a:solidFill>
+                <a:latin typeface="맑은 고딕"/>
+                <a:ea typeface="맑은 고딕"/>
+              </a:rPr>
+              <a:t>• RBAC default-deny 전환 - 미등재 엔드포인트의 암묵적 허용 제거</a:t>
+            </a:r>
+          </a:p>
+        </p:txBody>
+      </p:sp>
+      <p:sp>
+        <p:nvSpPr>
+          <p:cNvPr id="8" name="Rectangle 7"/>
+          <p:cNvSpPr/>
+          <p:nvPr/>
+        </p:nvSpPr>
+        <p:spPr>
+          <a:xfrm>
+            <a:off x="6126480" y="1051560"/>
+            <a:ext cx="5605272" cy="329184"/>
+          </a:xfrm>
+          <a:prstGeom prst="rect">
+            <a:avLst/>
+          </a:prstGeom>
+          <a:solidFill>
+            <a:srgbClr val="1F3864"/>
+          </a:solidFill>
+          <a:ln>
+            <a:noFill/>
+          </a:ln>
+          <a:effectLst/>
+        </p:spPr>
+        <p:style>
+          <a:lnRef idx="1">
+            <a:schemeClr val="accent1"/>
+          </a:lnRef>
+          <a:fillRef idx="3">
+            <a:schemeClr val="accent1"/>
+          </a:fillRef>
+          <a:effectRef idx="2">
+            <a:schemeClr val="accent1"/>
+          </a:effectRef>
+          <a:fontRef idx="minor">
+            <a:schemeClr val="lt1"/>
+          </a:fontRef>
+        </p:style>
+        <p:txBody>
+          <a:bodyPr rtlCol="0" anchor="ctr"/>
+          <a:lstStyle/>
+          <a:p>
+            <a:pPr algn="ctr"/>
+          </a:p>
+        </p:txBody>
+      </p:sp>
+      <p:sp>
+        <p:nvSpPr>
+          <p:cNvPr id="9" name="TextBox 8"/>
+          <p:cNvSpPr txBox="1"/>
+          <p:nvPr/>
+        </p:nvSpPr>
+        <p:spPr>
+          <a:xfrm>
+            <a:off x="6126480" y="1051560"/>
+            <a:ext cx="5605272" cy="329184"/>
+          </a:xfrm>
+          <a:prstGeom prst="rect">
+            <a:avLst/>
+          </a:prstGeom>
+          <a:noFill/>
+        </p:spPr>
+        <p:txBody>
+          <a:bodyPr wrap="none" tIns="0" bIns="0" anchor="ctr">
+            <a:spAutoFit/>
+          </a:bodyPr>
+          <a:lstStyle/>
+          <a:p>
+            <a:r>
+              <a:rPr sz="1400" b="1" i="0">
+                <a:solidFill>
+                  <a:srgbClr val="FFFFFF"/>
+                </a:solidFill>
+                <a:latin typeface="맑은 고딕"/>
+                <a:ea typeface="맑은 고딕"/>
+              </a:rPr>
+              <a:t>ETRI 협의 필요 항목</a:t>
+            </a:r>
+          </a:p>
+        </p:txBody>
+      </p:sp>
+      <p:sp>
+        <p:nvSpPr>
+          <p:cNvPr id="10" name="Rectangle 9"/>
+          <p:cNvSpPr/>
+          <p:nvPr/>
+        </p:nvSpPr>
+        <p:spPr>
+          <a:xfrm>
+            <a:off x="6126480" y="1417320"/>
+            <a:ext cx="5605272" cy="4663440"/>
+          </a:xfrm>
+          <a:prstGeom prst="rect">
+            <a:avLst/>
+          </a:prstGeom>
+          <a:noFill/>
+          <a:ln w="9525">
+            <a:solidFill>
+              <a:srgbClr val="A6A6A6"/>
+            </a:solidFill>
+          </a:ln>
+          <a:effectLst/>
+        </p:spPr>
+        <p:style>
+          <a:lnRef idx="1">
+            <a:schemeClr val="accent1"/>
+          </a:lnRef>
+          <a:fillRef idx="3">
+            <a:schemeClr val="accent1"/>
+          </a:fillRef>
+          <a:effectRef idx="2">
+            <a:schemeClr val="accent1"/>
+          </a:effectRef>
+          <a:fontRef idx="minor">
+            <a:schemeClr val="lt1"/>
+          </a:fontRef>
+        </p:style>
+        <p:txBody>
+          <a:bodyPr rtlCol="0" anchor="ctr"/>
+          <a:lstStyle/>
+          <a:p>
+            <a:pPr algn="ctr"/>
+          </a:p>
+        </p:txBody>
+      </p:sp>
+      <p:sp>
+        <p:nvSpPr>
+          <p:cNvPr id="11" name="TextBox 10"/>
+          <p:cNvSpPr txBox="1"/>
+          <p:nvPr/>
+        </p:nvSpPr>
+        <p:spPr>
+          <a:xfrm>
+            <a:off x="6236208" y="1472184"/>
+            <a:ext cx="5385816" cy="4553712"/>
+          </a:xfrm>
+          <a:prstGeom prst="rect">
+            <a:avLst/>
+          </a:prstGeom>
+          <a:noFill/>
+        </p:spPr>
+        <p:txBody>
+          <a:bodyPr wrap="square" lIns="0" rIns="0" tIns="0" bIns="0">
+            <a:spAutoFit/>
+          </a:bodyPr>
+          <a:lstStyle/>
+          <a:p>
+            <a:pPr>
+              <a:spcAft>
+                <a:spcPts val="300"/>
+              </a:spcAft>
+            </a:pPr>
+            <a:r>
+              <a:rPr sz="1250" b="0" i="0">
+                <a:solidFill>
+                  <a:srgbClr val="404040"/>
+                </a:solidFill>
+                <a:latin typeface="맑은 고딕"/>
+                <a:ea typeface="맑은 고딕"/>
+              </a:rPr>
+              <a:t>• mTLS 종단 위치 - 리버스 프록시/Ingress 실제 구성 확정</a:t>
+            </a:r>
+          </a:p>
+          <a:p>
+            <a:pPr>
+              <a:spcAft>
+                <a:spcPts val="300"/>
+              </a:spcAft>
+            </a:pPr>
+            <a:r>
+              <a:rPr sz="1250" b="0" i="0">
+                <a:solidFill>
+                  <a:srgbClr val="404040"/>
+                </a:solidFill>
+                <a:latin typeface="맑은 고딕"/>
+                <a:ea typeface="맑은 고딕"/>
+              </a:rPr>
+              <a:t>• 다수 Manager 트래픽 라우팅 - site/group 샤딩 규칙의 실배포 토폴로지 매핑</a:t>
+            </a:r>
+          </a:p>
+          <a:p>
+            <a:pPr>
+              <a:spcAft>
+                <a:spcPts val="300"/>
+              </a:spcAft>
+            </a:pPr>
+            <a:r>
+              <a:rPr sz="1250" b="0" i="0">
+                <a:solidFill>
+                  <a:srgbClr val="404040"/>
+                </a:solidFill>
+                <a:latin typeface="맑은 고딕"/>
+                <a:ea typeface="맑은 고딕"/>
+              </a:rPr>
+              <a:t>• 목표 SLA 재정의 - 현재 Wq p95&lt;1.0s는 임의 설정값, 실제 요구사항 확정 필요</a:t>
+            </a:r>
+          </a:p>
+          <a:p>
+            <a:pPr>
+              <a:spcAft>
+                <a:spcPts val="300"/>
+              </a:spcAft>
+            </a:pPr>
+            <a:r>
+              <a:rPr sz="1250" b="0" i="0">
+                <a:solidFill>
+                  <a:srgbClr val="404040"/>
+                </a:solidFill>
+                <a:latin typeface="맑은 고딕"/>
+                <a:ea typeface="맑은 고딕"/>
+              </a:rPr>
+              <a:t>• 1,000기 규모 실증 테스트베드 - 물리/가상 디바이스 자원 배정</a:t>
+            </a:r>
+          </a:p>
+          <a:p>
+            <a:pPr>
+              <a:spcAft>
+                <a:spcPts val="300"/>
+              </a:spcAft>
+            </a:pPr>
+            <a:r>
+              <a:rPr sz="1250" b="0" i="0">
+                <a:solidFill>
+                  <a:srgbClr val="404040"/>
+                </a:solidFill>
+                <a:latin typeface="맑은 고딕"/>
+                <a:ea typeface="맑은 고딕"/>
+              </a:rPr>
+              <a:t>• 회의 참석: 상명대(서대희 교수·김원빈 연구교수·박건우·김도현) / ETRI(나갑주 팀장·김선형·정진욱)</a:t>
+            </a:r>
+          </a:p>
+        </p:txBody>
+      </p:sp>
+      <p:sp>
+        <p:nvSpPr>
+          <p:cNvPr id="12" name="TextBox 11"/>
+          <p:cNvSpPr txBox="1"/>
+          <p:nvPr/>
+        </p:nvSpPr>
+        <p:spPr>
+          <a:xfrm>
+            <a:off x="457200" y="6547104"/>
+            <a:ext cx="7315200" cy="274320"/>
+          </a:xfrm>
+          <a:prstGeom prst="rect">
+            <a:avLst/>
+          </a:prstGeom>
+          <a:noFill/>
+        </p:spPr>
+        <p:txBody>
+          <a:bodyPr wrap="none" lIns="0" tIns="0">
+            <a:spAutoFit/>
+          </a:bodyPr>
+          <a:lstStyle/>
+          <a:p>
+            <a:r>
+              <a:rPr sz="900" b="0" i="0">
+                <a:solidFill>
+                  <a:srgbClr val="A6A6A6"/>
+                </a:solidFill>
+                <a:latin typeface="맑은 고딕"/>
+                <a:ea typeface="맑은 고딕"/>
+              </a:rPr>
+              <a:t>ETRI AI_EDGE 2차년도 - 상명대학교 보안 코어 모듈  |  2026-08-03</a:t>
+            </a:r>
+          </a:p>
+        </p:txBody>
+      </p:sp>
+      <p:sp>
+        <p:nvSpPr>
+          <p:cNvPr id="13" name="TextBox 12"/>
+          <p:cNvSpPr txBox="1"/>
+          <p:nvPr/>
+        </p:nvSpPr>
+        <p:spPr>
+          <a:xfrm>
+            <a:off x="11277295" y="6547104"/>
+            <a:ext cx="548640" cy="274320"/>
+          </a:xfrm>
+          <a:prstGeom prst="rect">
+            <a:avLst/>
+          </a:prstGeom>
+          <a:noFill/>
+        </p:spPr>
+        <p:txBody>
+          <a:bodyPr wrap="none" lIns="0" tIns="0">
+            <a:spAutoFit/>
+          </a:bodyPr>
+          <a:lstStyle/>
+          <a:p>
+            <a:pPr algn="r"/>
+            <a:r>
+              <a:rPr sz="900" b="0" i="0">
+                <a:solidFill>
+                  <a:srgbClr val="A6A6A6"/>
+                </a:solidFill>
+                <a:latin typeface="맑은 고딕"/>
+                <a:ea typeface="맑은 고딕"/>
+              </a:rPr>
+              <a:t>20</a:t>
             </a:r>
           </a:p>
         </p:txBody>
